--- a/reports/documents/smart_search_presentation.pptx
+++ b/reports/documents/smart_search_presentation.pptx
@@ -2,24 +2,28 @@
 <file path=ppt/presentation.xml><?xml version="1.0" encoding="utf-8"?>
 <p:presentation xmlns:a="http://schemas.openxmlformats.org/drawingml/2006/main" xmlns:r="http://schemas.openxmlformats.org/officeDocument/2006/relationships" xmlns:p="http://schemas.openxmlformats.org/presentationml/2006/main" saveSubsetFonts="1" autoCompressPictures="0">
   <p:sldMasterIdLst>
-    <p:sldMasterId id="2147483648" r:id="rId1"/>
+    <p:sldMasterId id="2147483672" r:id="rId1"/>
   </p:sldMasterIdLst>
   <p:sldIdLst>
-    <p:sldId id="256" r:id="rId7"/>
-    <p:sldId id="257" r:id="rId8"/>
-    <p:sldId id="258" r:id="rId9"/>
-    <p:sldId id="259" r:id="rId10"/>
-    <p:sldId id="260" r:id="rId11"/>
-    <p:sldId id="261" r:id="rId12"/>
-    <p:sldId id="262" r:id="rId13"/>
-    <p:sldId id="263" r:id="rId14"/>
-    <p:sldId id="264" r:id="rId15"/>
-    <p:sldId id="265" r:id="rId16"/>
-    <p:sldId id="266" r:id="rId17"/>
-    <p:sldId id="267" r:id="rId18"/>
-    <p:sldId id="268" r:id="rId19"/>
+    <p:sldId id="256" r:id="rId2"/>
+    <p:sldId id="257" r:id="rId3"/>
+    <p:sldId id="258" r:id="rId4"/>
+    <p:sldId id="259" r:id="rId5"/>
+    <p:sldId id="260" r:id="rId6"/>
+    <p:sldId id="261" r:id="rId7"/>
+    <p:sldId id="262" r:id="rId8"/>
+    <p:sldId id="263" r:id="rId9"/>
+    <p:sldId id="264" r:id="rId10"/>
+    <p:sldId id="265" r:id="rId11"/>
+    <p:sldId id="266" r:id="rId12"/>
+    <p:sldId id="270" r:id="rId13"/>
+    <p:sldId id="271" r:id="rId14"/>
+    <p:sldId id="272" r:id="rId15"/>
+    <p:sldId id="273" r:id="rId16"/>
+    <p:sldId id="267" r:id="rId17"/>
+    <p:sldId id="268" r:id="rId18"/>
   </p:sldIdLst>
-  <p:sldSz cx="12188952" cy="6858000" type="screen4x3"/>
+  <p:sldSz cx="12188825" cy="6858000"/>
   <p:notesSz cx="6858000" cy="9144000"/>
   <p:defaultTextStyle>
     <a:defPPr>
@@ -116,6 +120,22 @@
       </a:defRPr>
     </a:lvl9pPr>
   </p:defaultTextStyle>
+  <p:extLst>
+    <p:ext uri="{EFAFB233-063F-42B5-8137-9DF3F51BA10A}">
+      <p15:sldGuideLst xmlns:p15="http://schemas.microsoft.com/office/powerpoint/2012/main">
+        <p15:guide id="1" orient="horz" pos="2160">
+          <p15:clr>
+            <a:srgbClr val="A4A3A4"/>
+          </p15:clr>
+        </p15:guide>
+        <p15:guide id="2" pos="2880">
+          <p15:clr>
+            <a:srgbClr val="A4A3A4"/>
+          </p15:clr>
+        </p15:guide>
+      </p15:sldGuideLst>
+    </p:ext>
+  </p:extLst>
 </p:presentation>
 </file>
 
@@ -148,19 +168,23 @@
         </p:nvSpPr>
         <p:spPr>
           <a:xfrm>
-            <a:off x="685800" y="2130425"/>
-            <a:ext cx="7772400" cy="1470025"/>
-          </a:xfrm>
-        </p:spPr>
-        <p:txBody>
-          <a:bodyPr/>
-          <a:lstStyle/>
-          <a:p>
-            <a:r>
-              <a:rPr lang="en-US" smtClean="0"/>
+            <a:off x="1523603" y="1122363"/>
+            <a:ext cx="9141619" cy="2387600"/>
+          </a:xfrm>
+        </p:spPr>
+        <p:txBody>
+          <a:bodyPr anchor="b"/>
+          <a:lstStyle>
+            <a:lvl1pPr algn="ctr">
+              <a:defRPr sz="5998"/>
+            </a:lvl1pPr>
+          </a:lstStyle>
+          <a:p>
+            <a:r>
+              <a:rPr lang="en-US"/>
               <a:t>Click to edit Master title style</a:t>
             </a:r>
-            <a:endParaRPr lang="en-US"/>
+            <a:endParaRPr lang="en-US" dirty="0"/>
           </a:p>
         </p:txBody>
       </p:sp>
@@ -176,8 +200,8 @@
         </p:nvSpPr>
         <p:spPr>
           <a:xfrm>
-            <a:off x="1371600" y="3886200"/>
-            <a:ext cx="6400800" cy="1752600"/>
+            <a:off x="1523603" y="3602038"/>
+            <a:ext cx="9141619" cy="1655762"/>
           </a:xfrm>
         </p:spPr>
         <p:txBody>
@@ -185,101 +209,47 @@
           <a:lstStyle>
             <a:lvl1pPr marL="0" indent="0" algn="ctr">
               <a:buNone/>
-              <a:defRPr>
-                <a:solidFill>
-                  <a:schemeClr val="tx1">
-                    <a:tint val="75000"/>
-                  </a:schemeClr>
-                </a:solidFill>
-              </a:defRPr>
+              <a:defRPr sz="2399"/>
             </a:lvl1pPr>
-            <a:lvl2pPr marL="457200" indent="0" algn="ctr">
+            <a:lvl2pPr marL="457063" indent="0" algn="ctr">
               <a:buNone/>
-              <a:defRPr>
-                <a:solidFill>
-                  <a:schemeClr val="tx1">
-                    <a:tint val="75000"/>
-                  </a:schemeClr>
-                </a:solidFill>
-              </a:defRPr>
+              <a:defRPr sz="1999"/>
             </a:lvl2pPr>
-            <a:lvl3pPr marL="914400" indent="0" algn="ctr">
+            <a:lvl3pPr marL="914126" indent="0" algn="ctr">
               <a:buNone/>
-              <a:defRPr>
-                <a:solidFill>
-                  <a:schemeClr val="tx1">
-                    <a:tint val="75000"/>
-                  </a:schemeClr>
-                </a:solidFill>
-              </a:defRPr>
+              <a:defRPr sz="1799"/>
             </a:lvl3pPr>
-            <a:lvl4pPr marL="1371600" indent="0" algn="ctr">
+            <a:lvl4pPr marL="1371189" indent="0" algn="ctr">
               <a:buNone/>
-              <a:defRPr>
-                <a:solidFill>
-                  <a:schemeClr val="tx1">
-                    <a:tint val="75000"/>
-                  </a:schemeClr>
-                </a:solidFill>
-              </a:defRPr>
+              <a:defRPr sz="1600"/>
             </a:lvl4pPr>
-            <a:lvl5pPr marL="1828800" indent="0" algn="ctr">
+            <a:lvl5pPr marL="1828251" indent="0" algn="ctr">
               <a:buNone/>
-              <a:defRPr>
-                <a:solidFill>
-                  <a:schemeClr val="tx1">
-                    <a:tint val="75000"/>
-                  </a:schemeClr>
-                </a:solidFill>
-              </a:defRPr>
+              <a:defRPr sz="1600"/>
             </a:lvl5pPr>
-            <a:lvl6pPr marL="2286000" indent="0" algn="ctr">
+            <a:lvl6pPr marL="2285314" indent="0" algn="ctr">
               <a:buNone/>
-              <a:defRPr>
-                <a:solidFill>
-                  <a:schemeClr val="tx1">
-                    <a:tint val="75000"/>
-                  </a:schemeClr>
-                </a:solidFill>
-              </a:defRPr>
+              <a:defRPr sz="1600"/>
             </a:lvl6pPr>
-            <a:lvl7pPr marL="2743200" indent="0" algn="ctr">
+            <a:lvl7pPr marL="2742377" indent="0" algn="ctr">
               <a:buNone/>
-              <a:defRPr>
-                <a:solidFill>
-                  <a:schemeClr val="tx1">
-                    <a:tint val="75000"/>
-                  </a:schemeClr>
-                </a:solidFill>
-              </a:defRPr>
+              <a:defRPr sz="1600"/>
             </a:lvl7pPr>
-            <a:lvl8pPr marL="3200400" indent="0" algn="ctr">
+            <a:lvl8pPr marL="3199440" indent="0" algn="ctr">
               <a:buNone/>
-              <a:defRPr>
-                <a:solidFill>
-                  <a:schemeClr val="tx1">
-                    <a:tint val="75000"/>
-                  </a:schemeClr>
-                </a:solidFill>
-              </a:defRPr>
+              <a:defRPr sz="1600"/>
             </a:lvl8pPr>
-            <a:lvl9pPr marL="3657600" indent="0" algn="ctr">
+            <a:lvl9pPr marL="3656503" indent="0" algn="ctr">
               <a:buNone/>
-              <a:defRPr>
-                <a:solidFill>
-                  <a:schemeClr val="tx1">
-                    <a:tint val="75000"/>
-                  </a:schemeClr>
-                </a:solidFill>
-              </a:defRPr>
+              <a:defRPr sz="1600"/>
             </a:lvl9pPr>
           </a:lstStyle>
           <a:p>
             <a:r>
-              <a:rPr lang="en-US" smtClean="0"/>
+              <a:rPr lang="en-US"/>
               <a:t>Click to edit Master subtitle style</a:t>
             </a:r>
-            <a:endParaRPr lang="en-US"/>
+            <a:endParaRPr lang="en-US" dirty="0"/>
           </a:p>
         </p:txBody>
       </p:sp>
@@ -300,7 +270,7 @@
           <a:p>
             <a:fld id="{5BCAD085-E8A6-8845-BD4E-CB4CCA059FC4}" type="datetimeFigureOut">
               <a:rPr lang="en-US" smtClean="0"/>
-              <a:t>1/27/13</a:t>
+              <a:t>6/15/26</a:t>
             </a:fld>
             <a:endParaRPr lang="en-US"/>
           </a:p>
@@ -351,7 +321,7 @@
     </p:spTree>
     <p:extLst>
       <p:ext uri="{BB962C8B-B14F-4D97-AF65-F5344CB8AC3E}">
-        <p14:creationId xmlns:p14="http://schemas.microsoft.com/office/powerpoint/2010/main" val="3168075583"/>
+        <p14:creationId xmlns:p14="http://schemas.microsoft.com/office/powerpoint/2010/main" val="847599307"/>
       </p:ext>
     </p:extLst>
   </p:cSld>
@@ -394,10 +364,10 @@
           <a:lstStyle/>
           <a:p>
             <a:r>
-              <a:rPr lang="en-US" smtClean="0"/>
+              <a:rPr lang="en-US"/>
               <a:t>Click to edit Master title style</a:t>
             </a:r>
-            <a:endParaRPr lang="en-US"/>
+            <a:endParaRPr lang="en-US" dirty="0"/>
           </a:p>
         </p:txBody>
       </p:sp>
@@ -418,38 +388,38 @@
           <a:p>
             <a:pPr lvl="0"/>
             <a:r>
-              <a:rPr lang="en-US" smtClean="0"/>
+              <a:rPr lang="en-US"/>
               <a:t>Click to edit Master text styles</a:t>
             </a:r>
           </a:p>
           <a:p>
             <a:pPr lvl="1"/>
             <a:r>
-              <a:rPr lang="en-US" smtClean="0"/>
+              <a:rPr lang="en-US"/>
               <a:t>Second level</a:t>
             </a:r>
           </a:p>
           <a:p>
             <a:pPr lvl="2"/>
             <a:r>
-              <a:rPr lang="en-US" smtClean="0"/>
+              <a:rPr lang="en-US"/>
               <a:t>Third level</a:t>
             </a:r>
           </a:p>
           <a:p>
             <a:pPr lvl="3"/>
             <a:r>
-              <a:rPr lang="en-US" smtClean="0"/>
+              <a:rPr lang="en-US"/>
               <a:t>Fourth level</a:t>
             </a:r>
           </a:p>
           <a:p>
             <a:pPr lvl="4"/>
             <a:r>
-              <a:rPr lang="en-US" smtClean="0"/>
+              <a:rPr lang="en-US"/>
               <a:t>Fifth level</a:t>
             </a:r>
-            <a:endParaRPr lang="en-US"/>
+            <a:endParaRPr lang="en-US" dirty="0"/>
           </a:p>
         </p:txBody>
       </p:sp>
@@ -470,7 +440,7 @@
           <a:p>
             <a:fld id="{5BCAD085-E8A6-8845-BD4E-CB4CCA059FC4}" type="datetimeFigureOut">
               <a:rPr lang="en-US" smtClean="0"/>
-              <a:t>1/27/13</a:t>
+              <a:t>6/15/26</a:t>
             </a:fld>
             <a:endParaRPr lang="en-US"/>
           </a:p>
@@ -521,7 +491,7 @@
     </p:spTree>
     <p:extLst>
       <p:ext uri="{BB962C8B-B14F-4D97-AF65-F5344CB8AC3E}">
-        <p14:creationId xmlns:p14="http://schemas.microsoft.com/office/powerpoint/2010/main" val="2910927964"/>
+        <p14:creationId xmlns:p14="http://schemas.microsoft.com/office/powerpoint/2010/main" val="1498484576"/>
       </p:ext>
     </p:extLst>
   </p:cSld>
@@ -560,8 +530,8 @@
         </p:nvSpPr>
         <p:spPr>
           <a:xfrm>
-            <a:off x="6629400" y="274638"/>
-            <a:ext cx="2057400" cy="5851525"/>
+            <a:off x="8722628" y="365125"/>
+            <a:ext cx="2628215" cy="5811838"/>
           </a:xfrm>
         </p:spPr>
         <p:txBody>
@@ -569,10 +539,10 @@
           <a:lstStyle/>
           <a:p>
             <a:r>
-              <a:rPr lang="en-US" smtClean="0"/>
+              <a:rPr lang="en-US"/>
               <a:t>Click to edit Master title style</a:t>
             </a:r>
-            <a:endParaRPr lang="en-US"/>
+            <a:endParaRPr lang="en-US" dirty="0"/>
           </a:p>
         </p:txBody>
       </p:sp>
@@ -588,8 +558,8 @@
         </p:nvSpPr>
         <p:spPr>
           <a:xfrm>
-            <a:off x="457200" y="274638"/>
-            <a:ext cx="6019800" cy="5851525"/>
+            <a:off x="837982" y="365125"/>
+            <a:ext cx="7732286" cy="5811838"/>
           </a:xfrm>
         </p:spPr>
         <p:txBody>
@@ -598,38 +568,38 @@
           <a:p>
             <a:pPr lvl="0"/>
             <a:r>
-              <a:rPr lang="en-US" smtClean="0"/>
+              <a:rPr lang="en-US"/>
               <a:t>Click to edit Master text styles</a:t>
             </a:r>
           </a:p>
           <a:p>
             <a:pPr lvl="1"/>
             <a:r>
-              <a:rPr lang="en-US" smtClean="0"/>
+              <a:rPr lang="en-US"/>
               <a:t>Second level</a:t>
             </a:r>
           </a:p>
           <a:p>
             <a:pPr lvl="2"/>
             <a:r>
-              <a:rPr lang="en-US" smtClean="0"/>
+              <a:rPr lang="en-US"/>
               <a:t>Third level</a:t>
             </a:r>
           </a:p>
           <a:p>
             <a:pPr lvl="3"/>
             <a:r>
-              <a:rPr lang="en-US" smtClean="0"/>
+              <a:rPr lang="en-US"/>
               <a:t>Fourth level</a:t>
             </a:r>
           </a:p>
           <a:p>
             <a:pPr lvl="4"/>
             <a:r>
-              <a:rPr lang="en-US" smtClean="0"/>
+              <a:rPr lang="en-US"/>
               <a:t>Fifth level</a:t>
             </a:r>
-            <a:endParaRPr lang="en-US"/>
+            <a:endParaRPr lang="en-US" dirty="0"/>
           </a:p>
         </p:txBody>
       </p:sp>
@@ -650,7 +620,7 @@
           <a:p>
             <a:fld id="{5BCAD085-E8A6-8845-BD4E-CB4CCA059FC4}" type="datetimeFigureOut">
               <a:rPr lang="en-US" smtClean="0"/>
-              <a:t>1/27/13</a:t>
+              <a:t>6/15/26</a:t>
             </a:fld>
             <a:endParaRPr lang="en-US"/>
           </a:p>
@@ -701,7 +671,7 @@
     </p:spTree>
     <p:extLst>
       <p:ext uri="{BB962C8B-B14F-4D97-AF65-F5344CB8AC3E}">
-        <p14:creationId xmlns:p14="http://schemas.microsoft.com/office/powerpoint/2010/main" val="3612223792"/>
+        <p14:creationId xmlns:p14="http://schemas.microsoft.com/office/powerpoint/2010/main" val="3429982164"/>
       </p:ext>
     </p:extLst>
   </p:cSld>
@@ -744,10 +714,10 @@
           <a:lstStyle/>
           <a:p>
             <a:r>
-              <a:rPr lang="en-US" smtClean="0"/>
+              <a:rPr lang="en-US"/>
               <a:t>Click to edit Master title style</a:t>
             </a:r>
-            <a:endParaRPr lang="en-US"/>
+            <a:endParaRPr lang="en-US" dirty="0"/>
           </a:p>
         </p:txBody>
       </p:sp>
@@ -768,38 +738,38 @@
           <a:p>
             <a:pPr lvl="0"/>
             <a:r>
-              <a:rPr lang="en-US" smtClean="0"/>
+              <a:rPr lang="en-US"/>
               <a:t>Click to edit Master text styles</a:t>
             </a:r>
           </a:p>
           <a:p>
             <a:pPr lvl="1"/>
             <a:r>
-              <a:rPr lang="en-US" smtClean="0"/>
+              <a:rPr lang="en-US"/>
               <a:t>Second level</a:t>
             </a:r>
           </a:p>
           <a:p>
             <a:pPr lvl="2"/>
             <a:r>
-              <a:rPr lang="en-US" smtClean="0"/>
+              <a:rPr lang="en-US"/>
               <a:t>Third level</a:t>
             </a:r>
           </a:p>
           <a:p>
             <a:pPr lvl="3"/>
             <a:r>
-              <a:rPr lang="en-US" smtClean="0"/>
+              <a:rPr lang="en-US"/>
               <a:t>Fourth level</a:t>
             </a:r>
           </a:p>
           <a:p>
             <a:pPr lvl="4"/>
             <a:r>
-              <a:rPr lang="en-US" smtClean="0"/>
+              <a:rPr lang="en-US"/>
               <a:t>Fifth level</a:t>
             </a:r>
-            <a:endParaRPr lang="en-US"/>
+            <a:endParaRPr lang="en-US" dirty="0"/>
           </a:p>
         </p:txBody>
       </p:sp>
@@ -820,7 +790,7 @@
           <a:p>
             <a:fld id="{5BCAD085-E8A6-8845-BD4E-CB4CCA059FC4}" type="datetimeFigureOut">
               <a:rPr lang="en-US" smtClean="0"/>
-              <a:t>1/27/13</a:t>
+              <a:t>6/15/26</a:t>
             </a:fld>
             <a:endParaRPr lang="en-US"/>
           </a:p>
@@ -871,7 +841,7 @@
     </p:spTree>
     <p:extLst>
       <p:ext uri="{BB962C8B-B14F-4D97-AF65-F5344CB8AC3E}">
-        <p14:creationId xmlns:p14="http://schemas.microsoft.com/office/powerpoint/2010/main" val="2614314258"/>
+        <p14:creationId xmlns:p14="http://schemas.microsoft.com/office/powerpoint/2010/main" val="3718493837"/>
       </p:ext>
     </p:extLst>
   </p:cSld>
@@ -910,23 +880,23 @@
         </p:nvSpPr>
         <p:spPr>
           <a:xfrm>
-            <a:off x="722313" y="4406900"/>
-            <a:ext cx="7772400" cy="1362075"/>
-          </a:xfrm>
-        </p:spPr>
-        <p:txBody>
-          <a:bodyPr anchor="t"/>
+            <a:off x="831633" y="1709738"/>
+            <a:ext cx="10512862" cy="2852737"/>
+          </a:xfrm>
+        </p:spPr>
+        <p:txBody>
+          <a:bodyPr anchor="b"/>
           <a:lstStyle>
-            <a:lvl1pPr algn="l">
-              <a:defRPr sz="4000" b="1" cap="all"/>
+            <a:lvl1pPr>
+              <a:defRPr sz="5998"/>
             </a:lvl1pPr>
           </a:lstStyle>
           <a:p>
             <a:r>
-              <a:rPr lang="en-US" smtClean="0"/>
+              <a:rPr lang="en-US"/>
               <a:t>Click to edit Master title style</a:t>
             </a:r>
-            <a:endParaRPr lang="en-US"/>
+            <a:endParaRPr lang="en-US" dirty="0"/>
           </a:p>
         </p:txBody>
       </p:sp>
@@ -942,16 +912,16 @@
         </p:nvSpPr>
         <p:spPr>
           <a:xfrm>
-            <a:off x="722313" y="2906713"/>
-            <a:ext cx="7772400" cy="1500187"/>
-          </a:xfrm>
-        </p:spPr>
-        <p:txBody>
-          <a:bodyPr anchor="b"/>
+            <a:off x="831633" y="4589464"/>
+            <a:ext cx="10512862" cy="1500187"/>
+          </a:xfrm>
+        </p:spPr>
+        <p:txBody>
+          <a:bodyPr/>
           <a:lstStyle>
             <a:lvl1pPr marL="0" indent="0">
               <a:buNone/>
-              <a:defRPr sz="2000">
+              <a:defRPr sz="2399">
                 <a:solidFill>
                   <a:schemeClr val="tx1">
                     <a:tint val="75000"/>
@@ -959,9 +929,9 @@
                 </a:solidFill>
               </a:defRPr>
             </a:lvl1pPr>
-            <a:lvl2pPr marL="457200" indent="0">
+            <a:lvl2pPr marL="457063" indent="0">
               <a:buNone/>
-              <a:defRPr sz="1800">
+              <a:defRPr sz="1999">
                 <a:solidFill>
                   <a:schemeClr val="tx1">
                     <a:tint val="75000"/>
@@ -969,9 +939,9 @@
                 </a:solidFill>
               </a:defRPr>
             </a:lvl2pPr>
-            <a:lvl3pPr marL="914400" indent="0">
+            <a:lvl3pPr marL="914126" indent="0">
               <a:buNone/>
-              <a:defRPr sz="1600">
+              <a:defRPr sz="1799">
                 <a:solidFill>
                   <a:schemeClr val="tx1">
                     <a:tint val="75000"/>
@@ -979,9 +949,9 @@
                 </a:solidFill>
               </a:defRPr>
             </a:lvl3pPr>
-            <a:lvl4pPr marL="1371600" indent="0">
+            <a:lvl4pPr marL="1371189" indent="0">
               <a:buNone/>
-              <a:defRPr sz="1400">
+              <a:defRPr sz="1600">
                 <a:solidFill>
                   <a:schemeClr val="tx1">
                     <a:tint val="75000"/>
@@ -989,9 +959,9 @@
                 </a:solidFill>
               </a:defRPr>
             </a:lvl4pPr>
-            <a:lvl5pPr marL="1828800" indent="0">
+            <a:lvl5pPr marL="1828251" indent="0">
               <a:buNone/>
-              <a:defRPr sz="1400">
+              <a:defRPr sz="1600">
                 <a:solidFill>
                   <a:schemeClr val="tx1">
                     <a:tint val="75000"/>
@@ -999,9 +969,9 @@
                 </a:solidFill>
               </a:defRPr>
             </a:lvl5pPr>
-            <a:lvl6pPr marL="2286000" indent="0">
+            <a:lvl6pPr marL="2285314" indent="0">
               <a:buNone/>
-              <a:defRPr sz="1400">
+              <a:defRPr sz="1600">
                 <a:solidFill>
                   <a:schemeClr val="tx1">
                     <a:tint val="75000"/>
@@ -1009,9 +979,9 @@
                 </a:solidFill>
               </a:defRPr>
             </a:lvl6pPr>
-            <a:lvl7pPr marL="2743200" indent="0">
+            <a:lvl7pPr marL="2742377" indent="0">
               <a:buNone/>
-              <a:defRPr sz="1400">
+              <a:defRPr sz="1600">
                 <a:solidFill>
                   <a:schemeClr val="tx1">
                     <a:tint val="75000"/>
@@ -1019,9 +989,9 @@
                 </a:solidFill>
               </a:defRPr>
             </a:lvl7pPr>
-            <a:lvl8pPr marL="3200400" indent="0">
+            <a:lvl8pPr marL="3199440" indent="0">
               <a:buNone/>
-              <a:defRPr sz="1400">
+              <a:defRPr sz="1600">
                 <a:solidFill>
                   <a:schemeClr val="tx1">
                     <a:tint val="75000"/>
@@ -1029,9 +999,9 @@
                 </a:solidFill>
               </a:defRPr>
             </a:lvl8pPr>
-            <a:lvl9pPr marL="3657600" indent="0">
+            <a:lvl9pPr marL="3656503" indent="0">
               <a:buNone/>
-              <a:defRPr sz="1400">
+              <a:defRPr sz="1600">
                 <a:solidFill>
                   <a:schemeClr val="tx1">
                     <a:tint val="75000"/>
@@ -1043,7 +1013,7 @@
           <a:p>
             <a:pPr lvl="0"/>
             <a:r>
-              <a:rPr lang="en-US" smtClean="0"/>
+              <a:rPr lang="en-US"/>
               <a:t>Click to edit Master text styles</a:t>
             </a:r>
           </a:p>
@@ -1066,7 +1036,7 @@
           <a:p>
             <a:fld id="{5BCAD085-E8A6-8845-BD4E-CB4CCA059FC4}" type="datetimeFigureOut">
               <a:rPr lang="en-US" smtClean="0"/>
-              <a:t>1/27/13</a:t>
+              <a:t>6/15/26</a:t>
             </a:fld>
             <a:endParaRPr lang="en-US"/>
           </a:p>
@@ -1117,7 +1087,7 @@
     </p:spTree>
     <p:extLst>
       <p:ext uri="{BB962C8B-B14F-4D97-AF65-F5344CB8AC3E}">
-        <p14:creationId xmlns:p14="http://schemas.microsoft.com/office/powerpoint/2010/main" val="960648375"/>
+        <p14:creationId xmlns:p14="http://schemas.microsoft.com/office/powerpoint/2010/main" val="2100370878"/>
       </p:ext>
     </p:extLst>
   </p:cSld>
@@ -1160,10 +1130,10 @@
           <a:lstStyle/>
           <a:p>
             <a:r>
-              <a:rPr lang="en-US" smtClean="0"/>
+              <a:rPr lang="en-US"/>
               <a:t>Click to edit Master title style</a:t>
             </a:r>
-            <a:endParaRPr lang="en-US"/>
+            <a:endParaRPr lang="en-US" dirty="0"/>
           </a:p>
         </p:txBody>
       </p:sp>
@@ -1179,76 +1149,48 @@
         </p:nvSpPr>
         <p:spPr>
           <a:xfrm>
-            <a:off x="457200" y="1600200"/>
-            <a:ext cx="4038600" cy="4525963"/>
+            <a:off x="837982" y="1825625"/>
+            <a:ext cx="5180251" cy="4351338"/>
           </a:xfrm>
         </p:spPr>
         <p:txBody>
           <a:bodyPr/>
-          <a:lstStyle>
-            <a:lvl1pPr>
-              <a:defRPr sz="2800"/>
-            </a:lvl1pPr>
-            <a:lvl2pPr>
-              <a:defRPr sz="2400"/>
-            </a:lvl2pPr>
-            <a:lvl3pPr>
-              <a:defRPr sz="2000"/>
-            </a:lvl3pPr>
-            <a:lvl4pPr>
-              <a:defRPr sz="1800"/>
-            </a:lvl4pPr>
-            <a:lvl5pPr>
-              <a:defRPr sz="1800"/>
-            </a:lvl5pPr>
-            <a:lvl6pPr>
-              <a:defRPr sz="1800"/>
-            </a:lvl6pPr>
-            <a:lvl7pPr>
-              <a:defRPr sz="1800"/>
-            </a:lvl7pPr>
-            <a:lvl8pPr>
-              <a:defRPr sz="1800"/>
-            </a:lvl8pPr>
-            <a:lvl9pPr>
-              <a:defRPr sz="1800"/>
-            </a:lvl9pPr>
-          </a:lstStyle>
+          <a:lstStyle/>
           <a:p>
             <a:pPr lvl="0"/>
             <a:r>
-              <a:rPr lang="en-US" smtClean="0"/>
+              <a:rPr lang="en-US"/>
               <a:t>Click to edit Master text styles</a:t>
             </a:r>
           </a:p>
           <a:p>
             <a:pPr lvl="1"/>
             <a:r>
-              <a:rPr lang="en-US" smtClean="0"/>
+              <a:rPr lang="en-US"/>
               <a:t>Second level</a:t>
             </a:r>
           </a:p>
           <a:p>
             <a:pPr lvl="2"/>
             <a:r>
-              <a:rPr lang="en-US" smtClean="0"/>
+              <a:rPr lang="en-US"/>
               <a:t>Third level</a:t>
             </a:r>
           </a:p>
           <a:p>
             <a:pPr lvl="3"/>
             <a:r>
-              <a:rPr lang="en-US" smtClean="0"/>
+              <a:rPr lang="en-US"/>
               <a:t>Fourth level</a:t>
             </a:r>
           </a:p>
           <a:p>
             <a:pPr lvl="4"/>
             <a:r>
-              <a:rPr lang="en-US" smtClean="0"/>
+              <a:rPr lang="en-US"/>
               <a:t>Fifth level</a:t>
             </a:r>
-            <a:endParaRPr lang="en-US"/>
+            <a:endParaRPr lang="en-US" dirty="0"/>
           </a:p>
         </p:txBody>
       </p:sp>
@@ -1264,76 +1206,48 @@
         </p:nvSpPr>
         <p:spPr>
           <a:xfrm>
-            <a:off x="4648200" y="1600200"/>
-            <a:ext cx="4038600" cy="4525963"/>
+            <a:off x="6170592" y="1825625"/>
+            <a:ext cx="5180251" cy="4351338"/>
           </a:xfrm>
         </p:spPr>
         <p:txBody>
           <a:bodyPr/>
-          <a:lstStyle>
-            <a:lvl1pPr>
-              <a:defRPr sz="2800"/>
-            </a:lvl1pPr>
-            <a:lvl2pPr>
-              <a:defRPr sz="2400"/>
-            </a:lvl2pPr>
-            <a:lvl3pPr>
-              <a:defRPr sz="2000"/>
-            </a:lvl3pPr>
-            <a:lvl4pPr>
-              <a:defRPr sz="1800"/>
-            </a:lvl4pPr>
-            <a:lvl5pPr>
-              <a:defRPr sz="1800"/>
-            </a:lvl5pPr>
-            <a:lvl6pPr>
-              <a:defRPr sz="1800"/>
-            </a:lvl6pPr>
-            <a:lvl7pPr>
-              <a:defRPr sz="1800"/>
-            </a:lvl7pPr>
-            <a:lvl8pPr>
-              <a:defRPr sz="1800"/>
-            </a:lvl8pPr>
-            <a:lvl9pPr>
-              <a:defRPr sz="1800"/>
-            </a:lvl9pPr>
-          </a:lstStyle>
+          <a:lstStyle/>
           <a:p>
             <a:pPr lvl="0"/>
             <a:r>
-              <a:rPr lang="en-US" smtClean="0"/>
+              <a:rPr lang="en-US"/>
               <a:t>Click to edit Master text styles</a:t>
             </a:r>
           </a:p>
           <a:p>
             <a:pPr lvl="1"/>
             <a:r>
-              <a:rPr lang="en-US" smtClean="0"/>
+              <a:rPr lang="en-US"/>
               <a:t>Second level</a:t>
             </a:r>
           </a:p>
           <a:p>
             <a:pPr lvl="2"/>
             <a:r>
-              <a:rPr lang="en-US" smtClean="0"/>
+              <a:rPr lang="en-US"/>
               <a:t>Third level</a:t>
             </a:r>
           </a:p>
           <a:p>
             <a:pPr lvl="3"/>
             <a:r>
-              <a:rPr lang="en-US" smtClean="0"/>
+              <a:rPr lang="en-US"/>
               <a:t>Fourth level</a:t>
             </a:r>
           </a:p>
           <a:p>
             <a:pPr lvl="4"/>
             <a:r>
-              <a:rPr lang="en-US" smtClean="0"/>
+              <a:rPr lang="en-US"/>
               <a:t>Fifth level</a:t>
             </a:r>
-            <a:endParaRPr lang="en-US"/>
+            <a:endParaRPr lang="en-US" dirty="0"/>
           </a:p>
         </p:txBody>
       </p:sp>
@@ -1354,7 +1268,7 @@
           <a:p>
             <a:fld id="{5BCAD085-E8A6-8845-BD4E-CB4CCA059FC4}" type="datetimeFigureOut">
               <a:rPr lang="en-US" smtClean="0"/>
-              <a:t>1/27/13</a:t>
+              <a:t>6/15/26</a:t>
             </a:fld>
             <a:endParaRPr lang="en-US"/>
           </a:p>
@@ -1405,7 +1319,7 @@
     </p:spTree>
     <p:extLst>
       <p:ext uri="{BB962C8B-B14F-4D97-AF65-F5344CB8AC3E}">
-        <p14:creationId xmlns:p14="http://schemas.microsoft.com/office/powerpoint/2010/main" val="2782244947"/>
+        <p14:creationId xmlns:p14="http://schemas.microsoft.com/office/powerpoint/2010/main" val="3181175910"/>
       </p:ext>
     </p:extLst>
   </p:cSld>
@@ -1442,20 +1356,21 @@
             <p:ph type="title"/>
           </p:nvPr>
         </p:nvSpPr>
-        <p:spPr/>
+        <p:spPr>
+          <a:xfrm>
+            <a:off x="839569" y="365126"/>
+            <a:ext cx="10512862" cy="1325563"/>
+          </a:xfrm>
+        </p:spPr>
         <p:txBody>
           <a:bodyPr/>
-          <a:lstStyle>
-            <a:lvl1pPr>
-              <a:defRPr/>
-            </a:lvl1pPr>
-          </a:lstStyle>
-          <a:p>
-            <a:r>
-              <a:rPr lang="en-US" smtClean="0"/>
+          <a:lstStyle/>
+          <a:p>
+            <a:r>
+              <a:rPr lang="en-US"/>
               <a:t>Click to edit Master title style</a:t>
             </a:r>
-            <a:endParaRPr lang="en-US"/>
+            <a:endParaRPr lang="en-US" dirty="0"/>
           </a:p>
         </p:txBody>
       </p:sp>
@@ -1471,8 +1386,8 @@
         </p:nvSpPr>
         <p:spPr>
           <a:xfrm>
-            <a:off x="457200" y="1535113"/>
-            <a:ext cx="4040188" cy="639762"/>
+            <a:off x="839570" y="1681163"/>
+            <a:ext cx="5156444" cy="823912"/>
           </a:xfrm>
         </p:spPr>
         <p:txBody>
@@ -1480,37 +1395,37 @@
           <a:lstStyle>
             <a:lvl1pPr marL="0" indent="0">
               <a:buNone/>
-              <a:defRPr sz="2400" b="1"/>
+              <a:defRPr sz="2399" b="1"/>
             </a:lvl1pPr>
-            <a:lvl2pPr marL="457200" indent="0">
+            <a:lvl2pPr marL="457063" indent="0">
               <a:buNone/>
-              <a:defRPr sz="2000" b="1"/>
+              <a:defRPr sz="1999" b="1"/>
             </a:lvl2pPr>
-            <a:lvl3pPr marL="914400" indent="0">
+            <a:lvl3pPr marL="914126" indent="0">
               <a:buNone/>
-              <a:defRPr sz="1800" b="1"/>
+              <a:defRPr sz="1799" b="1"/>
             </a:lvl3pPr>
-            <a:lvl4pPr marL="1371600" indent="0">
+            <a:lvl4pPr marL="1371189" indent="0">
               <a:buNone/>
               <a:defRPr sz="1600" b="1"/>
             </a:lvl4pPr>
-            <a:lvl5pPr marL="1828800" indent="0">
+            <a:lvl5pPr marL="1828251" indent="0">
               <a:buNone/>
               <a:defRPr sz="1600" b="1"/>
             </a:lvl5pPr>
-            <a:lvl6pPr marL="2286000" indent="0">
+            <a:lvl6pPr marL="2285314" indent="0">
               <a:buNone/>
               <a:defRPr sz="1600" b="1"/>
             </a:lvl6pPr>
-            <a:lvl7pPr marL="2743200" indent="0">
+            <a:lvl7pPr marL="2742377" indent="0">
               <a:buNone/>
               <a:defRPr sz="1600" b="1"/>
             </a:lvl7pPr>
-            <a:lvl8pPr marL="3200400" indent="0">
+            <a:lvl8pPr marL="3199440" indent="0">
               <a:buNone/>
               <a:defRPr sz="1600" b="1"/>
             </a:lvl8pPr>
-            <a:lvl9pPr marL="3657600" indent="0">
+            <a:lvl9pPr marL="3656503" indent="0">
               <a:buNone/>
               <a:defRPr sz="1600" b="1"/>
             </a:lvl9pPr>
@@ -1518,7 +1433,7 @@
           <a:p>
             <a:pPr lvl="0"/>
             <a:r>
-              <a:rPr lang="en-US" smtClean="0"/>
+              <a:rPr lang="en-US"/>
               <a:t>Click to edit Master text styles</a:t>
             </a:r>
           </a:p>
@@ -1536,76 +1451,48 @@
         </p:nvSpPr>
         <p:spPr>
           <a:xfrm>
-            <a:off x="457200" y="2174875"/>
-            <a:ext cx="4040188" cy="3951288"/>
+            <a:off x="839570" y="2505075"/>
+            <a:ext cx="5156444" cy="3684588"/>
           </a:xfrm>
         </p:spPr>
         <p:txBody>
           <a:bodyPr/>
-          <a:lstStyle>
-            <a:lvl1pPr>
-              <a:defRPr sz="2400"/>
-            </a:lvl1pPr>
-            <a:lvl2pPr>
-              <a:defRPr sz="2000"/>
-            </a:lvl2pPr>
-            <a:lvl3pPr>
-              <a:defRPr sz="1800"/>
-            </a:lvl3pPr>
-            <a:lvl4pPr>
-              <a:defRPr sz="1600"/>
-            </a:lvl4pPr>
-            <a:lvl5pPr>
-              <a:defRPr sz="1600"/>
-            </a:lvl5pPr>
-            <a:lvl6pPr>
-              <a:defRPr sz="1600"/>
-            </a:lvl6pPr>
-            <a:lvl7pPr>
-              <a:defRPr sz="1600"/>
-            </a:lvl7pPr>
-            <a:lvl8pPr>
-              <a:defRPr sz="1600"/>
-            </a:lvl8pPr>
-            <a:lvl9pPr>
-              <a:defRPr sz="1600"/>
-            </a:lvl9pPr>
-          </a:lstStyle>
+          <a:lstStyle/>
           <a:p>
             <a:pPr lvl="0"/>
             <a:r>
-              <a:rPr lang="en-US" smtClean="0"/>
+              <a:rPr lang="en-US"/>
               <a:t>Click to edit Master text styles</a:t>
             </a:r>
           </a:p>
           <a:p>
             <a:pPr lvl="1"/>
             <a:r>
-              <a:rPr lang="en-US" smtClean="0"/>
+              <a:rPr lang="en-US"/>
               <a:t>Second level</a:t>
             </a:r>
           </a:p>
           <a:p>
             <a:pPr lvl="2"/>
             <a:r>
-              <a:rPr lang="en-US" smtClean="0"/>
+              <a:rPr lang="en-US"/>
               <a:t>Third level</a:t>
             </a:r>
           </a:p>
           <a:p>
             <a:pPr lvl="3"/>
             <a:r>
-              <a:rPr lang="en-US" smtClean="0"/>
+              <a:rPr lang="en-US"/>
               <a:t>Fourth level</a:t>
             </a:r>
           </a:p>
           <a:p>
             <a:pPr lvl="4"/>
             <a:r>
-              <a:rPr lang="en-US" smtClean="0"/>
+              <a:rPr lang="en-US"/>
               <a:t>Fifth level</a:t>
             </a:r>
-            <a:endParaRPr lang="en-US"/>
+            <a:endParaRPr lang="en-US" dirty="0"/>
           </a:p>
         </p:txBody>
       </p:sp>
@@ -1621,8 +1508,8 @@
         </p:nvSpPr>
         <p:spPr>
           <a:xfrm>
-            <a:off x="4645025" y="1535113"/>
-            <a:ext cx="4041775" cy="639762"/>
+            <a:off x="6170593" y="1681163"/>
+            <a:ext cx="5181838" cy="823912"/>
           </a:xfrm>
         </p:spPr>
         <p:txBody>
@@ -1630,37 +1517,37 @@
           <a:lstStyle>
             <a:lvl1pPr marL="0" indent="0">
               <a:buNone/>
-              <a:defRPr sz="2400" b="1"/>
+              <a:defRPr sz="2399" b="1"/>
             </a:lvl1pPr>
-            <a:lvl2pPr marL="457200" indent="0">
+            <a:lvl2pPr marL="457063" indent="0">
               <a:buNone/>
-              <a:defRPr sz="2000" b="1"/>
+              <a:defRPr sz="1999" b="1"/>
             </a:lvl2pPr>
-            <a:lvl3pPr marL="914400" indent="0">
+            <a:lvl3pPr marL="914126" indent="0">
               <a:buNone/>
-              <a:defRPr sz="1800" b="1"/>
+              <a:defRPr sz="1799" b="1"/>
             </a:lvl3pPr>
-            <a:lvl4pPr marL="1371600" indent="0">
+            <a:lvl4pPr marL="1371189" indent="0">
               <a:buNone/>
               <a:defRPr sz="1600" b="1"/>
             </a:lvl4pPr>
-            <a:lvl5pPr marL="1828800" indent="0">
+            <a:lvl5pPr marL="1828251" indent="0">
               <a:buNone/>
               <a:defRPr sz="1600" b="1"/>
             </a:lvl5pPr>
-            <a:lvl6pPr marL="2286000" indent="0">
+            <a:lvl6pPr marL="2285314" indent="0">
               <a:buNone/>
               <a:defRPr sz="1600" b="1"/>
             </a:lvl6pPr>
-            <a:lvl7pPr marL="2743200" indent="0">
+            <a:lvl7pPr marL="2742377" indent="0">
               <a:buNone/>
               <a:defRPr sz="1600" b="1"/>
             </a:lvl7pPr>
-            <a:lvl8pPr marL="3200400" indent="0">
+            <a:lvl8pPr marL="3199440" indent="0">
               <a:buNone/>
               <a:defRPr sz="1600" b="1"/>
             </a:lvl8pPr>
-            <a:lvl9pPr marL="3657600" indent="0">
+            <a:lvl9pPr marL="3656503" indent="0">
               <a:buNone/>
               <a:defRPr sz="1600" b="1"/>
             </a:lvl9pPr>
@@ -1668,7 +1555,7 @@
           <a:p>
             <a:pPr lvl="0"/>
             <a:r>
-              <a:rPr lang="en-US" smtClean="0"/>
+              <a:rPr lang="en-US"/>
               <a:t>Click to edit Master text styles</a:t>
             </a:r>
           </a:p>
@@ -1686,76 +1573,48 @@
         </p:nvSpPr>
         <p:spPr>
           <a:xfrm>
-            <a:off x="4645025" y="2174875"/>
-            <a:ext cx="4041775" cy="3951288"/>
+            <a:off x="6170593" y="2505075"/>
+            <a:ext cx="5181838" cy="3684588"/>
           </a:xfrm>
         </p:spPr>
         <p:txBody>
           <a:bodyPr/>
-          <a:lstStyle>
-            <a:lvl1pPr>
-              <a:defRPr sz="2400"/>
-            </a:lvl1pPr>
-            <a:lvl2pPr>
-              <a:defRPr sz="2000"/>
-            </a:lvl2pPr>
-            <a:lvl3pPr>
-              <a:defRPr sz="1800"/>
-            </a:lvl3pPr>
-            <a:lvl4pPr>
-              <a:defRPr sz="1600"/>
-            </a:lvl4pPr>
-            <a:lvl5pPr>
-              <a:defRPr sz="1600"/>
-            </a:lvl5pPr>
-            <a:lvl6pPr>
-              <a:defRPr sz="1600"/>
-            </a:lvl6pPr>
-            <a:lvl7pPr>
-              <a:defRPr sz="1600"/>
-            </a:lvl7pPr>
-            <a:lvl8pPr>
-              <a:defRPr sz="1600"/>
-            </a:lvl8pPr>
-            <a:lvl9pPr>
-              <a:defRPr sz="1600"/>
-            </a:lvl9pPr>
-          </a:lstStyle>
+          <a:lstStyle/>
           <a:p>
             <a:pPr lvl="0"/>
             <a:r>
-              <a:rPr lang="en-US" smtClean="0"/>
+              <a:rPr lang="en-US"/>
               <a:t>Click to edit Master text styles</a:t>
             </a:r>
           </a:p>
           <a:p>
             <a:pPr lvl="1"/>
             <a:r>
-              <a:rPr lang="en-US" smtClean="0"/>
+              <a:rPr lang="en-US"/>
               <a:t>Second level</a:t>
             </a:r>
           </a:p>
           <a:p>
             <a:pPr lvl="2"/>
             <a:r>
-              <a:rPr lang="en-US" smtClean="0"/>
+              <a:rPr lang="en-US"/>
               <a:t>Third level</a:t>
             </a:r>
           </a:p>
           <a:p>
             <a:pPr lvl="3"/>
             <a:r>
-              <a:rPr lang="en-US" smtClean="0"/>
+              <a:rPr lang="en-US"/>
               <a:t>Fourth level</a:t>
             </a:r>
           </a:p>
           <a:p>
             <a:pPr lvl="4"/>
             <a:r>
-              <a:rPr lang="en-US" smtClean="0"/>
+              <a:rPr lang="en-US"/>
               <a:t>Fifth level</a:t>
             </a:r>
-            <a:endParaRPr lang="en-US"/>
+            <a:endParaRPr lang="en-US" dirty="0"/>
           </a:p>
         </p:txBody>
       </p:sp>
@@ -1776,7 +1635,7 @@
           <a:p>
             <a:fld id="{5BCAD085-E8A6-8845-BD4E-CB4CCA059FC4}" type="datetimeFigureOut">
               <a:rPr lang="en-US" smtClean="0"/>
-              <a:t>1/27/13</a:t>
+              <a:t>6/15/26</a:t>
             </a:fld>
             <a:endParaRPr lang="en-US"/>
           </a:p>
@@ -1827,7 +1686,7 @@
     </p:spTree>
     <p:extLst>
       <p:ext uri="{BB962C8B-B14F-4D97-AF65-F5344CB8AC3E}">
-        <p14:creationId xmlns:p14="http://schemas.microsoft.com/office/powerpoint/2010/main" val="990158736"/>
+        <p14:creationId xmlns:p14="http://schemas.microsoft.com/office/powerpoint/2010/main" val="2999107529"/>
       </p:ext>
     </p:extLst>
   </p:cSld>
@@ -1870,10 +1729,10 @@
           <a:lstStyle/>
           <a:p>
             <a:r>
-              <a:rPr lang="en-US" smtClean="0"/>
+              <a:rPr lang="en-US"/>
               <a:t>Click to edit Master title style</a:t>
             </a:r>
-            <a:endParaRPr lang="en-US"/>
+            <a:endParaRPr lang="en-US" dirty="0"/>
           </a:p>
         </p:txBody>
       </p:sp>
@@ -1894,7 +1753,7 @@
           <a:p>
             <a:fld id="{5BCAD085-E8A6-8845-BD4E-CB4CCA059FC4}" type="datetimeFigureOut">
               <a:rPr lang="en-US" smtClean="0"/>
-              <a:t>1/27/13</a:t>
+              <a:t>6/15/26</a:t>
             </a:fld>
             <a:endParaRPr lang="en-US"/>
           </a:p>
@@ -1945,7 +1804,7 @@
     </p:spTree>
     <p:extLst>
       <p:ext uri="{BB962C8B-B14F-4D97-AF65-F5344CB8AC3E}">
-        <p14:creationId xmlns:p14="http://schemas.microsoft.com/office/powerpoint/2010/main" val="727027711"/>
+        <p14:creationId xmlns:p14="http://schemas.microsoft.com/office/powerpoint/2010/main" val="2889460050"/>
       </p:ext>
     </p:extLst>
   </p:cSld>
@@ -1989,7 +1848,7 @@
           <a:p>
             <a:fld id="{5BCAD085-E8A6-8845-BD4E-CB4CCA059FC4}" type="datetimeFigureOut">
               <a:rPr lang="en-US" smtClean="0"/>
-              <a:t>1/27/13</a:t>
+              <a:t>6/15/26</a:t>
             </a:fld>
             <a:endParaRPr lang="en-US"/>
           </a:p>
@@ -2040,7 +1899,7 @@
     </p:spTree>
     <p:extLst>
       <p:ext uri="{BB962C8B-B14F-4D97-AF65-F5344CB8AC3E}">
-        <p14:creationId xmlns:p14="http://schemas.microsoft.com/office/powerpoint/2010/main" val="1212999818"/>
+        <p14:creationId xmlns:p14="http://schemas.microsoft.com/office/powerpoint/2010/main" val="719879788"/>
       </p:ext>
     </p:extLst>
   </p:cSld>
@@ -2079,23 +1938,23 @@
         </p:nvSpPr>
         <p:spPr>
           <a:xfrm>
-            <a:off x="457200" y="273050"/>
-            <a:ext cx="3008313" cy="1162050"/>
+            <a:off x="839570" y="457200"/>
+            <a:ext cx="3931213" cy="1600200"/>
           </a:xfrm>
         </p:spPr>
         <p:txBody>
           <a:bodyPr anchor="b"/>
           <a:lstStyle>
-            <a:lvl1pPr algn="l">
-              <a:defRPr sz="2000" b="1"/>
+            <a:lvl1pPr>
+              <a:defRPr sz="3199"/>
             </a:lvl1pPr>
           </a:lstStyle>
           <a:p>
             <a:r>
-              <a:rPr lang="en-US" smtClean="0"/>
+              <a:rPr lang="en-US"/>
               <a:t>Click to edit Master title style</a:t>
             </a:r>
-            <a:endParaRPr lang="en-US"/>
+            <a:endParaRPr lang="en-US" dirty="0"/>
           </a:p>
         </p:txBody>
       </p:sp>
@@ -2111,76 +1970,76 @@
         </p:nvSpPr>
         <p:spPr>
           <a:xfrm>
-            <a:off x="3575050" y="273050"/>
-            <a:ext cx="5111750" cy="5853113"/>
+            <a:off x="5181838" y="987426"/>
+            <a:ext cx="6170593" cy="4873625"/>
           </a:xfrm>
         </p:spPr>
         <p:txBody>
           <a:bodyPr/>
           <a:lstStyle>
             <a:lvl1pPr>
-              <a:defRPr sz="3200"/>
+              <a:defRPr sz="3199"/>
             </a:lvl1pPr>
             <a:lvl2pPr>
-              <a:defRPr sz="2800"/>
+              <a:defRPr sz="2799"/>
             </a:lvl2pPr>
             <a:lvl3pPr>
-              <a:defRPr sz="2400"/>
+              <a:defRPr sz="2399"/>
             </a:lvl3pPr>
             <a:lvl4pPr>
-              <a:defRPr sz="2000"/>
+              <a:defRPr sz="1999"/>
             </a:lvl4pPr>
             <a:lvl5pPr>
-              <a:defRPr sz="2000"/>
+              <a:defRPr sz="1999"/>
             </a:lvl5pPr>
             <a:lvl6pPr>
-              <a:defRPr sz="2000"/>
+              <a:defRPr sz="1999"/>
             </a:lvl6pPr>
             <a:lvl7pPr>
-              <a:defRPr sz="2000"/>
+              <a:defRPr sz="1999"/>
             </a:lvl7pPr>
             <a:lvl8pPr>
-              <a:defRPr sz="2000"/>
+              <a:defRPr sz="1999"/>
             </a:lvl8pPr>
             <a:lvl9pPr>
-              <a:defRPr sz="2000"/>
+              <a:defRPr sz="1999"/>
             </a:lvl9pPr>
           </a:lstStyle>
           <a:p>
             <a:pPr lvl="0"/>
             <a:r>
-              <a:rPr lang="en-US" smtClean="0"/>
+              <a:rPr lang="en-US"/>
               <a:t>Click to edit Master text styles</a:t>
             </a:r>
           </a:p>
           <a:p>
             <a:pPr lvl="1"/>
             <a:r>
-              <a:rPr lang="en-US" smtClean="0"/>
+              <a:rPr lang="en-US"/>
               <a:t>Second level</a:t>
             </a:r>
           </a:p>
           <a:p>
             <a:pPr lvl="2"/>
             <a:r>
-              <a:rPr lang="en-US" smtClean="0"/>
+              <a:rPr lang="en-US"/>
               <a:t>Third level</a:t>
             </a:r>
           </a:p>
           <a:p>
             <a:pPr lvl="3"/>
             <a:r>
-              <a:rPr lang="en-US" smtClean="0"/>
+              <a:rPr lang="en-US"/>
               <a:t>Fourth level</a:t>
             </a:r>
           </a:p>
           <a:p>
             <a:pPr lvl="4"/>
             <a:r>
-              <a:rPr lang="en-US" smtClean="0"/>
+              <a:rPr lang="en-US"/>
               <a:t>Fifth level</a:t>
             </a:r>
-            <a:endParaRPr lang="en-US"/>
+            <a:endParaRPr lang="en-US" dirty="0"/>
           </a:p>
         </p:txBody>
       </p:sp>
@@ -2196,8 +2055,8 @@
         </p:nvSpPr>
         <p:spPr>
           <a:xfrm>
-            <a:off x="457200" y="1435100"/>
-            <a:ext cx="3008313" cy="4691063"/>
+            <a:off x="839570" y="2057400"/>
+            <a:ext cx="3931213" cy="3811588"/>
           </a:xfrm>
         </p:spPr>
         <p:txBody>
@@ -2205,45 +2064,45 @@
           <a:lstStyle>
             <a:lvl1pPr marL="0" indent="0">
               <a:buNone/>
+              <a:defRPr sz="1600"/>
+            </a:lvl1pPr>
+            <a:lvl2pPr marL="457063" indent="0">
+              <a:buNone/>
               <a:defRPr sz="1400"/>
-            </a:lvl1pPr>
-            <a:lvl2pPr marL="457200" indent="0">
+            </a:lvl2pPr>
+            <a:lvl3pPr marL="914126" indent="0">
               <a:buNone/>
               <a:defRPr sz="1200"/>
-            </a:lvl2pPr>
-            <a:lvl3pPr marL="914400" indent="0">
+            </a:lvl3pPr>
+            <a:lvl4pPr marL="1371189" indent="0">
               <a:buNone/>
               <a:defRPr sz="1000"/>
-            </a:lvl3pPr>
-            <a:lvl4pPr marL="1371600" indent="0">
+            </a:lvl4pPr>
+            <a:lvl5pPr marL="1828251" indent="0">
               <a:buNone/>
-              <a:defRPr sz="900"/>
-            </a:lvl4pPr>
-            <a:lvl5pPr marL="1828800" indent="0">
+              <a:defRPr sz="1000"/>
+            </a:lvl5pPr>
+            <a:lvl6pPr marL="2285314" indent="0">
               <a:buNone/>
-              <a:defRPr sz="900"/>
-            </a:lvl5pPr>
-            <a:lvl6pPr marL="2286000" indent="0">
+              <a:defRPr sz="1000"/>
+            </a:lvl6pPr>
+            <a:lvl7pPr marL="2742377" indent="0">
               <a:buNone/>
-              <a:defRPr sz="900"/>
-            </a:lvl6pPr>
-            <a:lvl7pPr marL="2743200" indent="0">
+              <a:defRPr sz="1000"/>
+            </a:lvl7pPr>
+            <a:lvl8pPr marL="3199440" indent="0">
               <a:buNone/>
-              <a:defRPr sz="900"/>
-            </a:lvl7pPr>
-            <a:lvl8pPr marL="3200400" indent="0">
+              <a:defRPr sz="1000"/>
+            </a:lvl8pPr>
+            <a:lvl9pPr marL="3656503" indent="0">
               <a:buNone/>
-              <a:defRPr sz="900"/>
-            </a:lvl8pPr>
-            <a:lvl9pPr marL="3657600" indent="0">
-              <a:buNone/>
-              <a:defRPr sz="900"/>
+              <a:defRPr sz="1000"/>
             </a:lvl9pPr>
           </a:lstStyle>
           <a:p>
             <a:pPr lvl="0"/>
             <a:r>
-              <a:rPr lang="en-US" smtClean="0"/>
+              <a:rPr lang="en-US"/>
               <a:t>Click to edit Master text styles</a:t>
             </a:r>
           </a:p>
@@ -2266,7 +2125,7 @@
           <a:p>
             <a:fld id="{5BCAD085-E8A6-8845-BD4E-CB4CCA059FC4}" type="datetimeFigureOut">
               <a:rPr lang="en-US" smtClean="0"/>
-              <a:t>1/27/13</a:t>
+              <a:t>6/15/26</a:t>
             </a:fld>
             <a:endParaRPr lang="en-US"/>
           </a:p>
@@ -2317,7 +2176,7 @@
     </p:spTree>
     <p:extLst>
       <p:ext uri="{BB962C8B-B14F-4D97-AF65-F5344CB8AC3E}">
-        <p14:creationId xmlns:p14="http://schemas.microsoft.com/office/powerpoint/2010/main" val="1840726560"/>
+        <p14:creationId xmlns:p14="http://schemas.microsoft.com/office/powerpoint/2010/main" val="975303120"/>
       </p:ext>
     </p:extLst>
   </p:cSld>
@@ -2356,23 +2215,23 @@
         </p:nvSpPr>
         <p:spPr>
           <a:xfrm>
-            <a:off x="1792288" y="4800600"/>
-            <a:ext cx="5486400" cy="566738"/>
+            <a:off x="839570" y="457200"/>
+            <a:ext cx="3931213" cy="1600200"/>
           </a:xfrm>
         </p:spPr>
         <p:txBody>
           <a:bodyPr anchor="b"/>
           <a:lstStyle>
-            <a:lvl1pPr algn="l">
-              <a:defRPr sz="2000" b="1"/>
+            <a:lvl1pPr>
+              <a:defRPr sz="3199"/>
             </a:lvl1pPr>
           </a:lstStyle>
           <a:p>
             <a:r>
-              <a:rPr lang="en-US" smtClean="0"/>
+              <a:rPr lang="en-US"/>
               <a:t>Click to edit Master title style</a:t>
             </a:r>
-            <a:endParaRPr lang="en-US"/>
+            <a:endParaRPr lang="en-US" dirty="0"/>
           </a:p>
         </p:txBody>
       </p:sp>
@@ -2380,7 +2239,7 @@
         <p:nvSpPr>
           <p:cNvPr id="3" name="Picture Placeholder 2"/>
           <p:cNvSpPr>
-            <a:spLocks noGrp="1"/>
+            <a:spLocks noGrp="1" noChangeAspect="1"/>
           </p:cNvSpPr>
           <p:nvPr>
             <p:ph type="pic" idx="1"/>
@@ -2388,52 +2247,56 @@
         </p:nvSpPr>
         <p:spPr>
           <a:xfrm>
-            <a:off x="1792288" y="612775"/>
-            <a:ext cx="5486400" cy="4114800"/>
-          </a:xfrm>
-        </p:spPr>
-        <p:txBody>
-          <a:bodyPr/>
+            <a:off x="5181838" y="987426"/>
+            <a:ext cx="6170593" cy="4873625"/>
+          </a:xfrm>
+        </p:spPr>
+        <p:txBody>
+          <a:bodyPr anchor="t"/>
           <a:lstStyle>
             <a:lvl1pPr marL="0" indent="0">
               <a:buNone/>
-              <a:defRPr sz="3200"/>
+              <a:defRPr sz="3199"/>
             </a:lvl1pPr>
-            <a:lvl2pPr marL="457200" indent="0">
+            <a:lvl2pPr marL="457063" indent="0">
               <a:buNone/>
-              <a:defRPr sz="2800"/>
+              <a:defRPr sz="2799"/>
             </a:lvl2pPr>
-            <a:lvl3pPr marL="914400" indent="0">
+            <a:lvl3pPr marL="914126" indent="0">
               <a:buNone/>
-              <a:defRPr sz="2400"/>
+              <a:defRPr sz="2399"/>
             </a:lvl3pPr>
-            <a:lvl4pPr marL="1371600" indent="0">
+            <a:lvl4pPr marL="1371189" indent="0">
               <a:buNone/>
-              <a:defRPr sz="2000"/>
+              <a:defRPr sz="1999"/>
             </a:lvl4pPr>
-            <a:lvl5pPr marL="1828800" indent="0">
+            <a:lvl5pPr marL="1828251" indent="0">
               <a:buNone/>
-              <a:defRPr sz="2000"/>
+              <a:defRPr sz="1999"/>
             </a:lvl5pPr>
-            <a:lvl6pPr marL="2286000" indent="0">
+            <a:lvl6pPr marL="2285314" indent="0">
               <a:buNone/>
-              <a:defRPr sz="2000"/>
+              <a:defRPr sz="1999"/>
             </a:lvl6pPr>
-            <a:lvl7pPr marL="2743200" indent="0">
+            <a:lvl7pPr marL="2742377" indent="0">
               <a:buNone/>
-              <a:defRPr sz="2000"/>
+              <a:defRPr sz="1999"/>
             </a:lvl7pPr>
-            <a:lvl8pPr marL="3200400" indent="0">
+            <a:lvl8pPr marL="3199440" indent="0">
               <a:buNone/>
-              <a:defRPr sz="2000"/>
+              <a:defRPr sz="1999"/>
             </a:lvl8pPr>
-            <a:lvl9pPr marL="3657600" indent="0">
+            <a:lvl9pPr marL="3656503" indent="0">
               <a:buNone/>
-              <a:defRPr sz="2000"/>
+              <a:defRPr sz="1999"/>
             </a:lvl9pPr>
           </a:lstStyle>
           <a:p>
-            <a:endParaRPr lang="en-US"/>
+            <a:r>
+              <a:rPr lang="en-US"/>
+              <a:t>Click icon to add picture</a:t>
+            </a:r>
+            <a:endParaRPr lang="en-US" dirty="0"/>
           </a:p>
         </p:txBody>
       </p:sp>
@@ -2449,8 +2312,8 @@
         </p:nvSpPr>
         <p:spPr>
           <a:xfrm>
-            <a:off x="1792288" y="5367338"/>
-            <a:ext cx="5486400" cy="804862"/>
+            <a:off x="839570" y="2057400"/>
+            <a:ext cx="3931213" cy="3811588"/>
           </a:xfrm>
         </p:spPr>
         <p:txBody>
@@ -2458,45 +2321,45 @@
           <a:lstStyle>
             <a:lvl1pPr marL="0" indent="0">
               <a:buNone/>
+              <a:defRPr sz="1600"/>
+            </a:lvl1pPr>
+            <a:lvl2pPr marL="457063" indent="0">
+              <a:buNone/>
               <a:defRPr sz="1400"/>
-            </a:lvl1pPr>
-            <a:lvl2pPr marL="457200" indent="0">
+            </a:lvl2pPr>
+            <a:lvl3pPr marL="914126" indent="0">
               <a:buNone/>
               <a:defRPr sz="1200"/>
-            </a:lvl2pPr>
-            <a:lvl3pPr marL="914400" indent="0">
+            </a:lvl3pPr>
+            <a:lvl4pPr marL="1371189" indent="0">
               <a:buNone/>
               <a:defRPr sz="1000"/>
-            </a:lvl3pPr>
-            <a:lvl4pPr marL="1371600" indent="0">
+            </a:lvl4pPr>
+            <a:lvl5pPr marL="1828251" indent="0">
               <a:buNone/>
-              <a:defRPr sz="900"/>
-            </a:lvl4pPr>
-            <a:lvl5pPr marL="1828800" indent="0">
+              <a:defRPr sz="1000"/>
+            </a:lvl5pPr>
+            <a:lvl6pPr marL="2285314" indent="0">
               <a:buNone/>
-              <a:defRPr sz="900"/>
-            </a:lvl5pPr>
-            <a:lvl6pPr marL="2286000" indent="0">
+              <a:defRPr sz="1000"/>
+            </a:lvl6pPr>
+            <a:lvl7pPr marL="2742377" indent="0">
               <a:buNone/>
-              <a:defRPr sz="900"/>
-            </a:lvl6pPr>
-            <a:lvl7pPr marL="2743200" indent="0">
+              <a:defRPr sz="1000"/>
+            </a:lvl7pPr>
+            <a:lvl8pPr marL="3199440" indent="0">
               <a:buNone/>
-              <a:defRPr sz="900"/>
-            </a:lvl7pPr>
-            <a:lvl8pPr marL="3200400" indent="0">
+              <a:defRPr sz="1000"/>
+            </a:lvl8pPr>
+            <a:lvl9pPr marL="3656503" indent="0">
               <a:buNone/>
-              <a:defRPr sz="900"/>
-            </a:lvl8pPr>
-            <a:lvl9pPr marL="3657600" indent="0">
-              <a:buNone/>
-              <a:defRPr sz="900"/>
+              <a:defRPr sz="1000"/>
             </a:lvl9pPr>
           </a:lstStyle>
           <a:p>
             <a:pPr lvl="0"/>
             <a:r>
-              <a:rPr lang="en-US" smtClean="0"/>
+              <a:rPr lang="en-US"/>
               <a:t>Click to edit Master text styles</a:t>
             </a:r>
           </a:p>
@@ -2519,7 +2382,7 @@
           <a:p>
             <a:fld id="{5BCAD085-E8A6-8845-BD4E-CB4CCA059FC4}" type="datetimeFigureOut">
               <a:rPr lang="en-US" smtClean="0"/>
-              <a:t>1/27/13</a:t>
+              <a:t>6/15/26</a:t>
             </a:fld>
             <a:endParaRPr lang="en-US"/>
           </a:p>
@@ -2570,7 +2433,7 @@
     </p:spTree>
     <p:extLst>
       <p:ext uri="{BB962C8B-B14F-4D97-AF65-F5344CB8AC3E}">
-        <p14:creationId xmlns:p14="http://schemas.microsoft.com/office/powerpoint/2010/main" val="3889236939"/>
+        <p14:creationId xmlns:p14="http://schemas.microsoft.com/office/powerpoint/2010/main" val="37370"/>
       </p:ext>
     </p:extLst>
   </p:cSld>
@@ -2614,8 +2477,8 @@
         </p:nvSpPr>
         <p:spPr>
           <a:xfrm>
-            <a:off x="457200" y="274638"/>
-            <a:ext cx="8229600" cy="1143000"/>
+            <a:off x="837982" y="365126"/>
+            <a:ext cx="10512862" cy="1325563"/>
           </a:xfrm>
           <a:prstGeom prst="rect">
             <a:avLst/>
@@ -2628,10 +2491,10 @@
           <a:lstStyle/>
           <a:p>
             <a:r>
-              <a:rPr lang="en-US" smtClean="0"/>
+              <a:rPr lang="en-US"/>
               <a:t>Click to edit Master title style</a:t>
             </a:r>
-            <a:endParaRPr lang="en-US"/>
+            <a:endParaRPr lang="en-US" dirty="0"/>
           </a:p>
         </p:txBody>
       </p:sp>
@@ -2647,8 +2510,8 @@
         </p:nvSpPr>
         <p:spPr>
           <a:xfrm>
-            <a:off x="457200" y="1600200"/>
-            <a:ext cx="8229600" cy="4525963"/>
+            <a:off x="837982" y="1825625"/>
+            <a:ext cx="10512862" cy="4351338"/>
           </a:xfrm>
           <a:prstGeom prst="rect">
             <a:avLst/>
@@ -2662,38 +2525,38 @@
           <a:p>
             <a:pPr lvl="0"/>
             <a:r>
-              <a:rPr lang="en-US" smtClean="0"/>
+              <a:rPr lang="en-US"/>
               <a:t>Click to edit Master text styles</a:t>
             </a:r>
           </a:p>
           <a:p>
             <a:pPr lvl="1"/>
             <a:r>
-              <a:rPr lang="en-US" smtClean="0"/>
+              <a:rPr lang="en-US"/>
               <a:t>Second level</a:t>
             </a:r>
           </a:p>
           <a:p>
             <a:pPr lvl="2"/>
             <a:r>
-              <a:rPr lang="en-US" smtClean="0"/>
+              <a:rPr lang="en-US"/>
               <a:t>Third level</a:t>
             </a:r>
           </a:p>
           <a:p>
             <a:pPr lvl="3"/>
             <a:r>
-              <a:rPr lang="en-US" smtClean="0"/>
+              <a:rPr lang="en-US"/>
               <a:t>Fourth level</a:t>
             </a:r>
           </a:p>
           <a:p>
             <a:pPr lvl="4"/>
             <a:r>
-              <a:rPr lang="en-US" smtClean="0"/>
+              <a:rPr lang="en-US"/>
               <a:t>Fifth level</a:t>
             </a:r>
-            <a:endParaRPr lang="en-US"/>
+            <a:endParaRPr lang="en-US" dirty="0"/>
           </a:p>
         </p:txBody>
       </p:sp>
@@ -2709,8 +2572,8 @@
         </p:nvSpPr>
         <p:spPr>
           <a:xfrm>
-            <a:off x="457200" y="6356350"/>
-            <a:ext cx="2133600" cy="365125"/>
+            <a:off x="837982" y="6356351"/>
+            <a:ext cx="2742486" cy="365125"/>
           </a:xfrm>
           <a:prstGeom prst="rect">
             <a:avLst/>
@@ -2732,7 +2595,7 @@
           <a:p>
             <a:fld id="{5BCAD085-E8A6-8845-BD4E-CB4CCA059FC4}" type="datetimeFigureOut">
               <a:rPr lang="en-US" smtClean="0"/>
-              <a:t>1/27/13</a:t>
+              <a:t>6/15/26</a:t>
             </a:fld>
             <a:endParaRPr lang="en-US"/>
           </a:p>
@@ -2750,8 +2613,8 @@
         </p:nvSpPr>
         <p:spPr>
           <a:xfrm>
-            <a:off x="3124200" y="6356350"/>
-            <a:ext cx="2895600" cy="365125"/>
+            <a:off x="4037549" y="6356351"/>
+            <a:ext cx="4113728" cy="365125"/>
           </a:xfrm>
           <a:prstGeom prst="rect">
             <a:avLst/>
@@ -2787,8 +2650,8 @@
         </p:nvSpPr>
         <p:spPr>
           <a:xfrm>
-            <a:off x="6553200" y="6356350"/>
-            <a:ext cx="2133600" cy="365125"/>
+            <a:off x="8608357" y="6356351"/>
+            <a:ext cx="2742486" cy="365125"/>
           </a:xfrm>
           <a:prstGeom prst="rect">
             <a:avLst/>
@@ -2819,32 +2682,35 @@
     </p:spTree>
     <p:extLst>
       <p:ext uri="{BB962C8B-B14F-4D97-AF65-F5344CB8AC3E}">
-        <p14:creationId xmlns:p14="http://schemas.microsoft.com/office/powerpoint/2010/main" val="2209977519"/>
+        <p14:creationId xmlns:p14="http://schemas.microsoft.com/office/powerpoint/2010/main" val="2146317436"/>
       </p:ext>
     </p:extLst>
   </p:cSld>
-  <p:clrMap bg1="lt1" tx1="dk1" bg2="lt2" tx2="dk2" accent1="accent1" accent2="accent2" accent3="accent3" accent4="accent4" accent5="accent5" accent6="accent6" hlink="hlink" folHlink="folHlink"/>
+  <p:clrMap bg1="dk1" tx1="lt1" bg2="dk2" tx2="lt2" accent1="accent1" accent2="accent2" accent3="accent3" accent4="accent4" accent5="accent5" accent6="accent6" hlink="hlink" folHlink="folHlink"/>
   <p:sldLayoutIdLst>
-    <p:sldLayoutId id="2147483649" r:id="rId1"/>
-    <p:sldLayoutId id="2147483650" r:id="rId2"/>
-    <p:sldLayoutId id="2147483651" r:id="rId3"/>
-    <p:sldLayoutId id="2147483652" r:id="rId4"/>
-    <p:sldLayoutId id="2147483653" r:id="rId5"/>
-    <p:sldLayoutId id="2147483654" r:id="rId6"/>
-    <p:sldLayoutId id="2147483655" r:id="rId7"/>
-    <p:sldLayoutId id="2147483656" r:id="rId8"/>
-    <p:sldLayoutId id="2147483657" r:id="rId9"/>
-    <p:sldLayoutId id="2147483658" r:id="rId10"/>
-    <p:sldLayoutId id="2147483659" r:id="rId11"/>
+    <p:sldLayoutId id="2147483673" r:id="rId1"/>
+    <p:sldLayoutId id="2147483674" r:id="rId2"/>
+    <p:sldLayoutId id="2147483675" r:id="rId3"/>
+    <p:sldLayoutId id="2147483676" r:id="rId4"/>
+    <p:sldLayoutId id="2147483677" r:id="rId5"/>
+    <p:sldLayoutId id="2147483678" r:id="rId6"/>
+    <p:sldLayoutId id="2147483679" r:id="rId7"/>
+    <p:sldLayoutId id="2147483680" r:id="rId8"/>
+    <p:sldLayoutId id="2147483681" r:id="rId9"/>
+    <p:sldLayoutId id="2147483682" r:id="rId10"/>
+    <p:sldLayoutId id="2147483683" r:id="rId11"/>
   </p:sldLayoutIdLst>
   <p:txStyles>
     <p:titleStyle>
-      <a:lvl1pPr algn="ctr" defTabSz="457200" rtl="0" eaLnBrk="1" latinLnBrk="0" hangingPunct="1">
+      <a:lvl1pPr algn="l" defTabSz="914126" rtl="0" eaLnBrk="1" latinLnBrk="0" hangingPunct="1">
+        <a:lnSpc>
+          <a:spcPct val="90000"/>
+        </a:lnSpc>
         <a:spcBef>
           <a:spcPct val="0"/>
         </a:spcBef>
         <a:buNone/>
-        <a:defRPr sz="4400" kern="1200">
+        <a:defRPr sz="4399" kern="1200">
           <a:solidFill>
             <a:schemeClr val="tx1"/>
           </a:solidFill>
@@ -2855,13 +2721,16 @@
       </a:lvl1pPr>
     </p:titleStyle>
     <p:bodyStyle>
-      <a:lvl1pPr marL="342900" indent="-342900" algn="l" defTabSz="457200" rtl="0" eaLnBrk="1" latinLnBrk="0" hangingPunct="1">
+      <a:lvl1pPr marL="228531" indent="-228531" algn="l" defTabSz="914126" rtl="0" eaLnBrk="1" latinLnBrk="0" hangingPunct="1">
+        <a:lnSpc>
+          <a:spcPct val="90000"/>
+        </a:lnSpc>
         <a:spcBef>
-          <a:spcPct val="20000"/>
+          <a:spcPts val="1000"/>
         </a:spcBef>
-        <a:buFont typeface="Arial"/>
+        <a:buFont typeface="Arial" panose="020B0604020202020204" pitchFamily="34" charset="0"/>
         <a:buChar char="•"/>
-        <a:defRPr sz="3200" kern="1200">
+        <a:defRPr sz="2799" kern="1200">
           <a:solidFill>
             <a:schemeClr val="tx1"/>
           </a:solidFill>
@@ -2870,13 +2739,16 @@
           <a:cs typeface="+mn-cs"/>
         </a:defRPr>
       </a:lvl1pPr>
-      <a:lvl2pPr marL="742950" indent="-285750" algn="l" defTabSz="457200" rtl="0" eaLnBrk="1" latinLnBrk="0" hangingPunct="1">
+      <a:lvl2pPr marL="685594" indent="-228531" algn="l" defTabSz="914126" rtl="0" eaLnBrk="1" latinLnBrk="0" hangingPunct="1">
+        <a:lnSpc>
+          <a:spcPct val="90000"/>
+        </a:lnSpc>
         <a:spcBef>
-          <a:spcPct val="20000"/>
+          <a:spcPts val="500"/>
         </a:spcBef>
-        <a:buFont typeface="Arial"/>
-        <a:buChar char="–"/>
-        <a:defRPr sz="2800" kern="1200">
+        <a:buFont typeface="Arial" panose="020B0604020202020204" pitchFamily="34" charset="0"/>
+        <a:buChar char="•"/>
+        <a:defRPr sz="2399" kern="1200">
           <a:solidFill>
             <a:schemeClr val="tx1"/>
           </a:solidFill>
@@ -2885,13 +2757,16 @@
           <a:cs typeface="+mn-cs"/>
         </a:defRPr>
       </a:lvl2pPr>
-      <a:lvl3pPr marL="1143000" indent="-228600" algn="l" defTabSz="457200" rtl="0" eaLnBrk="1" latinLnBrk="0" hangingPunct="1">
+      <a:lvl3pPr marL="1142657" indent="-228531" algn="l" defTabSz="914126" rtl="0" eaLnBrk="1" latinLnBrk="0" hangingPunct="1">
+        <a:lnSpc>
+          <a:spcPct val="90000"/>
+        </a:lnSpc>
         <a:spcBef>
-          <a:spcPct val="20000"/>
+          <a:spcPts val="500"/>
         </a:spcBef>
-        <a:buFont typeface="Arial"/>
+        <a:buFont typeface="Arial" panose="020B0604020202020204" pitchFamily="34" charset="0"/>
         <a:buChar char="•"/>
-        <a:defRPr sz="2400" kern="1200">
+        <a:defRPr sz="1999" kern="1200">
           <a:solidFill>
             <a:schemeClr val="tx1"/>
           </a:solidFill>
@@ -2900,13 +2775,16 @@
           <a:cs typeface="+mn-cs"/>
         </a:defRPr>
       </a:lvl3pPr>
-      <a:lvl4pPr marL="1600200" indent="-228600" algn="l" defTabSz="457200" rtl="0" eaLnBrk="1" latinLnBrk="0" hangingPunct="1">
+      <a:lvl4pPr marL="1599720" indent="-228531" algn="l" defTabSz="914126" rtl="0" eaLnBrk="1" latinLnBrk="0" hangingPunct="1">
+        <a:lnSpc>
+          <a:spcPct val="90000"/>
+        </a:lnSpc>
         <a:spcBef>
-          <a:spcPct val="20000"/>
+          <a:spcPts val="500"/>
         </a:spcBef>
-        <a:buFont typeface="Arial"/>
-        <a:buChar char="–"/>
-        <a:defRPr sz="2000" kern="1200">
+        <a:buFont typeface="Arial" panose="020B0604020202020204" pitchFamily="34" charset="0"/>
+        <a:buChar char="•"/>
+        <a:defRPr sz="1799" kern="1200">
           <a:solidFill>
             <a:schemeClr val="tx1"/>
           </a:solidFill>
@@ -2915,13 +2793,16 @@
           <a:cs typeface="+mn-cs"/>
         </a:defRPr>
       </a:lvl4pPr>
-      <a:lvl5pPr marL="2057400" indent="-228600" algn="l" defTabSz="457200" rtl="0" eaLnBrk="1" latinLnBrk="0" hangingPunct="1">
+      <a:lvl5pPr marL="2056783" indent="-228531" algn="l" defTabSz="914126" rtl="0" eaLnBrk="1" latinLnBrk="0" hangingPunct="1">
+        <a:lnSpc>
+          <a:spcPct val="90000"/>
+        </a:lnSpc>
         <a:spcBef>
-          <a:spcPct val="20000"/>
+          <a:spcPts val="500"/>
         </a:spcBef>
-        <a:buFont typeface="Arial"/>
-        <a:buChar char="»"/>
-        <a:defRPr sz="2000" kern="1200">
+        <a:buFont typeface="Arial" panose="020B0604020202020204" pitchFamily="34" charset="0"/>
+        <a:buChar char="•"/>
+        <a:defRPr sz="1799" kern="1200">
           <a:solidFill>
             <a:schemeClr val="tx1"/>
           </a:solidFill>
@@ -2930,13 +2811,16 @@
           <a:cs typeface="+mn-cs"/>
         </a:defRPr>
       </a:lvl5pPr>
-      <a:lvl6pPr marL="2514600" indent="-228600" algn="l" defTabSz="457200" rtl="0" eaLnBrk="1" latinLnBrk="0" hangingPunct="1">
+      <a:lvl6pPr marL="2513846" indent="-228531" algn="l" defTabSz="914126" rtl="0" eaLnBrk="1" latinLnBrk="0" hangingPunct="1">
+        <a:lnSpc>
+          <a:spcPct val="90000"/>
+        </a:lnSpc>
         <a:spcBef>
-          <a:spcPct val="20000"/>
+          <a:spcPts val="500"/>
         </a:spcBef>
-        <a:buFont typeface="Arial"/>
+        <a:buFont typeface="Arial" panose="020B0604020202020204" pitchFamily="34" charset="0"/>
         <a:buChar char="•"/>
-        <a:defRPr sz="2000" kern="1200">
+        <a:defRPr sz="1799" kern="1200">
           <a:solidFill>
             <a:schemeClr val="tx1"/>
           </a:solidFill>
@@ -2945,13 +2829,16 @@
           <a:cs typeface="+mn-cs"/>
         </a:defRPr>
       </a:lvl6pPr>
-      <a:lvl7pPr marL="2971800" indent="-228600" algn="l" defTabSz="457200" rtl="0" eaLnBrk="1" latinLnBrk="0" hangingPunct="1">
+      <a:lvl7pPr marL="2970908" indent="-228531" algn="l" defTabSz="914126" rtl="0" eaLnBrk="1" latinLnBrk="0" hangingPunct="1">
+        <a:lnSpc>
+          <a:spcPct val="90000"/>
+        </a:lnSpc>
         <a:spcBef>
-          <a:spcPct val="20000"/>
+          <a:spcPts val="500"/>
         </a:spcBef>
-        <a:buFont typeface="Arial"/>
+        <a:buFont typeface="Arial" panose="020B0604020202020204" pitchFamily="34" charset="0"/>
         <a:buChar char="•"/>
-        <a:defRPr sz="2000" kern="1200">
+        <a:defRPr sz="1799" kern="1200">
           <a:solidFill>
             <a:schemeClr val="tx1"/>
           </a:solidFill>
@@ -2960,13 +2847,16 @@
           <a:cs typeface="+mn-cs"/>
         </a:defRPr>
       </a:lvl7pPr>
-      <a:lvl8pPr marL="3429000" indent="-228600" algn="l" defTabSz="457200" rtl="0" eaLnBrk="1" latinLnBrk="0" hangingPunct="1">
+      <a:lvl8pPr marL="3427971" indent="-228531" algn="l" defTabSz="914126" rtl="0" eaLnBrk="1" latinLnBrk="0" hangingPunct="1">
+        <a:lnSpc>
+          <a:spcPct val="90000"/>
+        </a:lnSpc>
         <a:spcBef>
-          <a:spcPct val="20000"/>
+          <a:spcPts val="500"/>
         </a:spcBef>
-        <a:buFont typeface="Arial"/>
+        <a:buFont typeface="Arial" panose="020B0604020202020204" pitchFamily="34" charset="0"/>
         <a:buChar char="•"/>
-        <a:defRPr sz="2000" kern="1200">
+        <a:defRPr sz="1799" kern="1200">
           <a:solidFill>
             <a:schemeClr val="tx1"/>
           </a:solidFill>
@@ -2975,13 +2865,16 @@
           <a:cs typeface="+mn-cs"/>
         </a:defRPr>
       </a:lvl8pPr>
-      <a:lvl9pPr marL="3886200" indent="-228600" algn="l" defTabSz="457200" rtl="0" eaLnBrk="1" latinLnBrk="0" hangingPunct="1">
+      <a:lvl9pPr marL="3885034" indent="-228531" algn="l" defTabSz="914126" rtl="0" eaLnBrk="1" latinLnBrk="0" hangingPunct="1">
+        <a:lnSpc>
+          <a:spcPct val="90000"/>
+        </a:lnSpc>
         <a:spcBef>
-          <a:spcPct val="20000"/>
+          <a:spcPts val="500"/>
         </a:spcBef>
-        <a:buFont typeface="Arial"/>
+        <a:buFont typeface="Arial" panose="020B0604020202020204" pitchFamily="34" charset="0"/>
         <a:buChar char="•"/>
-        <a:defRPr sz="2000" kern="1200">
+        <a:defRPr sz="1799" kern="1200">
           <a:solidFill>
             <a:schemeClr val="tx1"/>
           </a:solidFill>
@@ -2995,8 +2888,8 @@
       <a:defPPr>
         <a:defRPr lang="en-US"/>
       </a:defPPr>
-      <a:lvl1pPr marL="0" algn="l" defTabSz="457200" rtl="0" eaLnBrk="1" latinLnBrk="0" hangingPunct="1">
-        <a:defRPr sz="1800" kern="1200">
+      <a:lvl1pPr marL="0" algn="l" defTabSz="914126" rtl="0" eaLnBrk="1" latinLnBrk="0" hangingPunct="1">
+        <a:defRPr sz="1799" kern="1200">
           <a:solidFill>
             <a:schemeClr val="tx1"/>
           </a:solidFill>
@@ -3005,8 +2898,8 @@
           <a:cs typeface="+mn-cs"/>
         </a:defRPr>
       </a:lvl1pPr>
-      <a:lvl2pPr marL="457200" algn="l" defTabSz="457200" rtl="0" eaLnBrk="1" latinLnBrk="0" hangingPunct="1">
-        <a:defRPr sz="1800" kern="1200">
+      <a:lvl2pPr marL="457063" algn="l" defTabSz="914126" rtl="0" eaLnBrk="1" latinLnBrk="0" hangingPunct="1">
+        <a:defRPr sz="1799" kern="1200">
           <a:solidFill>
             <a:schemeClr val="tx1"/>
           </a:solidFill>
@@ -3015,8 +2908,8 @@
           <a:cs typeface="+mn-cs"/>
         </a:defRPr>
       </a:lvl2pPr>
-      <a:lvl3pPr marL="914400" algn="l" defTabSz="457200" rtl="0" eaLnBrk="1" latinLnBrk="0" hangingPunct="1">
-        <a:defRPr sz="1800" kern="1200">
+      <a:lvl3pPr marL="914126" algn="l" defTabSz="914126" rtl="0" eaLnBrk="1" latinLnBrk="0" hangingPunct="1">
+        <a:defRPr sz="1799" kern="1200">
           <a:solidFill>
             <a:schemeClr val="tx1"/>
           </a:solidFill>
@@ -3025,8 +2918,8 @@
           <a:cs typeface="+mn-cs"/>
         </a:defRPr>
       </a:lvl3pPr>
-      <a:lvl4pPr marL="1371600" algn="l" defTabSz="457200" rtl="0" eaLnBrk="1" latinLnBrk="0" hangingPunct="1">
-        <a:defRPr sz="1800" kern="1200">
+      <a:lvl4pPr marL="1371189" algn="l" defTabSz="914126" rtl="0" eaLnBrk="1" latinLnBrk="0" hangingPunct="1">
+        <a:defRPr sz="1799" kern="1200">
           <a:solidFill>
             <a:schemeClr val="tx1"/>
           </a:solidFill>
@@ -3035,8 +2928,8 @@
           <a:cs typeface="+mn-cs"/>
         </a:defRPr>
       </a:lvl4pPr>
-      <a:lvl5pPr marL="1828800" algn="l" defTabSz="457200" rtl="0" eaLnBrk="1" latinLnBrk="0" hangingPunct="1">
-        <a:defRPr sz="1800" kern="1200">
+      <a:lvl5pPr marL="1828251" algn="l" defTabSz="914126" rtl="0" eaLnBrk="1" latinLnBrk="0" hangingPunct="1">
+        <a:defRPr sz="1799" kern="1200">
           <a:solidFill>
             <a:schemeClr val="tx1"/>
           </a:solidFill>
@@ -3045,8 +2938,8 @@
           <a:cs typeface="+mn-cs"/>
         </a:defRPr>
       </a:lvl5pPr>
-      <a:lvl6pPr marL="2286000" algn="l" defTabSz="457200" rtl="0" eaLnBrk="1" latinLnBrk="0" hangingPunct="1">
-        <a:defRPr sz="1800" kern="1200">
+      <a:lvl6pPr marL="2285314" algn="l" defTabSz="914126" rtl="0" eaLnBrk="1" latinLnBrk="0" hangingPunct="1">
+        <a:defRPr sz="1799" kern="1200">
           <a:solidFill>
             <a:schemeClr val="tx1"/>
           </a:solidFill>
@@ -3055,8 +2948,8 @@
           <a:cs typeface="+mn-cs"/>
         </a:defRPr>
       </a:lvl6pPr>
-      <a:lvl7pPr marL="2743200" algn="l" defTabSz="457200" rtl="0" eaLnBrk="1" latinLnBrk="0" hangingPunct="1">
-        <a:defRPr sz="1800" kern="1200">
+      <a:lvl7pPr marL="2742377" algn="l" defTabSz="914126" rtl="0" eaLnBrk="1" latinLnBrk="0" hangingPunct="1">
+        <a:defRPr sz="1799" kern="1200">
           <a:solidFill>
             <a:schemeClr val="tx1"/>
           </a:solidFill>
@@ -3065,8 +2958,8 @@
           <a:cs typeface="+mn-cs"/>
         </a:defRPr>
       </a:lvl7pPr>
-      <a:lvl8pPr marL="3200400" algn="l" defTabSz="457200" rtl="0" eaLnBrk="1" latinLnBrk="0" hangingPunct="1">
-        <a:defRPr sz="1800" kern="1200">
+      <a:lvl8pPr marL="3199440" algn="l" defTabSz="914126" rtl="0" eaLnBrk="1" latinLnBrk="0" hangingPunct="1">
+        <a:defRPr sz="1799" kern="1200">
           <a:solidFill>
             <a:schemeClr val="tx1"/>
           </a:solidFill>
@@ -3075,8 +2968,8 @@
           <a:cs typeface="+mn-cs"/>
         </a:defRPr>
       </a:lvl8pPr>
-      <a:lvl9pPr marL="3657600" algn="l" defTabSz="457200" rtl="0" eaLnBrk="1" latinLnBrk="0" hangingPunct="1">
-        <a:defRPr sz="1800" kern="1200">
+      <a:lvl9pPr marL="3656503" algn="l" defTabSz="914126" rtl="0" eaLnBrk="1" latinLnBrk="0" hangingPunct="1">
+        <a:defRPr sz="1799" kern="1200">
           <a:solidFill>
             <a:schemeClr val="tx1"/>
           </a:solidFill>
@@ -3091,7 +2984,7 @@
 </file>
 
 <file path=ppt/slides/slide1.xml><?xml version="1.0" encoding="utf-8"?>
-<p:sld xmlns:a="http://schemas.openxmlformats.org/drawingml/2006/main" xmlns:p="http://schemas.openxmlformats.org/presentationml/2006/main" xmlns:r="http://schemas.openxmlformats.org/officeDocument/2006/relationships">
+<p:sld xmlns:a="http://schemas.openxmlformats.org/drawingml/2006/main" xmlns:r="http://schemas.openxmlformats.org/officeDocument/2006/relationships" xmlns:p="http://schemas.openxmlformats.org/presentationml/2006/main">
   <p:cSld>
     <p:bg>
       <p:bgPr>
@@ -3107,7 +3000,14 @@
         <p:cNvGrpSpPr/>
         <p:nvPr/>
       </p:nvGrpSpPr>
-      <p:grpSpPr/>
+      <p:grpSpPr>
+        <a:xfrm>
+          <a:off x="0" y="0"/>
+          <a:ext cx="0" cy="0"/>
+          <a:chOff x="0" y="0"/>
+          <a:chExt cx="0" cy="0"/>
+        </a:xfrm>
+      </p:grpSpPr>
       <p:sp>
         <p:nvSpPr>
           <p:cNvPr id="2" name="Rectangle 1"/>
@@ -3149,6 +3049,7 @@
           <a:lstStyle/>
           <a:p>
             <a:pPr algn="ctr"/>
+            <a:endParaRPr/>
           </a:p>
         </p:txBody>
       </p:sp>
@@ -3193,6 +3094,7 @@
           <a:lstStyle/>
           <a:p>
             <a:pPr algn="ctr"/>
+            <a:endParaRPr/>
           </a:p>
         </p:txBody>
       </p:sp>
@@ -3237,6 +3139,7 @@
           <a:lstStyle/>
           <a:p>
             <a:pPr algn="ctr"/>
+            <a:endParaRPr/>
           </a:p>
         </p:txBody>
       </p:sp>
@@ -3281,6 +3184,7 @@
           <a:lstStyle/>
           <a:p>
             <a:pPr algn="ctr"/>
+            <a:endParaRPr/>
           </a:p>
         </p:txBody>
       </p:sp>
@@ -3325,6 +3229,7 @@
           <a:lstStyle/>
           <a:p>
             <a:pPr algn="ctr"/>
+            <a:endParaRPr/>
           </a:p>
         </p:txBody>
       </p:sp>
@@ -3352,7 +3257,7 @@
           <a:p>
             <a:pPr algn="l"/>
             <a:r>
-              <a:rPr b="1" i="0" sz="1100">
+              <a:rPr sz="1100" b="1" i="0">
                 <a:solidFill>
                   <a:srgbClr val="387EF5"/>
                 </a:solidFill>
@@ -3386,7 +3291,7 @@
           <a:p>
             <a:pPr algn="l"/>
             <a:r>
-              <a:rPr b="1" i="0" sz="7200">
+              <a:rPr sz="7200" b="1" i="0">
                 <a:solidFill>
                   <a:srgbClr val="F8FAFC"/>
                 </a:solidFill>
@@ -3420,7 +3325,7 @@
           <a:p>
             <a:pPr algn="l"/>
             <a:r>
-              <a:rPr b="0" i="0" sz="2200">
+              <a:rPr sz="2200" b="0" i="0">
                 <a:solidFill>
                   <a:srgbClr val="94A3B8"/>
                 </a:solidFill>
@@ -3454,7 +3359,7 @@
           <a:p>
             <a:pPr algn="l"/>
             <a:r>
-              <a:rPr b="0" i="1" sz="1600">
+              <a:rPr sz="1600" b="0" i="1">
                 <a:solidFill>
                   <a:srgbClr val="3D506A"/>
                 </a:solidFill>
@@ -3505,6 +3410,7 @@
           <a:lstStyle/>
           <a:p>
             <a:pPr algn="ctr"/>
+            <a:endParaRPr/>
           </a:p>
         </p:txBody>
       </p:sp>
@@ -3536,7 +3442,7 @@
               </a:lnSpc>
             </a:pPr>
             <a:r>
-              <a:rPr b="1" sz="1300">
+              <a:rPr sz="1300" b="1">
                 <a:solidFill>
                   <a:srgbClr val="F8FAFC"/>
                 </a:solidFill>
@@ -3551,7 +3457,7 @@
               </a:lnSpc>
             </a:pPr>
             <a:r>
-              <a:rPr b="0" sz="1100">
+              <a:rPr sz="1100" b="0">
                 <a:solidFill>
                   <a:srgbClr val="94A3B8"/>
                 </a:solidFill>
@@ -3566,16 +3472,12 @@
   <p:clrMapOvr>
     <a:masterClrMapping/>
   </p:clrMapOvr>
-  <p:transition xmlns:p14="http://schemas.microsoft.com/office/powerpoint/2010/main" spd="med" advTm="0">
-    <p14:transition inverted="0">
-      <p14:morph option="byObject"/>
-    </p14:transition>
-  </p:transition>
+  <p:transition spd="med" advTm="0"/>
 </p:sld>
 </file>
 
 <file path=ppt/slides/slide10.xml><?xml version="1.0" encoding="utf-8"?>
-<p:sld xmlns:a="http://schemas.openxmlformats.org/drawingml/2006/main" xmlns:p="http://schemas.openxmlformats.org/presentationml/2006/main" xmlns:r="http://schemas.openxmlformats.org/officeDocument/2006/relationships">
+<p:sld xmlns:a="http://schemas.openxmlformats.org/drawingml/2006/main" xmlns:r="http://schemas.openxmlformats.org/officeDocument/2006/relationships" xmlns:p="http://schemas.openxmlformats.org/presentationml/2006/main">
   <p:cSld>
     <p:bg>
       <p:bgPr>
@@ -3591,7 +3493,14 @@
         <p:cNvGrpSpPr/>
         <p:nvPr/>
       </p:nvGrpSpPr>
-      <p:grpSpPr/>
+      <p:grpSpPr>
+        <a:xfrm>
+          <a:off x="0" y="0"/>
+          <a:ext cx="0" cy="0"/>
+          <a:chOff x="0" y="0"/>
+          <a:chExt cx="0" cy="0"/>
+        </a:xfrm>
+      </p:grpSpPr>
       <p:sp>
         <p:nvSpPr>
           <p:cNvPr id="2" name="Rectangle 1"/>
@@ -3633,6 +3542,7 @@
           <a:lstStyle/>
           <a:p>
             <a:pPr algn="ctr"/>
+            <a:endParaRPr/>
           </a:p>
         </p:txBody>
       </p:sp>
@@ -3679,6 +3589,7 @@
           <a:lstStyle/>
           <a:p>
             <a:pPr algn="ctr"/>
+            <a:endParaRPr/>
           </a:p>
         </p:txBody>
       </p:sp>
@@ -3706,7 +3617,7 @@
           <a:p>
             <a:pPr algn="ctr"/>
             <a:r>
-              <a:rPr b="1" i="0" sz="900">
+              <a:rPr sz="900" b="1" i="0">
                 <a:solidFill>
                   <a:srgbClr val="F8FAFC"/>
                 </a:solidFill>
@@ -3740,7 +3651,7 @@
           <a:p>
             <a:pPr algn="l"/>
             <a:r>
-              <a:rPr b="1" i="0" sz="2800">
+              <a:rPr sz="2800" b="1" i="0">
                 <a:solidFill>
                   <a:srgbClr val="F8FAFC"/>
                 </a:solidFill>
@@ -3791,6 +3702,7 @@
           <a:lstStyle/>
           <a:p>
             <a:pPr algn="ctr"/>
+            <a:endParaRPr/>
           </a:p>
         </p:txBody>
       </p:sp>
@@ -3839,6 +3751,7 @@
           <a:lstStyle/>
           <a:p>
             <a:pPr algn="ctr"/>
+            <a:endParaRPr/>
           </a:p>
         </p:txBody>
       </p:sp>
@@ -3883,6 +3796,7 @@
           <a:lstStyle/>
           <a:p>
             <a:pPr algn="ctr"/>
+            <a:endParaRPr/>
           </a:p>
         </p:txBody>
       </p:sp>
@@ -3910,7 +3824,7 @@
           <a:p>
             <a:pPr algn="l"/>
             <a:r>
-              <a:rPr b="1" i="0" sz="1400">
+              <a:rPr sz="1400" b="1" i="0">
                 <a:solidFill>
                   <a:srgbClr val="387EF5"/>
                 </a:solidFill>
@@ -3944,7 +3858,7 @@
           <a:p>
             <a:pPr algn="l"/>
             <a:r>
-              <a:rPr b="0" i="0" sz="1050">
+              <a:rPr sz="1050" b="0" i="0">
                 <a:solidFill>
                   <a:srgbClr val="94A3B8"/>
                 </a:solidFill>
@@ -3978,7 +3892,7 @@
           <a:p>
             <a:pPr algn="l"/>
             <a:r>
-              <a:rPr b="0" i="0" sz="1050">
+              <a:rPr sz="1050" b="0" i="0">
                 <a:solidFill>
                   <a:srgbClr val="94A3B8"/>
                 </a:solidFill>
@@ -4012,7 +3926,7 @@
           <a:p>
             <a:pPr algn="l"/>
             <a:r>
-              <a:rPr b="0" i="0" sz="1050">
+              <a:rPr sz="1050" b="0" i="0">
                 <a:solidFill>
                   <a:srgbClr val="94A3B8"/>
                 </a:solidFill>
@@ -4067,6 +3981,7 @@
           <a:lstStyle/>
           <a:p>
             <a:pPr algn="ctr"/>
+            <a:endParaRPr/>
           </a:p>
         </p:txBody>
       </p:sp>
@@ -4111,6 +4026,7 @@
           <a:lstStyle/>
           <a:p>
             <a:pPr algn="ctr"/>
+            <a:endParaRPr/>
           </a:p>
         </p:txBody>
       </p:sp>
@@ -4138,7 +4054,7 @@
           <a:p>
             <a:pPr algn="l"/>
             <a:r>
-              <a:rPr b="1" i="0" sz="1400">
+              <a:rPr sz="1400" b="1" i="0">
                 <a:solidFill>
                   <a:srgbClr val="0DB57C"/>
                 </a:solidFill>
@@ -4172,7 +4088,7 @@
           <a:p>
             <a:pPr algn="l"/>
             <a:r>
-              <a:rPr b="0" i="0" sz="1050">
+              <a:rPr sz="1050" b="0" i="0">
                 <a:solidFill>
                   <a:srgbClr val="94A3B8"/>
                 </a:solidFill>
@@ -4206,7 +4122,7 @@
           <a:p>
             <a:pPr algn="l"/>
             <a:r>
-              <a:rPr b="0" i="0" sz="1050">
+              <a:rPr sz="1050" b="0" i="0">
                 <a:solidFill>
                   <a:srgbClr val="94A3B8"/>
                 </a:solidFill>
@@ -4240,7 +4156,7 @@
           <a:p>
             <a:pPr algn="l"/>
             <a:r>
-              <a:rPr b="0" i="0" sz="1050">
+              <a:rPr sz="1050" b="0" i="0" dirty="0">
                 <a:solidFill>
                   <a:srgbClr val="94A3B8"/>
                 </a:solidFill>
@@ -4295,6 +4211,7 @@
           <a:lstStyle/>
           <a:p>
             <a:pPr algn="ctr"/>
+            <a:endParaRPr/>
           </a:p>
         </p:txBody>
       </p:sp>
@@ -4339,6 +4256,7 @@
           <a:lstStyle/>
           <a:p>
             <a:pPr algn="ctr"/>
+            <a:endParaRPr/>
           </a:p>
         </p:txBody>
       </p:sp>
@@ -4366,7 +4284,7 @@
           <a:p>
             <a:pPr algn="l"/>
             <a:r>
-              <a:rPr b="1" i="0" sz="1400">
+              <a:rPr sz="1400" b="1" i="0">
                 <a:solidFill>
                   <a:srgbClr val="F59E0B"/>
                 </a:solidFill>
@@ -4400,7 +4318,7 @@
           <a:p>
             <a:pPr algn="l"/>
             <a:r>
-              <a:rPr b="0" i="0" sz="1050">
+              <a:rPr sz="1050" b="0" i="0">
                 <a:solidFill>
                   <a:srgbClr val="94A3B8"/>
                 </a:solidFill>
@@ -4434,7 +4352,7 @@
           <a:p>
             <a:pPr algn="l"/>
             <a:r>
-              <a:rPr b="0" i="0" sz="1050">
+              <a:rPr sz="1050" b="0" i="0">
                 <a:solidFill>
                   <a:srgbClr val="94A3B8"/>
                 </a:solidFill>
@@ -4468,7 +4386,7 @@
           <a:p>
             <a:pPr algn="l"/>
             <a:r>
-              <a:rPr b="0" i="0" sz="1050">
+              <a:rPr sz="1050" b="0" i="0">
                 <a:solidFill>
                   <a:srgbClr val="94A3B8"/>
                 </a:solidFill>
@@ -4523,6 +4441,7 @@
           <a:lstStyle/>
           <a:p>
             <a:pPr algn="ctr"/>
+            <a:endParaRPr/>
           </a:p>
         </p:txBody>
       </p:sp>
@@ -4567,6 +4486,7 @@
           <a:lstStyle/>
           <a:p>
             <a:pPr algn="ctr"/>
+            <a:endParaRPr/>
           </a:p>
         </p:txBody>
       </p:sp>
@@ -4594,7 +4514,7 @@
           <a:p>
             <a:pPr algn="l"/>
             <a:r>
-              <a:rPr b="1" i="0" sz="1400">
+              <a:rPr sz="1400" b="1" i="0" dirty="0">
                 <a:solidFill>
                   <a:srgbClr val="8B5CF6"/>
                 </a:solidFill>
@@ -4628,7 +4548,7 @@
           <a:p>
             <a:pPr algn="l"/>
             <a:r>
-              <a:rPr b="0" i="0" sz="1050">
+              <a:rPr sz="1050" b="0" i="0">
                 <a:solidFill>
                   <a:srgbClr val="94A3B8"/>
                 </a:solidFill>
@@ -4662,7 +4582,7 @@
           <a:p>
             <a:pPr algn="l"/>
             <a:r>
-              <a:rPr b="0" i="0" sz="1050">
+              <a:rPr sz="1050" b="0" i="0">
                 <a:solidFill>
                   <a:srgbClr val="94A3B8"/>
                 </a:solidFill>
@@ -4696,7 +4616,7 @@
           <a:p>
             <a:pPr algn="l"/>
             <a:r>
-              <a:rPr b="0" i="0" sz="1050">
+              <a:rPr sz="1050" b="0" i="0">
                 <a:solidFill>
                   <a:srgbClr val="94A3B8"/>
                 </a:solidFill>
@@ -4711,16 +4631,12 @@
   <p:clrMapOvr>
     <a:masterClrMapping/>
   </p:clrMapOvr>
-  <p:transition xmlns:p14="http://schemas.microsoft.com/office/powerpoint/2010/main" spd="med" advTm="0">
-    <p14:transition inverted="0">
-      <p14:morph option="byObject"/>
-    </p14:transition>
-  </p:transition>
+  <p:transition spd="med" advTm="0"/>
 </p:sld>
 </file>
 
 <file path=ppt/slides/slide11.xml><?xml version="1.0" encoding="utf-8"?>
-<p:sld xmlns:a="http://schemas.openxmlformats.org/drawingml/2006/main" xmlns:p="http://schemas.openxmlformats.org/presentationml/2006/main" xmlns:r="http://schemas.openxmlformats.org/officeDocument/2006/relationships">
+<p:sld xmlns:a="http://schemas.openxmlformats.org/drawingml/2006/main" xmlns:r="http://schemas.openxmlformats.org/officeDocument/2006/relationships" xmlns:p="http://schemas.openxmlformats.org/presentationml/2006/main">
   <p:cSld>
     <p:bg>
       <p:bgPr>
@@ -4736,7 +4652,14 @@
         <p:cNvGrpSpPr/>
         <p:nvPr/>
       </p:nvGrpSpPr>
-      <p:grpSpPr/>
+      <p:grpSpPr>
+        <a:xfrm>
+          <a:off x="0" y="0"/>
+          <a:ext cx="0" cy="0"/>
+          <a:chOff x="0" y="0"/>
+          <a:chExt cx="0" cy="0"/>
+        </a:xfrm>
+      </p:grpSpPr>
       <p:sp>
         <p:nvSpPr>
           <p:cNvPr id="2" name="Rectangle 1"/>
@@ -4778,6 +4701,7 @@
           <a:lstStyle/>
           <a:p>
             <a:pPr algn="ctr"/>
+            <a:endParaRPr/>
           </a:p>
         </p:txBody>
       </p:sp>
@@ -4824,6 +4748,7 @@
           <a:lstStyle/>
           <a:p>
             <a:pPr algn="ctr"/>
+            <a:endParaRPr/>
           </a:p>
         </p:txBody>
       </p:sp>
@@ -4851,7 +4776,7 @@
           <a:p>
             <a:pPr algn="ctr"/>
             <a:r>
-              <a:rPr b="1" i="0" sz="900">
+              <a:rPr sz="900" b="1" i="0">
                 <a:solidFill>
                   <a:srgbClr val="F8FAFC"/>
                 </a:solidFill>
@@ -4885,7 +4810,7 @@
           <a:p>
             <a:pPr algn="l"/>
             <a:r>
-              <a:rPr b="1" i="0" sz="2600">
+              <a:rPr sz="2600" b="1" i="0">
                 <a:solidFill>
                   <a:srgbClr val="F8FAFC"/>
                 </a:solidFill>
@@ -4936,6 +4861,7 @@
           <a:lstStyle/>
           <a:p>
             <a:pPr algn="ctr"/>
+            <a:endParaRPr/>
           </a:p>
         </p:txBody>
       </p:sp>
@@ -4984,6 +4910,7 @@
           <a:lstStyle/>
           <a:p>
             <a:pPr algn="ctr"/>
+            <a:endParaRPr/>
           </a:p>
         </p:txBody>
       </p:sp>
@@ -5030,6 +4957,7 @@
           <a:lstStyle/>
           <a:p>
             <a:pPr algn="ctr"/>
+            <a:endParaRPr/>
           </a:p>
         </p:txBody>
       </p:sp>
@@ -5057,7 +4985,7 @@
           <a:p>
             <a:pPr algn="ctr"/>
             <a:r>
-              <a:rPr b="1" i="0" sz="1300">
+              <a:rPr sz="1300" b="1" i="0">
                 <a:solidFill>
                   <a:srgbClr val="F8FAFC"/>
                 </a:solidFill>
@@ -5091,7 +5019,7 @@
           <a:p>
             <a:pPr algn="l"/>
             <a:r>
-              <a:rPr b="1" i="0" sz="1050">
+              <a:rPr sz="1050" b="1" i="0">
                 <a:solidFill>
                   <a:srgbClr val="F8FAFC"/>
                 </a:solidFill>
@@ -5142,6 +5070,7 @@
           <a:lstStyle/>
           <a:p>
             <a:pPr algn="ctr"/>
+            <a:endParaRPr/>
           </a:p>
         </p:txBody>
       </p:sp>
@@ -5169,7 +5098,7 @@
           <a:p>
             <a:pPr algn="l"/>
             <a:r>
-              <a:rPr b="0" i="0" sz="1050">
+              <a:rPr sz="1050" b="0" i="0">
                 <a:solidFill>
                   <a:srgbClr val="94A3B8"/>
                 </a:solidFill>
@@ -5225,6 +5154,7 @@
           <a:lstStyle/>
           <a:p>
             <a:pPr algn="ctr"/>
+            <a:endParaRPr/>
           </a:p>
         </p:txBody>
       </p:sp>
@@ -5271,6 +5201,7 @@
           <a:lstStyle/>
           <a:p>
             <a:pPr algn="ctr"/>
+            <a:endParaRPr/>
           </a:p>
         </p:txBody>
       </p:sp>
@@ -5298,7 +5229,7 @@
           <a:p>
             <a:pPr algn="ctr"/>
             <a:r>
-              <a:rPr b="1" i="0" sz="1300">
+              <a:rPr sz="1300" b="1" i="0">
                 <a:solidFill>
                   <a:srgbClr val="F8FAFC"/>
                 </a:solidFill>
@@ -5332,7 +5263,7 @@
           <a:p>
             <a:pPr algn="l"/>
             <a:r>
-              <a:rPr b="1" i="0" sz="1050">
+              <a:rPr sz="1050" b="1" i="0">
                 <a:solidFill>
                   <a:srgbClr val="F8FAFC"/>
                 </a:solidFill>
@@ -5383,6 +5314,7 @@
           <a:lstStyle/>
           <a:p>
             <a:pPr algn="ctr"/>
+            <a:endParaRPr/>
           </a:p>
         </p:txBody>
       </p:sp>
@@ -5410,7 +5342,7 @@
           <a:p>
             <a:pPr algn="l"/>
             <a:r>
-              <a:rPr b="0" i="0" sz="1050">
+              <a:rPr sz="1050" b="0" i="0">
                 <a:solidFill>
                   <a:srgbClr val="94A3B8"/>
                 </a:solidFill>
@@ -5466,6 +5398,7 @@
           <a:lstStyle/>
           <a:p>
             <a:pPr algn="ctr"/>
+            <a:endParaRPr/>
           </a:p>
         </p:txBody>
       </p:sp>
@@ -5512,6 +5445,7 @@
           <a:lstStyle/>
           <a:p>
             <a:pPr algn="ctr"/>
+            <a:endParaRPr/>
           </a:p>
         </p:txBody>
       </p:sp>
@@ -5539,7 +5473,7 @@
           <a:p>
             <a:pPr algn="ctr"/>
             <a:r>
-              <a:rPr b="1" i="0" sz="1300">
+              <a:rPr sz="1300" b="1" i="0">
                 <a:solidFill>
                   <a:srgbClr val="F8FAFC"/>
                 </a:solidFill>
@@ -5573,7 +5507,7 @@
           <a:p>
             <a:pPr algn="l"/>
             <a:r>
-              <a:rPr b="1" i="0" sz="1050">
+              <a:rPr sz="1050" b="1" i="0">
                 <a:solidFill>
                   <a:srgbClr val="F8FAFC"/>
                 </a:solidFill>
@@ -5624,6 +5558,7 @@
           <a:lstStyle/>
           <a:p>
             <a:pPr algn="ctr"/>
+            <a:endParaRPr/>
           </a:p>
         </p:txBody>
       </p:sp>
@@ -5651,7 +5586,7 @@
           <a:p>
             <a:pPr algn="l"/>
             <a:r>
-              <a:rPr b="0" i="0" sz="1050">
+              <a:rPr sz="1050" b="0" i="0">
                 <a:solidFill>
                   <a:srgbClr val="94A3B8"/>
                 </a:solidFill>
@@ -5707,6 +5642,7 @@
           <a:lstStyle/>
           <a:p>
             <a:pPr algn="ctr"/>
+            <a:endParaRPr/>
           </a:p>
         </p:txBody>
       </p:sp>
@@ -5753,6 +5689,7 @@
           <a:lstStyle/>
           <a:p>
             <a:pPr algn="ctr"/>
+            <a:endParaRPr/>
           </a:p>
         </p:txBody>
       </p:sp>
@@ -5780,7 +5717,7 @@
           <a:p>
             <a:pPr algn="ctr"/>
             <a:r>
-              <a:rPr b="1" i="0" sz="1300">
+              <a:rPr sz="1300" b="1" i="0">
                 <a:solidFill>
                   <a:srgbClr val="F8FAFC"/>
                 </a:solidFill>
@@ -5814,7 +5751,7 @@
           <a:p>
             <a:pPr algn="l"/>
             <a:r>
-              <a:rPr b="1" i="0" sz="1050">
+              <a:rPr sz="1050" b="1" i="0">
                 <a:solidFill>
                   <a:srgbClr val="F8FAFC"/>
                 </a:solidFill>
@@ -5865,6 +5802,7 @@
           <a:lstStyle/>
           <a:p>
             <a:pPr algn="ctr"/>
+            <a:endParaRPr/>
           </a:p>
         </p:txBody>
       </p:sp>
@@ -5892,7 +5830,7 @@
           <a:p>
             <a:pPr algn="l"/>
             <a:r>
-              <a:rPr b="0" i="0" sz="1050">
+              <a:rPr sz="1050" b="0" i="0">
                 <a:solidFill>
                   <a:srgbClr val="94A3B8"/>
                 </a:solidFill>
@@ -5948,6 +5886,7 @@
           <a:lstStyle/>
           <a:p>
             <a:pPr algn="ctr"/>
+            <a:endParaRPr/>
           </a:p>
         </p:txBody>
       </p:sp>
@@ -5994,6 +5933,7 @@
           <a:lstStyle/>
           <a:p>
             <a:pPr algn="ctr"/>
+            <a:endParaRPr/>
           </a:p>
         </p:txBody>
       </p:sp>
@@ -6021,7 +5961,7 @@
           <a:p>
             <a:pPr algn="ctr"/>
             <a:r>
-              <a:rPr b="1" i="0" sz="1300">
+              <a:rPr sz="1300" b="1" i="0">
                 <a:solidFill>
                   <a:srgbClr val="F8FAFC"/>
                 </a:solidFill>
@@ -6055,7 +5995,7 @@
           <a:p>
             <a:pPr algn="l"/>
             <a:r>
-              <a:rPr b="1" i="0" sz="1050">
+              <a:rPr sz="1050" b="1" i="0">
                 <a:solidFill>
                   <a:srgbClr val="F8FAFC"/>
                 </a:solidFill>
@@ -6106,6 +6046,7 @@
           <a:lstStyle/>
           <a:p>
             <a:pPr algn="ctr"/>
+            <a:endParaRPr/>
           </a:p>
         </p:txBody>
       </p:sp>
@@ -6133,7 +6074,7 @@
           <a:p>
             <a:pPr algn="l"/>
             <a:r>
-              <a:rPr b="0" i="0" sz="1050">
+              <a:rPr sz="1050" b="0" i="0">
                 <a:solidFill>
                   <a:srgbClr val="94A3B8"/>
                 </a:solidFill>
@@ -6189,6 +6130,7 @@
           <a:lstStyle/>
           <a:p>
             <a:pPr algn="ctr"/>
+            <a:endParaRPr/>
           </a:p>
         </p:txBody>
       </p:sp>
@@ -6235,6 +6177,7 @@
           <a:lstStyle/>
           <a:p>
             <a:pPr algn="ctr"/>
+            <a:endParaRPr/>
           </a:p>
         </p:txBody>
       </p:sp>
@@ -6262,7 +6205,7 @@
           <a:p>
             <a:pPr algn="ctr"/>
             <a:r>
-              <a:rPr b="1" i="0" sz="1300">
+              <a:rPr sz="1300" b="1" i="0">
                 <a:solidFill>
                   <a:srgbClr val="F8FAFC"/>
                 </a:solidFill>
@@ -6296,7 +6239,7 @@
           <a:p>
             <a:pPr algn="l"/>
             <a:r>
-              <a:rPr b="1" i="0" sz="1050">
+              <a:rPr sz="1050" b="1" i="0">
                 <a:solidFill>
                   <a:srgbClr val="F8FAFC"/>
                 </a:solidFill>
@@ -6347,6 +6290,7 @@
           <a:lstStyle/>
           <a:p>
             <a:pPr algn="ctr"/>
+            <a:endParaRPr/>
           </a:p>
         </p:txBody>
       </p:sp>
@@ -6374,7 +6318,7 @@
           <a:p>
             <a:pPr algn="l"/>
             <a:r>
-              <a:rPr b="0" i="0" sz="1050">
+              <a:rPr sz="1050" b="0" i="0">
                 <a:solidFill>
                   <a:srgbClr val="94A3B8"/>
                 </a:solidFill>
@@ -6390,16 +6334,286 @@
   <p:clrMapOvr>
     <a:masterClrMapping/>
   </p:clrMapOvr>
-  <p:transition xmlns:p14="http://schemas.microsoft.com/office/powerpoint/2010/main" spd="med" advTm="0">
-    <p14:transition inverted="0">
-      <p14:morph option="byObject"/>
-    </p14:transition>
-  </p:transition>
+  <p:transition spd="med" advTm="0"/>
 </p:sld>
 </file>
 
 <file path=ppt/slides/slide12.xml><?xml version="1.0" encoding="utf-8"?>
-<p:sld xmlns:a="http://schemas.openxmlformats.org/drawingml/2006/main" xmlns:p="http://schemas.openxmlformats.org/presentationml/2006/main" xmlns:r="http://schemas.openxmlformats.org/officeDocument/2006/relationships">
+<p:sld xmlns:a="http://schemas.openxmlformats.org/drawingml/2006/main" xmlns:r="http://schemas.openxmlformats.org/officeDocument/2006/relationships" xmlns:p="http://schemas.openxmlformats.org/presentationml/2006/main">
+  <p:cSld>
+    <p:spTree>
+      <p:nvGrpSpPr>
+        <p:cNvPr id="1" name=""/>
+        <p:cNvGrpSpPr/>
+        <p:nvPr/>
+      </p:nvGrpSpPr>
+      <p:grpSpPr>
+        <a:xfrm>
+          <a:off x="0" y="0"/>
+          <a:ext cx="0" cy="0"/>
+          <a:chOff x="0" y="0"/>
+          <a:chExt cx="0" cy="0"/>
+        </a:xfrm>
+      </p:grpSpPr>
+      <p:pic>
+        <p:nvPicPr>
+          <p:cNvPr id="44" name="Picture 43">
+            <a:extLst>
+              <a:ext uri="{FF2B5EF4-FFF2-40B4-BE49-F238E27FC236}">
+                <a16:creationId xmlns:a16="http://schemas.microsoft.com/office/drawing/2014/main" id="{31A59536-5FFD-12F9-F92A-EE43022D1BF1}"/>
+              </a:ext>
+            </a:extLst>
+          </p:cNvPr>
+          <p:cNvPicPr>
+            <a:picLocks noChangeAspect="1"/>
+          </p:cNvPicPr>
+          <p:nvPr/>
+        </p:nvPicPr>
+        <p:blipFill>
+          <a:blip r:embed="rId2"/>
+          <a:stretch>
+            <a:fillRect/>
+          </a:stretch>
+        </p:blipFill>
+        <p:spPr>
+          <a:xfrm>
+            <a:off x="2208212" y="1796957"/>
+            <a:ext cx="7772400" cy="3264085"/>
+          </a:xfrm>
+          <a:prstGeom prst="rect">
+            <a:avLst/>
+          </a:prstGeom>
+        </p:spPr>
+      </p:pic>
+      <p:pic>
+        <p:nvPicPr>
+          <p:cNvPr id="48" name="Picture 47">
+            <a:extLst>
+              <a:ext uri="{FF2B5EF4-FFF2-40B4-BE49-F238E27FC236}">
+                <a16:creationId xmlns:a16="http://schemas.microsoft.com/office/drawing/2014/main" id="{5A8C0E9D-C67A-8BE7-E90F-86A7247A60C3}"/>
+              </a:ext>
+            </a:extLst>
+          </p:cNvPr>
+          <p:cNvPicPr>
+            <a:picLocks noChangeAspect="1"/>
+          </p:cNvPicPr>
+          <p:nvPr/>
+        </p:nvPicPr>
+        <p:blipFill>
+          <a:blip r:embed="rId3"/>
+          <a:stretch>
+            <a:fillRect/>
+          </a:stretch>
+        </p:blipFill>
+        <p:spPr>
+          <a:xfrm>
+            <a:off x="4104763" y="5398319"/>
+            <a:ext cx="2984500" cy="279400"/>
+          </a:xfrm>
+          <a:prstGeom prst="rect">
+            <a:avLst/>
+          </a:prstGeom>
+        </p:spPr>
+      </p:pic>
+    </p:spTree>
+    <p:extLst>
+      <p:ext uri="{BB962C8B-B14F-4D97-AF65-F5344CB8AC3E}">
+        <p14:creationId xmlns:p14="http://schemas.microsoft.com/office/powerpoint/2010/main" val="3939888666"/>
+      </p:ext>
+    </p:extLst>
+  </p:cSld>
+  <p:clrMapOvr>
+    <a:masterClrMapping/>
+  </p:clrMapOvr>
+  <p:transition spd="med" advTm="0"/>
+</p:sld>
+</file>
+
+<file path=ppt/slides/slide13.xml><?xml version="1.0" encoding="utf-8"?>
+<p:sld xmlns:a="http://schemas.openxmlformats.org/drawingml/2006/main" xmlns:r="http://schemas.openxmlformats.org/officeDocument/2006/relationships" xmlns:p="http://schemas.openxmlformats.org/presentationml/2006/main">
+  <p:cSld>
+    <p:spTree>
+      <p:nvGrpSpPr>
+        <p:cNvPr id="1" name=""/>
+        <p:cNvGrpSpPr/>
+        <p:nvPr/>
+      </p:nvGrpSpPr>
+      <p:grpSpPr>
+        <a:xfrm>
+          <a:off x="0" y="0"/>
+          <a:ext cx="0" cy="0"/>
+          <a:chOff x="0" y="0"/>
+          <a:chExt cx="0" cy="0"/>
+        </a:xfrm>
+      </p:grpSpPr>
+      <p:pic>
+        <p:nvPicPr>
+          <p:cNvPr id="3" name="Picture 2">
+            <a:extLst>
+              <a:ext uri="{FF2B5EF4-FFF2-40B4-BE49-F238E27FC236}">
+                <a16:creationId xmlns:a16="http://schemas.microsoft.com/office/drawing/2014/main" id="{7A8E2F33-1F39-21A8-9EFD-98DDFF4357F0}"/>
+              </a:ext>
+            </a:extLst>
+          </p:cNvPr>
+          <p:cNvPicPr>
+            <a:picLocks noChangeAspect="1"/>
+          </p:cNvPicPr>
+          <p:nvPr/>
+        </p:nvPicPr>
+        <p:blipFill>
+          <a:blip r:embed="rId2"/>
+          <a:stretch>
+            <a:fillRect/>
+          </a:stretch>
+        </p:blipFill>
+        <p:spPr>
+          <a:xfrm>
+            <a:off x="2208212" y="610730"/>
+            <a:ext cx="7772400" cy="5636540"/>
+          </a:xfrm>
+          <a:prstGeom prst="rect">
+            <a:avLst/>
+          </a:prstGeom>
+        </p:spPr>
+      </p:pic>
+    </p:spTree>
+    <p:extLst>
+      <p:ext uri="{BB962C8B-B14F-4D97-AF65-F5344CB8AC3E}">
+        <p14:creationId xmlns:p14="http://schemas.microsoft.com/office/powerpoint/2010/main" val="4243010098"/>
+      </p:ext>
+    </p:extLst>
+  </p:cSld>
+  <p:clrMapOvr>
+    <a:masterClrMapping/>
+  </p:clrMapOvr>
+  <p:transition spd="med" advTm="0"/>
+</p:sld>
+</file>
+
+<file path=ppt/slides/slide14.xml><?xml version="1.0" encoding="utf-8"?>
+<p:sld xmlns:a="http://schemas.openxmlformats.org/drawingml/2006/main" xmlns:r="http://schemas.openxmlformats.org/officeDocument/2006/relationships" xmlns:p="http://schemas.openxmlformats.org/presentationml/2006/main">
+  <p:cSld>
+    <p:spTree>
+      <p:nvGrpSpPr>
+        <p:cNvPr id="1" name=""/>
+        <p:cNvGrpSpPr/>
+        <p:nvPr/>
+      </p:nvGrpSpPr>
+      <p:grpSpPr>
+        <a:xfrm>
+          <a:off x="0" y="0"/>
+          <a:ext cx="0" cy="0"/>
+          <a:chOff x="0" y="0"/>
+          <a:chExt cx="0" cy="0"/>
+        </a:xfrm>
+      </p:grpSpPr>
+      <p:pic>
+        <p:nvPicPr>
+          <p:cNvPr id="4" name="Picture 3">
+            <a:extLst>
+              <a:ext uri="{FF2B5EF4-FFF2-40B4-BE49-F238E27FC236}">
+                <a16:creationId xmlns:a16="http://schemas.microsoft.com/office/drawing/2014/main" id="{44647FFB-4C87-33B1-DE5F-957DDE7F33BB}"/>
+              </a:ext>
+            </a:extLst>
+          </p:cNvPr>
+          <p:cNvPicPr>
+            <a:picLocks noChangeAspect="1"/>
+          </p:cNvPicPr>
+          <p:nvPr/>
+        </p:nvPicPr>
+        <p:blipFill>
+          <a:blip r:embed="rId2"/>
+          <a:stretch>
+            <a:fillRect/>
+          </a:stretch>
+        </p:blipFill>
+        <p:spPr>
+          <a:xfrm>
+            <a:off x="2208212" y="277479"/>
+            <a:ext cx="7772400" cy="6303041"/>
+          </a:xfrm>
+          <a:prstGeom prst="rect">
+            <a:avLst/>
+          </a:prstGeom>
+        </p:spPr>
+      </p:pic>
+    </p:spTree>
+    <p:extLst>
+      <p:ext uri="{BB962C8B-B14F-4D97-AF65-F5344CB8AC3E}">
+        <p14:creationId xmlns:p14="http://schemas.microsoft.com/office/powerpoint/2010/main" val="1373694390"/>
+      </p:ext>
+    </p:extLst>
+  </p:cSld>
+  <p:clrMapOvr>
+    <a:masterClrMapping/>
+  </p:clrMapOvr>
+  <p:transition spd="med" advTm="0"/>
+</p:sld>
+</file>
+
+<file path=ppt/slides/slide15.xml><?xml version="1.0" encoding="utf-8"?>
+<p:sld xmlns:a="http://schemas.openxmlformats.org/drawingml/2006/main" xmlns:r="http://schemas.openxmlformats.org/officeDocument/2006/relationships" xmlns:p="http://schemas.openxmlformats.org/presentationml/2006/main">
+  <p:cSld>
+    <p:spTree>
+      <p:nvGrpSpPr>
+        <p:cNvPr id="1" name=""/>
+        <p:cNvGrpSpPr/>
+        <p:nvPr/>
+      </p:nvGrpSpPr>
+      <p:grpSpPr>
+        <a:xfrm>
+          <a:off x="0" y="0"/>
+          <a:ext cx="0" cy="0"/>
+          <a:chOff x="0" y="0"/>
+          <a:chExt cx="0" cy="0"/>
+        </a:xfrm>
+      </p:grpSpPr>
+      <p:pic>
+        <p:nvPicPr>
+          <p:cNvPr id="3" name="Picture 2">
+            <a:extLst>
+              <a:ext uri="{FF2B5EF4-FFF2-40B4-BE49-F238E27FC236}">
+                <a16:creationId xmlns:a16="http://schemas.microsoft.com/office/drawing/2014/main" id="{A7EB257A-57B5-41F3-7F74-E1A213482B3D}"/>
+              </a:ext>
+            </a:extLst>
+          </p:cNvPr>
+          <p:cNvPicPr>
+            <a:picLocks noChangeAspect="1"/>
+          </p:cNvPicPr>
+          <p:nvPr/>
+        </p:nvPicPr>
+        <p:blipFill>
+          <a:blip r:embed="rId2"/>
+          <a:stretch>
+            <a:fillRect/>
+          </a:stretch>
+        </p:blipFill>
+        <p:spPr>
+          <a:xfrm>
+            <a:off x="2208212" y="764306"/>
+            <a:ext cx="7772400" cy="5329387"/>
+          </a:xfrm>
+          <a:prstGeom prst="rect">
+            <a:avLst/>
+          </a:prstGeom>
+        </p:spPr>
+      </p:pic>
+    </p:spTree>
+    <p:extLst>
+      <p:ext uri="{BB962C8B-B14F-4D97-AF65-F5344CB8AC3E}">
+        <p14:creationId xmlns:p14="http://schemas.microsoft.com/office/powerpoint/2010/main" val="996236419"/>
+      </p:ext>
+    </p:extLst>
+  </p:cSld>
+  <p:clrMapOvr>
+    <a:masterClrMapping/>
+  </p:clrMapOvr>
+  <p:transition spd="med" advTm="0"/>
+</p:sld>
+</file>
+
+<file path=ppt/slides/slide16.xml><?xml version="1.0" encoding="utf-8"?>
+<p:sld xmlns:a="http://schemas.openxmlformats.org/drawingml/2006/main" xmlns:r="http://schemas.openxmlformats.org/officeDocument/2006/relationships" xmlns:p="http://schemas.openxmlformats.org/presentationml/2006/main">
   <p:cSld>
     <p:bg>
       <p:bgPr>
@@ -6415,7 +6629,14 @@
         <p:cNvGrpSpPr/>
         <p:nvPr/>
       </p:nvGrpSpPr>
-      <p:grpSpPr/>
+      <p:grpSpPr>
+        <a:xfrm>
+          <a:off x="0" y="0"/>
+          <a:ext cx="0" cy="0"/>
+          <a:chOff x="0" y="0"/>
+          <a:chExt cx="0" cy="0"/>
+        </a:xfrm>
+      </p:grpSpPr>
       <p:sp>
         <p:nvSpPr>
           <p:cNvPr id="2" name="Rectangle 1"/>
@@ -6457,6 +6678,7 @@
           <a:lstStyle/>
           <a:p>
             <a:pPr algn="ctr"/>
+            <a:endParaRPr/>
           </a:p>
         </p:txBody>
       </p:sp>
@@ -6503,6 +6725,7 @@
           <a:lstStyle/>
           <a:p>
             <a:pPr algn="ctr"/>
+            <a:endParaRPr/>
           </a:p>
         </p:txBody>
       </p:sp>
@@ -6530,7 +6753,7 @@
           <a:p>
             <a:pPr algn="ctr"/>
             <a:r>
-              <a:rPr b="1" i="0" sz="900">
+              <a:rPr sz="900" b="1" i="0">
                 <a:solidFill>
                   <a:srgbClr val="F8FAFC"/>
                 </a:solidFill>
@@ -6564,7 +6787,7 @@
           <a:p>
             <a:pPr algn="l"/>
             <a:r>
-              <a:rPr b="1" i="0" sz="2800">
+              <a:rPr sz="2800" b="1" i="0">
                 <a:solidFill>
                   <a:srgbClr val="F8FAFC"/>
                 </a:solidFill>
@@ -6615,6 +6838,7 @@
           <a:lstStyle/>
           <a:p>
             <a:pPr algn="ctr"/>
+            <a:endParaRPr/>
           </a:p>
         </p:txBody>
       </p:sp>
@@ -6659,6 +6883,7 @@
           <a:lstStyle/>
           <a:p>
             <a:pPr algn="ctr"/>
+            <a:endParaRPr/>
           </a:p>
         </p:txBody>
       </p:sp>
@@ -6686,7 +6911,7 @@
           <a:p>
             <a:pPr algn="ctr"/>
             <a:r>
-              <a:rPr b="1" i="0" sz="1400">
+              <a:rPr sz="1400" b="1" i="0">
                 <a:solidFill>
                   <a:srgbClr val="F8FAFC"/>
                 </a:solidFill>
@@ -6741,6 +6966,7 @@
           <a:lstStyle/>
           <a:p>
             <a:pPr algn="ctr"/>
+            <a:endParaRPr/>
           </a:p>
         </p:txBody>
       </p:sp>
@@ -6785,6 +7011,7 @@
           <a:lstStyle/>
           <a:p>
             <a:pPr algn="ctr"/>
+            <a:endParaRPr/>
           </a:p>
         </p:txBody>
       </p:sp>
@@ -6812,7 +7039,7 @@
           <a:p>
             <a:pPr algn="l"/>
             <a:r>
-              <a:rPr b="1" i="0" sz="1300">
+              <a:rPr sz="1300" b="1" i="0">
                 <a:solidFill>
                   <a:srgbClr val="387EF5"/>
                 </a:solidFill>
@@ -6846,7 +7073,7 @@
           <a:p>
             <a:pPr algn="l"/>
             <a:r>
-              <a:rPr b="0" i="0" sz="1050">
+              <a:rPr sz="1050" b="0" i="0">
                 <a:solidFill>
                   <a:srgbClr val="94A3B8"/>
                 </a:solidFill>
@@ -6897,6 +7124,7 @@
           <a:lstStyle/>
           <a:p>
             <a:pPr algn="ctr"/>
+            <a:endParaRPr/>
           </a:p>
         </p:txBody>
       </p:sp>
@@ -6924,7 +7152,7 @@
           <a:p>
             <a:pPr algn="ctr"/>
             <a:r>
-              <a:rPr b="1" i="0" sz="1400">
+              <a:rPr sz="1400" b="1" i="0">
                 <a:solidFill>
                   <a:srgbClr val="F8FAFC"/>
                 </a:solidFill>
@@ -6979,6 +7207,7 @@
           <a:lstStyle/>
           <a:p>
             <a:pPr algn="ctr"/>
+            <a:endParaRPr/>
           </a:p>
         </p:txBody>
       </p:sp>
@@ -7023,6 +7252,7 @@
           <a:lstStyle/>
           <a:p>
             <a:pPr algn="ctr"/>
+            <a:endParaRPr/>
           </a:p>
         </p:txBody>
       </p:sp>
@@ -7050,7 +7280,7 @@
           <a:p>
             <a:pPr algn="l"/>
             <a:r>
-              <a:rPr b="1" i="0" sz="1300">
+              <a:rPr sz="1300" b="1" i="0">
                 <a:solidFill>
                   <a:srgbClr val="0DB57C"/>
                 </a:solidFill>
@@ -7084,7 +7314,7 @@
           <a:p>
             <a:pPr algn="l"/>
             <a:r>
-              <a:rPr b="0" i="0" sz="1050">
+              <a:rPr sz="1050" b="0" i="0">
                 <a:solidFill>
                   <a:srgbClr val="94A3B8"/>
                 </a:solidFill>
@@ -7135,6 +7365,7 @@
           <a:lstStyle/>
           <a:p>
             <a:pPr algn="ctr"/>
+            <a:endParaRPr/>
           </a:p>
         </p:txBody>
       </p:sp>
@@ -7162,7 +7393,7 @@
           <a:p>
             <a:pPr algn="ctr"/>
             <a:r>
-              <a:rPr b="1" i="0" sz="1400">
+              <a:rPr sz="1400" b="1" i="0">
                 <a:solidFill>
                   <a:srgbClr val="F8FAFC"/>
                 </a:solidFill>
@@ -7217,6 +7448,7 @@
           <a:lstStyle/>
           <a:p>
             <a:pPr algn="ctr"/>
+            <a:endParaRPr/>
           </a:p>
         </p:txBody>
       </p:sp>
@@ -7261,6 +7493,7 @@
           <a:lstStyle/>
           <a:p>
             <a:pPr algn="ctr"/>
+            <a:endParaRPr/>
           </a:p>
         </p:txBody>
       </p:sp>
@@ -7288,7 +7521,7 @@
           <a:p>
             <a:pPr algn="l"/>
             <a:r>
-              <a:rPr b="1" i="0" sz="1300">
+              <a:rPr sz="1300" b="1" i="0">
                 <a:solidFill>
                   <a:srgbClr val="8B5CF6"/>
                 </a:solidFill>
@@ -7322,7 +7555,7 @@
           <a:p>
             <a:pPr algn="l"/>
             <a:r>
-              <a:rPr b="0" i="0" sz="1050">
+              <a:rPr sz="1050" b="0" i="0">
                 <a:solidFill>
                   <a:srgbClr val="94A3B8"/>
                 </a:solidFill>
@@ -7373,6 +7606,7 @@
           <a:lstStyle/>
           <a:p>
             <a:pPr algn="ctr"/>
+            <a:endParaRPr/>
           </a:p>
         </p:txBody>
       </p:sp>
@@ -7400,7 +7634,7 @@
           <a:p>
             <a:pPr algn="ctr"/>
             <a:r>
-              <a:rPr b="1" i="0" sz="1400">
+              <a:rPr sz="1400" b="1" i="0">
                 <a:solidFill>
                   <a:srgbClr val="F8FAFC"/>
                 </a:solidFill>
@@ -7455,6 +7689,7 @@
           <a:lstStyle/>
           <a:p>
             <a:pPr algn="ctr"/>
+            <a:endParaRPr/>
           </a:p>
         </p:txBody>
       </p:sp>
@@ -7499,6 +7734,7 @@
           <a:lstStyle/>
           <a:p>
             <a:pPr algn="ctr"/>
+            <a:endParaRPr/>
           </a:p>
         </p:txBody>
       </p:sp>
@@ -7526,7 +7762,7 @@
           <a:p>
             <a:pPr algn="l"/>
             <a:r>
-              <a:rPr b="1" i="0" sz="1300">
+              <a:rPr sz="1300" b="1" i="0">
                 <a:solidFill>
                   <a:srgbClr val="F59E0B"/>
                 </a:solidFill>
@@ -7560,7 +7796,7 @@
           <a:p>
             <a:pPr algn="l"/>
             <a:r>
-              <a:rPr b="0" i="0" sz="1050">
+              <a:rPr sz="1050" b="0" i="0">
                 <a:solidFill>
                   <a:srgbClr val="94A3B8"/>
                 </a:solidFill>
@@ -7611,6 +7847,7 @@
           <a:lstStyle/>
           <a:p>
             <a:pPr algn="ctr"/>
+            <a:endParaRPr/>
           </a:p>
         </p:txBody>
       </p:sp>
@@ -7638,7 +7875,7 @@
           <a:p>
             <a:pPr algn="ctr"/>
             <a:r>
-              <a:rPr b="1" i="0" sz="1400">
+              <a:rPr sz="1400" b="1" i="0">
                 <a:solidFill>
                   <a:srgbClr val="F8FAFC"/>
                 </a:solidFill>
@@ -7693,6 +7930,7 @@
           <a:lstStyle/>
           <a:p>
             <a:pPr algn="ctr"/>
+            <a:endParaRPr/>
           </a:p>
         </p:txBody>
       </p:sp>
@@ -7737,6 +7975,7 @@
           <a:lstStyle/>
           <a:p>
             <a:pPr algn="ctr"/>
+            <a:endParaRPr/>
           </a:p>
         </p:txBody>
       </p:sp>
@@ -7764,7 +8003,7 @@
           <a:p>
             <a:pPr algn="l"/>
             <a:r>
-              <a:rPr b="1" i="0" sz="1300">
+              <a:rPr sz="1300" b="1" i="0">
                 <a:solidFill>
                   <a:srgbClr val="F43F5E"/>
                 </a:solidFill>
@@ -7798,7 +8037,7 @@
           <a:p>
             <a:pPr algn="l"/>
             <a:r>
-              <a:rPr b="0" i="0" sz="1050">
+              <a:rPr sz="1050" b="0" i="0">
                 <a:solidFill>
                   <a:srgbClr val="94A3B8"/>
                 </a:solidFill>
@@ -7813,16 +8052,12 @@
   <p:clrMapOvr>
     <a:masterClrMapping/>
   </p:clrMapOvr>
-  <p:transition xmlns:p14="http://schemas.microsoft.com/office/powerpoint/2010/main" spd="med" advTm="0">
-    <p14:transition inverted="0">
-      <p14:morph option="byObject"/>
-    </p14:transition>
-  </p:transition>
+  <p:transition spd="med" advTm="0"/>
 </p:sld>
 </file>
 
-<file path=ppt/slides/slide13.xml><?xml version="1.0" encoding="utf-8"?>
-<p:sld xmlns:a="http://schemas.openxmlformats.org/drawingml/2006/main" xmlns:p="http://schemas.openxmlformats.org/presentationml/2006/main" xmlns:r="http://schemas.openxmlformats.org/officeDocument/2006/relationships">
+<file path=ppt/slides/slide17.xml><?xml version="1.0" encoding="utf-8"?>
+<p:sld xmlns:a="http://schemas.openxmlformats.org/drawingml/2006/main" xmlns:r="http://schemas.openxmlformats.org/officeDocument/2006/relationships" xmlns:p="http://schemas.openxmlformats.org/presentationml/2006/main">
   <p:cSld>
     <p:bg>
       <p:bgPr>
@@ -7838,7 +8073,14 @@
         <p:cNvGrpSpPr/>
         <p:nvPr/>
       </p:nvGrpSpPr>
-      <p:grpSpPr/>
+      <p:grpSpPr>
+        <a:xfrm>
+          <a:off x="0" y="0"/>
+          <a:ext cx="0" cy="0"/>
+          <a:chOff x="0" y="0"/>
+          <a:chExt cx="0" cy="0"/>
+        </a:xfrm>
+      </p:grpSpPr>
       <p:sp>
         <p:nvSpPr>
           <p:cNvPr id="2" name="Rectangle 1"/>
@@ -7880,6 +8122,7 @@
           <a:lstStyle/>
           <a:p>
             <a:pPr algn="ctr"/>
+            <a:endParaRPr/>
           </a:p>
         </p:txBody>
       </p:sp>
@@ -7924,6 +8167,7 @@
           <a:lstStyle/>
           <a:p>
             <a:pPr algn="ctr"/>
+            <a:endParaRPr/>
           </a:p>
         </p:txBody>
       </p:sp>
@@ -7968,6 +8212,7 @@
           <a:lstStyle/>
           <a:p>
             <a:pPr algn="ctr"/>
+            <a:endParaRPr/>
           </a:p>
         </p:txBody>
       </p:sp>
@@ -8012,6 +8257,7 @@
           <a:lstStyle/>
           <a:p>
             <a:pPr algn="ctr"/>
+            <a:endParaRPr/>
           </a:p>
         </p:txBody>
       </p:sp>
@@ -8056,6 +8302,7 @@
           <a:lstStyle/>
           <a:p>
             <a:pPr algn="ctr"/>
+            <a:endParaRPr/>
           </a:p>
         </p:txBody>
       </p:sp>
@@ -8100,6 +8347,7 @@
           <a:lstStyle/>
           <a:p>
             <a:pPr algn="ctr"/>
+            <a:endParaRPr/>
           </a:p>
         </p:txBody>
       </p:sp>
@@ -8127,7 +8375,7 @@
           <a:p>
             <a:pPr algn="l"/>
             <a:r>
-              <a:rPr b="1" i="0" sz="1300">
+              <a:rPr sz="1300" b="1" i="0">
                 <a:solidFill>
                   <a:srgbClr val="94A3B8"/>
                 </a:solidFill>
@@ -8161,7 +8409,7 @@
           <a:p>
             <a:pPr algn="l"/>
             <a:r>
-              <a:rPr b="1" i="0" sz="6200">
+              <a:rPr sz="6200" b="1" i="0">
                 <a:solidFill>
                   <a:srgbClr val="F8FAFC"/>
                 </a:solidFill>
@@ -8212,6 +8460,7 @@
           <a:lstStyle/>
           <a:p>
             <a:pPr algn="ctr"/>
+            <a:endParaRPr/>
           </a:p>
         </p:txBody>
       </p:sp>
@@ -8239,7 +8488,7 @@
           <a:p>
             <a:pPr algn="l"/>
             <a:r>
-              <a:rPr b="0" i="0" sz="1200">
+              <a:rPr sz="1200" b="0" i="0">
                 <a:solidFill>
                   <a:srgbClr val="F8FAFC"/>
                 </a:solidFill>
@@ -8290,6 +8539,7 @@
           <a:lstStyle/>
           <a:p>
             <a:pPr algn="ctr"/>
+            <a:endParaRPr/>
           </a:p>
         </p:txBody>
       </p:sp>
@@ -8317,7 +8567,7 @@
           <a:p>
             <a:pPr algn="l"/>
             <a:r>
-              <a:rPr b="0" i="0" sz="1200">
+              <a:rPr sz="1200" b="0" i="0">
                 <a:solidFill>
                   <a:srgbClr val="F8FAFC"/>
                 </a:solidFill>
@@ -8368,6 +8618,7 @@
           <a:lstStyle/>
           <a:p>
             <a:pPr algn="ctr"/>
+            <a:endParaRPr/>
           </a:p>
         </p:txBody>
       </p:sp>
@@ -8395,7 +8646,7 @@
           <a:p>
             <a:pPr algn="l"/>
             <a:r>
-              <a:rPr b="0" i="0" sz="1200">
+              <a:rPr sz="1200" b="0" i="0">
                 <a:solidFill>
                   <a:srgbClr val="F8FAFC"/>
                 </a:solidFill>
@@ -8446,6 +8697,7 @@
           <a:lstStyle/>
           <a:p>
             <a:pPr algn="ctr"/>
+            <a:endParaRPr/>
           </a:p>
         </p:txBody>
       </p:sp>
@@ -8473,7 +8725,7 @@
           <a:p>
             <a:pPr algn="l"/>
             <a:r>
-              <a:rPr b="0" i="0" sz="1200">
+              <a:rPr sz="1200" b="0" i="0">
                 <a:solidFill>
                   <a:srgbClr val="F8FAFC"/>
                 </a:solidFill>
@@ -8524,6 +8776,7 @@
           <a:lstStyle/>
           <a:p>
             <a:pPr algn="ctr"/>
+            <a:endParaRPr/>
           </a:p>
         </p:txBody>
       </p:sp>
@@ -8551,7 +8804,7 @@
           <a:p>
             <a:pPr algn="l"/>
             <a:r>
-              <a:rPr b="0" i="0" sz="1200">
+              <a:rPr sz="1200" b="0" i="0">
                 <a:solidFill>
                   <a:srgbClr val="F8FAFC"/>
                 </a:solidFill>
@@ -8585,7 +8838,7 @@
           <a:p>
             <a:pPr algn="l"/>
             <a:r>
-              <a:rPr b="0" i="0" sz="1200">
+              <a:rPr sz="1200" b="0" i="0">
                 <a:solidFill>
                   <a:srgbClr val="94A3B8"/>
                 </a:solidFill>
@@ -8619,7 +8872,7 @@
           <a:p>
             <a:pPr algn="r"/>
             <a:r>
-              <a:rPr b="1" i="0" sz="2800">
+              <a:rPr sz="2800" b="1" i="0">
                 <a:solidFill>
                   <a:srgbClr val="387EF5"/>
                 </a:solidFill>
@@ -8634,16 +8887,12 @@
   <p:clrMapOvr>
     <a:masterClrMapping/>
   </p:clrMapOvr>
-  <p:transition xmlns:p14="http://schemas.microsoft.com/office/powerpoint/2010/main" spd="med" advTm="0">
-    <p14:transition inverted="0">
-      <p14:morph option="byObject"/>
-    </p14:transition>
-  </p:transition>
+  <p:transition spd="med" advTm="0"/>
 </p:sld>
 </file>
 
 <file path=ppt/slides/slide2.xml><?xml version="1.0" encoding="utf-8"?>
-<p:sld xmlns:a="http://schemas.openxmlformats.org/drawingml/2006/main" xmlns:p="http://schemas.openxmlformats.org/presentationml/2006/main" xmlns:r="http://schemas.openxmlformats.org/officeDocument/2006/relationships">
+<p:sld xmlns:a="http://schemas.openxmlformats.org/drawingml/2006/main" xmlns:r="http://schemas.openxmlformats.org/officeDocument/2006/relationships" xmlns:p="http://schemas.openxmlformats.org/presentationml/2006/main">
   <p:cSld>
     <p:bg>
       <p:bgPr>
@@ -8659,7 +8908,14 @@
         <p:cNvGrpSpPr/>
         <p:nvPr/>
       </p:nvGrpSpPr>
-      <p:grpSpPr/>
+      <p:grpSpPr>
+        <a:xfrm>
+          <a:off x="0" y="0"/>
+          <a:ext cx="0" cy="0"/>
+          <a:chOff x="0" y="0"/>
+          <a:chExt cx="0" cy="0"/>
+        </a:xfrm>
+      </p:grpSpPr>
       <p:sp>
         <p:nvSpPr>
           <p:cNvPr id="2" name="Rectangle 1"/>
@@ -8701,6 +8957,7 @@
           <a:lstStyle/>
           <a:p>
             <a:pPr algn="ctr"/>
+            <a:endParaRPr/>
           </a:p>
         </p:txBody>
       </p:sp>
@@ -8747,6 +9004,7 @@
           <a:lstStyle/>
           <a:p>
             <a:pPr algn="ctr"/>
+            <a:endParaRPr/>
           </a:p>
         </p:txBody>
       </p:sp>
@@ -8774,7 +9032,7 @@
           <a:p>
             <a:pPr algn="ctr"/>
             <a:r>
-              <a:rPr b="1" i="0" sz="900">
+              <a:rPr sz="900" b="1" i="0">
                 <a:solidFill>
                   <a:srgbClr val="F8FAFC"/>
                 </a:solidFill>
@@ -8808,7 +9066,7 @@
           <a:p>
             <a:pPr algn="l"/>
             <a:r>
-              <a:rPr b="1" i="0" sz="3000">
+              <a:rPr sz="3000" b="1" i="0">
                 <a:solidFill>
                   <a:srgbClr val="F8FAFC"/>
                 </a:solidFill>
@@ -8859,6 +9117,7 @@
           <a:lstStyle/>
           <a:p>
             <a:pPr algn="ctr"/>
+            <a:endParaRPr/>
           </a:p>
         </p:txBody>
       </p:sp>
@@ -8907,6 +9166,7 @@
           <a:lstStyle/>
           <a:p>
             <a:pPr algn="ctr"/>
+            <a:endParaRPr/>
           </a:p>
         </p:txBody>
       </p:sp>
@@ -8934,7 +9194,7 @@
           <a:p>
             <a:pPr algn="l"/>
             <a:r>
-              <a:rPr b="0" i="0" sz="1100">
+              <a:rPr sz="1100" b="0" i="0">
                 <a:solidFill>
                   <a:srgbClr val="94A3B8"/>
                 </a:solidFill>
@@ -8968,7 +9228,7 @@
           <a:p>
             <a:pPr algn="l"/>
             <a:r>
-              <a:rPr b="1" i="0" sz="2000">
+              <a:rPr sz="2000" b="1" i="0">
                 <a:solidFill>
                   <a:srgbClr val="F59E0B"/>
                 </a:solidFill>
@@ -9003,7 +9263,7 @@
           <a:p>
             <a:pPr algn="ctr"/>
             <a:r>
-              <a:rPr b="1" i="0" sz="11000">
+              <a:rPr sz="11000" b="1" i="0">
                 <a:solidFill>
                   <a:srgbClr val="F43F5E"/>
                 </a:solidFill>
@@ -9037,7 +9297,7 @@
           <a:p>
             <a:pPr algn="ctr"/>
             <a:r>
-              <a:rPr b="1" i="0" sz="1400">
+              <a:rPr sz="1400" b="1" i="0">
                 <a:solidFill>
                   <a:srgbClr val="F43F5E"/>
                 </a:solidFill>
@@ -9092,6 +9352,7 @@
           <a:lstStyle/>
           <a:p>
             <a:pPr algn="ctr"/>
+            <a:endParaRPr/>
           </a:p>
         </p:txBody>
       </p:sp>
@@ -9119,7 +9380,7 @@
           <a:p>
             <a:pPr algn="l"/>
             <a:r>
-              <a:rPr b="0" i="0" sz="1100">
+              <a:rPr sz="1100" b="0" i="0">
                 <a:solidFill>
                   <a:srgbClr val="94A3B8"/>
                 </a:solidFill>
@@ -9172,6 +9433,7 @@
           <a:lstStyle/>
           <a:p>
             <a:pPr algn="ctr"/>
+            <a:endParaRPr/>
           </a:p>
         </p:txBody>
       </p:sp>
@@ -9199,7 +9461,7 @@
           <a:p>
             <a:pPr algn="l"/>
             <a:r>
-              <a:rPr b="1" i="0" sz="1500">
+              <a:rPr sz="1500" b="1" i="0">
                 <a:solidFill>
                   <a:srgbClr val="387EF5"/>
                 </a:solidFill>
@@ -9252,6 +9514,7 @@
           <a:lstStyle/>
           <a:p>
             <a:pPr algn="ctr"/>
+            <a:endParaRPr/>
           </a:p>
         </p:txBody>
       </p:sp>
@@ -9279,7 +9542,7 @@
           <a:p>
             <a:pPr algn="l"/>
             <a:r>
-              <a:rPr b="1" i="0" sz="1500">
+              <a:rPr sz="1500" b="1" i="0">
                 <a:solidFill>
                   <a:srgbClr val="0DB57C"/>
                 </a:solidFill>
@@ -9332,6 +9595,7 @@
           <a:lstStyle/>
           <a:p>
             <a:pPr algn="ctr"/>
+            <a:endParaRPr/>
           </a:p>
         </p:txBody>
       </p:sp>
@@ -9359,7 +9623,7 @@
           <a:p>
             <a:pPr algn="l"/>
             <a:r>
-              <a:rPr b="1" i="0" sz="1500">
+              <a:rPr sz="1500" b="1" i="0">
                 <a:solidFill>
                   <a:srgbClr val="F59E0B"/>
                 </a:solidFill>
@@ -9412,6 +9676,7 @@
           <a:lstStyle/>
           <a:p>
             <a:pPr algn="ctr"/>
+            <a:endParaRPr/>
           </a:p>
         </p:txBody>
       </p:sp>
@@ -9439,7 +9704,7 @@
           <a:p>
             <a:pPr algn="l"/>
             <a:r>
-              <a:rPr b="1" i="0" sz="1500">
+              <a:rPr sz="1500" b="1" i="0">
                 <a:solidFill>
                   <a:srgbClr val="8B5CF6"/>
                 </a:solidFill>
@@ -9473,7 +9738,7 @@
           <a:p>
             <a:pPr algn="ctr"/>
             <a:r>
-              <a:rPr b="0" i="1" sz="1100">
+              <a:rPr sz="1100" b="0" i="1">
                 <a:solidFill>
                   <a:srgbClr val="3D506A"/>
                 </a:solidFill>
@@ -9488,16 +9753,12 @@
   <p:clrMapOvr>
     <a:masterClrMapping/>
   </p:clrMapOvr>
-  <p:transition xmlns:p14="http://schemas.microsoft.com/office/powerpoint/2010/main" spd="med" advTm="0">
-    <p14:transition inverted="0">
-      <p14:morph option="byObject"/>
-    </p14:transition>
-  </p:transition>
+  <p:transition spd="med" advTm="0"/>
 </p:sld>
 </file>
 
 <file path=ppt/slides/slide3.xml><?xml version="1.0" encoding="utf-8"?>
-<p:sld xmlns:a="http://schemas.openxmlformats.org/drawingml/2006/main" xmlns:p="http://schemas.openxmlformats.org/presentationml/2006/main" xmlns:r="http://schemas.openxmlformats.org/officeDocument/2006/relationships">
+<p:sld xmlns:a="http://schemas.openxmlformats.org/drawingml/2006/main" xmlns:r="http://schemas.openxmlformats.org/officeDocument/2006/relationships" xmlns:p="http://schemas.openxmlformats.org/presentationml/2006/main">
   <p:cSld>
     <p:bg>
       <p:bgPr>
@@ -9513,7 +9774,14 @@
         <p:cNvGrpSpPr/>
         <p:nvPr/>
       </p:nvGrpSpPr>
-      <p:grpSpPr/>
+      <p:grpSpPr>
+        <a:xfrm>
+          <a:off x="0" y="0"/>
+          <a:ext cx="0" cy="0"/>
+          <a:chOff x="0" y="0"/>
+          <a:chExt cx="0" cy="0"/>
+        </a:xfrm>
+      </p:grpSpPr>
       <p:sp>
         <p:nvSpPr>
           <p:cNvPr id="2" name="Rectangle 1"/>
@@ -9555,6 +9823,7 @@
           <a:lstStyle/>
           <a:p>
             <a:pPr algn="ctr"/>
+            <a:endParaRPr/>
           </a:p>
         </p:txBody>
       </p:sp>
@@ -9601,6 +9870,7 @@
           <a:lstStyle/>
           <a:p>
             <a:pPr algn="ctr"/>
+            <a:endParaRPr/>
           </a:p>
         </p:txBody>
       </p:sp>
@@ -9628,7 +9898,7 @@
           <a:p>
             <a:pPr algn="ctr"/>
             <a:r>
-              <a:rPr b="1" i="0" sz="900">
+              <a:rPr sz="900" b="1" i="0">
                 <a:solidFill>
                   <a:srgbClr val="F8FAFC"/>
                 </a:solidFill>
@@ -9662,7 +9932,7 @@
           <a:p>
             <a:pPr algn="l"/>
             <a:r>
-              <a:rPr b="1" i="0" sz="3000">
+              <a:rPr sz="3000" b="1" i="0">
                 <a:solidFill>
                   <a:srgbClr val="F8FAFC"/>
                 </a:solidFill>
@@ -9713,6 +9983,7 @@
           <a:lstStyle/>
           <a:p>
             <a:pPr algn="ctr"/>
+            <a:endParaRPr/>
           </a:p>
         </p:txBody>
       </p:sp>
@@ -9757,6 +10028,7 @@
           <a:lstStyle/>
           <a:p>
             <a:pPr algn="ctr"/>
+            <a:endParaRPr/>
           </a:p>
         </p:txBody>
       </p:sp>
@@ -9768,7 +10040,7 @@
         </p:nvSpPr>
         <p:spPr>
           <a:xfrm>
-            <a:off x="777240" y="2057400"/>
+            <a:off x="667385" y="2959196"/>
             <a:ext cx="2468880" cy="2468880"/>
           </a:xfrm>
           <a:prstGeom prst="rect">
@@ -9784,7 +10056,7 @@
           <a:p>
             <a:pPr algn="ctr"/>
             <a:r>
-              <a:rPr b="1" i="0" sz="1050">
+              <a:rPr sz="1050" b="1" i="0" dirty="0">
                 <a:solidFill>
                   <a:srgbClr val="F8FAFC"/>
                 </a:solidFill>
@@ -9819,7 +10091,7 @@
           <a:p>
             <a:pPr algn="ctr"/>
             <a:r>
-              <a:rPr b="0" i="0" sz="1200">
+              <a:rPr sz="1200" b="0" i="0">
                 <a:solidFill>
                   <a:srgbClr val="94A3B8"/>
                 </a:solidFill>
@@ -9873,8 +10145,8 @@
         </p:nvCxnSpPr>
         <p:spPr>
           <a:xfrm flipH="1" flipV="1">
-            <a:off x="4663440" y="3226003.2"/>
-            <a:ext cx="109728" cy="65836.79999999981"/>
+            <a:off x="4663440" y="0"/>
+            <a:ext cx="109728" cy="0"/>
           </a:xfrm>
           <a:prstGeom prst="line">
             <a:avLst/>
@@ -9909,7 +10181,7 @@
         <p:spPr>
           <a:xfrm flipH="1">
             <a:off x="4663440" y="3291840"/>
-            <a:ext cx="109728" cy="65836.79999999981"/>
+            <a:ext cx="109728" cy="0"/>
           </a:xfrm>
           <a:prstGeom prst="line">
             <a:avLst/>
@@ -9959,7 +10231,7 @@
           <a:p>
             <a:pPr algn="ctr"/>
             <a:r>
-              <a:rPr b="0" i="1" sz="950">
+              <a:rPr sz="950" b="0" i="1">
                 <a:solidFill>
                   <a:srgbClr val="F59E0B"/>
                 </a:solidFill>
@@ -10011,6 +10283,7 @@
           <a:lstStyle/>
           <a:p>
             <a:pPr algn="ctr"/>
+            <a:endParaRPr/>
           </a:p>
         </p:txBody>
       </p:sp>
@@ -10022,7 +10295,7 @@
         </p:nvSpPr>
         <p:spPr>
           <a:xfrm>
-            <a:off x="4846320" y="2057400"/>
+            <a:off x="4718304" y="3099816"/>
             <a:ext cx="2468880" cy="2468880"/>
           </a:xfrm>
           <a:prstGeom prst="rect">
@@ -10038,7 +10311,7 @@
           <a:p>
             <a:pPr algn="ctr"/>
             <a:r>
-              <a:rPr b="1" i="0" sz="1050">
+              <a:rPr sz="1050" b="1" i="0" dirty="0">
                 <a:solidFill>
                   <a:srgbClr val="F8FAFC"/>
                 </a:solidFill>
@@ -10073,7 +10346,7 @@
           <a:p>
             <a:pPr algn="ctr"/>
             <a:r>
-              <a:rPr b="0" i="0" sz="1200">
+              <a:rPr sz="1200" b="0" i="0">
                 <a:solidFill>
                   <a:srgbClr val="94A3B8"/>
                 </a:solidFill>
@@ -10127,8 +10400,8 @@
         </p:nvCxnSpPr>
         <p:spPr>
           <a:xfrm flipH="1" flipV="1">
-            <a:off x="8732520" y="3226003.2"/>
-            <a:ext cx="109728" cy="65836.79999999981"/>
+            <a:off x="8732520" y="0"/>
+            <a:ext cx="109728" cy="0"/>
           </a:xfrm>
           <a:prstGeom prst="line">
             <a:avLst/>
@@ -10163,7 +10436,7 @@
         <p:spPr>
           <a:xfrm flipH="1">
             <a:off x="8732520" y="3291840"/>
-            <a:ext cx="109728" cy="65836.79999999981"/>
+            <a:ext cx="109728" cy="0"/>
           </a:xfrm>
           <a:prstGeom prst="line">
             <a:avLst/>
@@ -10213,7 +10486,7 @@
           <a:p>
             <a:pPr algn="ctr"/>
             <a:r>
-              <a:rPr b="0" i="1" sz="950">
+              <a:rPr sz="950" b="0" i="1">
                 <a:solidFill>
                   <a:srgbClr val="F59E0B"/>
                 </a:solidFill>
@@ -10266,6 +10539,7 @@
           <a:lstStyle/>
           <a:p>
             <a:pPr algn="ctr"/>
+            <a:endParaRPr/>
           </a:p>
         </p:txBody>
       </p:sp>
@@ -10277,7 +10551,7 @@
         </p:nvSpPr>
         <p:spPr>
           <a:xfrm>
-            <a:off x="8915400" y="2057400"/>
+            <a:off x="8915400" y="3135651"/>
             <a:ext cx="2468880" cy="2468880"/>
           </a:xfrm>
           <a:prstGeom prst="rect">
@@ -10293,12 +10567,20 @@
           <a:p>
             <a:pPr algn="ctr"/>
             <a:r>
-              <a:rPr b="1" i="0" sz="1050">
+              <a:rPr sz="1050" b="1" i="0" dirty="0" err="1">
                 <a:solidFill>
                   <a:srgbClr val="F8FAFC"/>
                 </a:solidFill>
               </a:rPr>
-              <a:t>getProductInfo()</a:t>
+              <a:t>getProductInfo</a:t>
+            </a:r>
+            <a:r>
+              <a:rPr sz="1050" b="1" i="0" dirty="0">
+                <a:solidFill>
+                  <a:srgbClr val="F8FAFC"/>
+                </a:solidFill>
+              </a:rPr>
+              <a:t>()</a:t>
             </a:r>
           </a:p>
         </p:txBody>
@@ -10327,7 +10609,7 @@
           <a:p>
             <a:pPr algn="ctr"/>
             <a:r>
-              <a:rPr b="0" i="0" sz="1200">
+              <a:rPr sz="1200" b="0" i="0">
                 <a:solidFill>
                   <a:srgbClr val="94A3B8"/>
                 </a:solidFill>
@@ -10383,6 +10665,7 @@
           <a:lstStyle/>
           <a:p>
             <a:pPr algn="ctr"/>
+            <a:endParaRPr/>
           </a:p>
         </p:txBody>
       </p:sp>
@@ -10410,7 +10693,7 @@
           <a:p>
             <a:pPr algn="ctr"/>
             <a:r>
-              <a:rPr b="1" i="0" sz="1200">
+              <a:rPr sz="1200" b="1" i="0">
                 <a:solidFill>
                   <a:srgbClr val="F8FAFC"/>
                 </a:solidFill>
@@ -10425,16 +10708,12 @@
   <p:clrMapOvr>
     <a:masterClrMapping/>
   </p:clrMapOvr>
-  <p:transition xmlns:p14="http://schemas.microsoft.com/office/powerpoint/2010/main" spd="med" advTm="0">
-    <p14:transition inverted="0">
-      <p14:morph option="byObject"/>
-    </p14:transition>
-  </p:transition>
+  <p:transition spd="med" advTm="0"/>
 </p:sld>
 </file>
 
 <file path=ppt/slides/slide4.xml><?xml version="1.0" encoding="utf-8"?>
-<p:sld xmlns:a="http://schemas.openxmlformats.org/drawingml/2006/main" xmlns:p="http://schemas.openxmlformats.org/presentationml/2006/main" xmlns:r="http://schemas.openxmlformats.org/officeDocument/2006/relationships">
+<p:sld xmlns:a="http://schemas.openxmlformats.org/drawingml/2006/main" xmlns:r="http://schemas.openxmlformats.org/officeDocument/2006/relationships" xmlns:p="http://schemas.openxmlformats.org/presentationml/2006/main">
   <p:cSld>
     <p:bg>
       <p:bgPr>
@@ -10450,7 +10729,14 @@
         <p:cNvGrpSpPr/>
         <p:nvPr/>
       </p:nvGrpSpPr>
-      <p:grpSpPr/>
+      <p:grpSpPr>
+        <a:xfrm>
+          <a:off x="0" y="0"/>
+          <a:ext cx="0" cy="0"/>
+          <a:chOff x="0" y="0"/>
+          <a:chExt cx="0" cy="0"/>
+        </a:xfrm>
+      </p:grpSpPr>
       <p:sp>
         <p:nvSpPr>
           <p:cNvPr id="2" name="Rectangle 1"/>
@@ -10492,6 +10778,7 @@
           <a:lstStyle/>
           <a:p>
             <a:pPr algn="ctr"/>
+            <a:endParaRPr/>
           </a:p>
         </p:txBody>
       </p:sp>
@@ -10538,6 +10825,7 @@
           <a:lstStyle/>
           <a:p>
             <a:pPr algn="ctr"/>
+            <a:endParaRPr/>
           </a:p>
         </p:txBody>
       </p:sp>
@@ -10565,7 +10853,7 @@
           <a:p>
             <a:pPr algn="ctr"/>
             <a:r>
-              <a:rPr b="1" i="0" sz="900">
+              <a:rPr sz="900" b="1" i="0">
                 <a:solidFill>
                   <a:srgbClr val="F8FAFC"/>
                 </a:solidFill>
@@ -10599,7 +10887,7 @@
           <a:p>
             <a:pPr algn="l"/>
             <a:r>
-              <a:rPr b="1" i="0" sz="2800">
+              <a:rPr sz="2800" b="1" i="0">
                 <a:solidFill>
                   <a:srgbClr val="F8FAFC"/>
                 </a:solidFill>
@@ -10650,6 +10938,7 @@
           <a:lstStyle/>
           <a:p>
             <a:pPr algn="ctr"/>
+            <a:endParaRPr/>
           </a:p>
         </p:txBody>
       </p:sp>
@@ -10698,6 +10987,7 @@
           <a:lstStyle/>
           <a:p>
             <a:pPr algn="ctr"/>
+            <a:endParaRPr/>
           </a:p>
         </p:txBody>
       </p:sp>
@@ -10742,6 +11032,7 @@
           <a:lstStyle/>
           <a:p>
             <a:pPr algn="ctr"/>
+            <a:endParaRPr/>
           </a:p>
         </p:txBody>
       </p:sp>
@@ -10769,7 +11060,7 @@
           <a:p>
             <a:pPr algn="l"/>
             <a:r>
-              <a:rPr b="1" i="0" sz="1500">
+              <a:rPr sz="1500" b="1" i="0">
                 <a:solidFill>
                   <a:srgbClr val="387EF5"/>
                 </a:solidFill>
@@ -10803,7 +11094,7 @@
           <a:p>
             <a:pPr algn="l"/>
             <a:r>
-              <a:rPr b="0" i="0" sz="1000">
+              <a:rPr sz="1000" b="0" i="0">
                 <a:solidFill>
                   <a:srgbClr val="94A3B8"/>
                 </a:solidFill>
@@ -10854,6 +11145,7 @@
           <a:lstStyle/>
           <a:p>
             <a:pPr algn="ctr"/>
+            <a:endParaRPr/>
           </a:p>
         </p:txBody>
       </p:sp>
@@ -10881,7 +11173,7 @@
           <a:p>
             <a:pPr algn="l"/>
             <a:r>
-              <a:rPr b="0" i="0" sz="1050">
+              <a:rPr sz="1050" b="0" i="0">
                 <a:solidFill>
                   <a:srgbClr val="F8FAFC"/>
                 </a:solidFill>
@@ -10915,7 +11207,7 @@
           <a:p>
             <a:pPr algn="l"/>
             <a:r>
-              <a:rPr b="0" i="0" sz="1050">
+              <a:rPr sz="1050" b="0" i="0">
                 <a:solidFill>
                   <a:srgbClr val="94A3B8"/>
                 </a:solidFill>
@@ -10949,7 +11241,7 @@
           <a:p>
             <a:pPr algn="l"/>
             <a:r>
-              <a:rPr b="0" i="0" sz="1050">
+              <a:rPr sz="1050" b="0" i="0">
                 <a:solidFill>
                   <a:srgbClr val="94A3B8"/>
                 </a:solidFill>
@@ -10983,7 +11275,7 @@
           <a:p>
             <a:pPr algn="l"/>
             <a:r>
-              <a:rPr b="0" i="0" sz="1050">
+              <a:rPr sz="1050" b="0" i="0">
                 <a:solidFill>
                   <a:srgbClr val="94A3B8"/>
                 </a:solidFill>
@@ -11017,7 +11309,7 @@
           <a:p>
             <a:pPr algn="l"/>
             <a:r>
-              <a:rPr b="0" i="0" sz="1050">
+              <a:rPr sz="1050" b="0" i="0">
                 <a:solidFill>
                   <a:srgbClr val="94A3B8"/>
                 </a:solidFill>
@@ -11051,7 +11343,7 @@
           <a:p>
             <a:pPr algn="l"/>
             <a:r>
-              <a:rPr b="0" i="0" sz="1050">
+              <a:rPr sz="1050" b="0" i="0">
                 <a:solidFill>
                   <a:srgbClr val="94A3B8"/>
                 </a:solidFill>
@@ -11106,6 +11398,7 @@
           <a:lstStyle/>
           <a:p>
             <a:pPr algn="ctr"/>
+            <a:endParaRPr/>
           </a:p>
         </p:txBody>
       </p:sp>
@@ -11150,6 +11443,7 @@
           <a:lstStyle/>
           <a:p>
             <a:pPr algn="ctr"/>
+            <a:endParaRPr/>
           </a:p>
         </p:txBody>
       </p:sp>
@@ -11177,7 +11471,7 @@
           <a:p>
             <a:pPr algn="l"/>
             <a:r>
-              <a:rPr b="1" i="0" sz="1500">
+              <a:rPr sz="1500" b="1" i="0">
                 <a:solidFill>
                   <a:srgbClr val="0DB57C"/>
                 </a:solidFill>
@@ -11211,7 +11505,7 @@
           <a:p>
             <a:pPr algn="l"/>
             <a:r>
-              <a:rPr b="0" i="0" sz="1000">
+              <a:rPr sz="1000" b="0" i="0">
                 <a:solidFill>
                   <a:srgbClr val="94A3B8"/>
                 </a:solidFill>
@@ -11262,6 +11556,7 @@
           <a:lstStyle/>
           <a:p>
             <a:pPr algn="ctr"/>
+            <a:endParaRPr/>
           </a:p>
         </p:txBody>
       </p:sp>
@@ -11289,7 +11584,7 @@
           <a:p>
             <a:pPr algn="l"/>
             <a:r>
-              <a:rPr b="0" i="0" sz="1050">
+              <a:rPr sz="1050" b="0" i="0">
                 <a:solidFill>
                   <a:srgbClr val="F8FAFC"/>
                 </a:solidFill>
@@ -11323,7 +11618,7 @@
           <a:p>
             <a:pPr algn="l"/>
             <a:r>
-              <a:rPr b="0" i="0" sz="1050">
+              <a:rPr sz="1050" b="0" i="0">
                 <a:solidFill>
                   <a:srgbClr val="94A3B8"/>
                 </a:solidFill>
@@ -11357,7 +11652,7 @@
           <a:p>
             <a:pPr algn="l"/>
             <a:r>
-              <a:rPr b="0" i="0" sz="1050">
+              <a:rPr sz="1050" b="0" i="0">
                 <a:solidFill>
                   <a:srgbClr val="94A3B8"/>
                 </a:solidFill>
@@ -11391,7 +11686,7 @@
           <a:p>
             <a:pPr algn="l"/>
             <a:r>
-              <a:rPr b="0" i="0" sz="1050">
+              <a:rPr sz="1050" b="0" i="0">
                 <a:solidFill>
                   <a:srgbClr val="94A3B8"/>
                 </a:solidFill>
@@ -11425,7 +11720,7 @@
           <a:p>
             <a:pPr algn="l"/>
             <a:r>
-              <a:rPr b="0" i="0" sz="1050">
+              <a:rPr sz="1050" b="0" i="0">
                 <a:solidFill>
                   <a:srgbClr val="94A3B8"/>
                 </a:solidFill>
@@ -11444,7 +11739,7 @@
         <p:spPr>
           <a:xfrm>
             <a:off x="4517136" y="4864608"/>
-            <a:ext cx="3502152" cy="457200"/>
+            <a:ext cx="3502152" cy="253916"/>
           </a:xfrm>
           <a:prstGeom prst="rect">
             <a:avLst/>
@@ -11459,12 +11754,12 @@
           <a:p>
             <a:pPr algn="l"/>
             <a:r>
-              <a:rPr b="0" i="0" sz="1050">
+              <a:rPr sz="1050" b="0" i="0" dirty="0">
                 <a:solidFill>
                   <a:srgbClr val="94A3B8"/>
                 </a:solidFill>
               </a:rPr>
-              <a:t>• /config · /health · /done</a:t>
+              <a:t>• /config</a:t>
             </a:r>
           </a:p>
         </p:txBody>
@@ -11514,6 +11809,7 @@
           <a:lstStyle/>
           <a:p>
             <a:pPr algn="ctr"/>
+            <a:endParaRPr/>
           </a:p>
         </p:txBody>
       </p:sp>
@@ -11558,6 +11854,7 @@
           <a:lstStyle/>
           <a:p>
             <a:pPr algn="ctr"/>
+            <a:endParaRPr/>
           </a:p>
         </p:txBody>
       </p:sp>
@@ -11585,7 +11882,7 @@
           <a:p>
             <a:pPr algn="l"/>
             <a:r>
-              <a:rPr b="1" i="0" sz="1500">
+              <a:rPr sz="1500" b="1" i="0">
                 <a:solidFill>
                   <a:srgbClr val="F59E0B"/>
                 </a:solidFill>
@@ -11619,7 +11916,7 @@
           <a:p>
             <a:pPr algn="l"/>
             <a:r>
-              <a:rPr b="0" i="0" sz="1000">
+              <a:rPr sz="1000" b="0" i="0">
                 <a:solidFill>
                   <a:srgbClr val="94A3B8"/>
                 </a:solidFill>
@@ -11670,6 +11967,7 @@
           <a:lstStyle/>
           <a:p>
             <a:pPr algn="ctr"/>
+            <a:endParaRPr/>
           </a:p>
         </p:txBody>
       </p:sp>
@@ -11697,7 +11995,7 @@
           <a:p>
             <a:pPr algn="l"/>
             <a:r>
-              <a:rPr b="0" i="0" sz="1050">
+              <a:rPr sz="1050" b="0" i="0">
                 <a:solidFill>
                   <a:srgbClr val="F8FAFC"/>
                 </a:solidFill>
@@ -11731,7 +12029,7 @@
           <a:p>
             <a:pPr algn="l"/>
             <a:r>
-              <a:rPr b="0" i="0" sz="1050">
+              <a:rPr sz="1050" b="0" i="0">
                 <a:solidFill>
                   <a:srgbClr val="94A3B8"/>
                 </a:solidFill>
@@ -11765,7 +12063,7 @@
           <a:p>
             <a:pPr algn="l"/>
             <a:r>
-              <a:rPr b="0" i="0" sz="1050">
+              <a:rPr sz="1050" b="0" i="0">
                 <a:solidFill>
                   <a:srgbClr val="94A3B8"/>
                 </a:solidFill>
@@ -11783,7 +12081,7 @@
         </p:nvSpPr>
         <p:spPr>
           <a:xfrm>
-            <a:off x="8449056" y="4361688"/>
+            <a:off x="8439911" y="3858768"/>
             <a:ext cx="3456431" cy="457200"/>
           </a:xfrm>
           <a:prstGeom prst="rect">
@@ -11799,12 +12097,44 @@
           <a:p>
             <a:pPr algn="l"/>
             <a:r>
-              <a:rPr b="0" i="0" sz="1050">
+              <a:rPr sz="1050" b="0" i="0" dirty="0">
                 <a:solidFill>
                   <a:srgbClr val="94A3B8"/>
                 </a:solidFill>
               </a:rPr>
-              <a:t>• namespace: {projectId}::{userId}</a:t>
+              <a:t>• namespace: {</a:t>
+            </a:r>
+            <a:r>
+              <a:rPr sz="1050" b="0" i="0" dirty="0" err="1">
+                <a:solidFill>
+                  <a:srgbClr val="94A3B8"/>
+                </a:solidFill>
+              </a:rPr>
+              <a:t>projectId</a:t>
+            </a:r>
+            <a:r>
+              <a:rPr sz="1050" b="0" i="0" dirty="0">
+                <a:solidFill>
+                  <a:srgbClr val="94A3B8"/>
+                </a:solidFill>
+              </a:rPr>
+              <a:t>}::{</a:t>
+            </a:r>
+            <a:r>
+              <a:rPr sz="1050" b="0" i="0" dirty="0" err="1">
+                <a:solidFill>
+                  <a:srgbClr val="94A3B8"/>
+                </a:solidFill>
+              </a:rPr>
+              <a:t>userId</a:t>
+            </a:r>
+            <a:r>
+              <a:rPr sz="1050" b="0" i="0" dirty="0">
+                <a:solidFill>
+                  <a:srgbClr val="94A3B8"/>
+                </a:solidFill>
+              </a:rPr>
+              <a:t>}</a:t>
             </a:r>
           </a:p>
         </p:txBody>
@@ -11852,8 +12182,8 @@
         </p:nvCxnSpPr>
         <p:spPr>
           <a:xfrm flipH="1" flipV="1">
-            <a:off x="4206240" y="3911802.2"/>
-            <a:ext cx="109728" cy="65836.79999999981"/>
+            <a:off x="4206240" y="0"/>
+            <a:ext cx="109728" cy="0"/>
           </a:xfrm>
           <a:prstGeom prst="line">
             <a:avLst/>
@@ -11888,7 +12218,7 @@
         <p:spPr>
           <a:xfrm flipH="1">
             <a:off x="4206240" y="3977639"/>
-            <a:ext cx="109728" cy="65836.79999999981"/>
+            <a:ext cx="109728" cy="0"/>
           </a:xfrm>
           <a:prstGeom prst="line">
             <a:avLst/>
@@ -11938,7 +12268,7 @@
           <a:p>
             <a:pPr algn="ctr"/>
             <a:r>
-              <a:rPr b="0" i="0" sz="800">
+              <a:rPr sz="800" b="0" i="0">
                 <a:solidFill>
                   <a:srgbClr val="3D506A"/>
                 </a:solidFill>
@@ -11991,8 +12321,8 @@
         </p:nvCxnSpPr>
         <p:spPr>
           <a:xfrm flipH="1" flipV="1">
-            <a:off x="8138159" y="3911802.2"/>
-            <a:ext cx="109728" cy="65836.79999999981"/>
+            <a:off x="8138159" y="0"/>
+            <a:ext cx="109728" cy="0"/>
           </a:xfrm>
           <a:prstGeom prst="line">
             <a:avLst/>
@@ -12027,7 +12357,7 @@
         <p:spPr>
           <a:xfrm flipH="1">
             <a:off x="8138159" y="3977639"/>
-            <a:ext cx="109728" cy="65836.79999999981"/>
+            <a:ext cx="109728" cy="0"/>
           </a:xfrm>
           <a:prstGeom prst="line">
             <a:avLst/>
@@ -12077,7 +12407,7 @@
           <a:p>
             <a:pPr algn="ctr"/>
             <a:r>
-              <a:rPr b="0" i="0" sz="800">
+              <a:rPr sz="800" b="0" i="0">
                 <a:solidFill>
                   <a:srgbClr val="3D506A"/>
                 </a:solidFill>
@@ -12092,16 +12422,12 @@
   <p:clrMapOvr>
     <a:masterClrMapping/>
   </p:clrMapOvr>
-  <p:transition xmlns:p14="http://schemas.microsoft.com/office/powerpoint/2010/main" spd="med" advTm="0">
-    <p14:transition inverted="0">
-      <p14:morph option="byObject"/>
-    </p14:transition>
-  </p:transition>
+  <p:transition spd="med" advTm="0"/>
 </p:sld>
 </file>
 
 <file path=ppt/slides/slide5.xml><?xml version="1.0" encoding="utf-8"?>
-<p:sld xmlns:a="http://schemas.openxmlformats.org/drawingml/2006/main" xmlns:p="http://schemas.openxmlformats.org/presentationml/2006/main" xmlns:r="http://schemas.openxmlformats.org/officeDocument/2006/relationships">
+<p:sld xmlns:a="http://schemas.openxmlformats.org/drawingml/2006/main" xmlns:r="http://schemas.openxmlformats.org/officeDocument/2006/relationships" xmlns:p="http://schemas.openxmlformats.org/presentationml/2006/main">
   <p:cSld>
     <p:bg>
       <p:bgPr>
@@ -12117,7 +12443,14 @@
         <p:cNvGrpSpPr/>
         <p:nvPr/>
       </p:nvGrpSpPr>
-      <p:grpSpPr/>
+      <p:grpSpPr>
+        <a:xfrm>
+          <a:off x="0" y="0"/>
+          <a:ext cx="0" cy="0"/>
+          <a:chOff x="0" y="0"/>
+          <a:chExt cx="0" cy="0"/>
+        </a:xfrm>
+      </p:grpSpPr>
       <p:sp>
         <p:nvSpPr>
           <p:cNvPr id="2" name="Rectangle 1"/>
@@ -12159,6 +12492,7 @@
           <a:lstStyle/>
           <a:p>
             <a:pPr algn="ctr"/>
+            <a:endParaRPr/>
           </a:p>
         </p:txBody>
       </p:sp>
@@ -12205,6 +12539,7 @@
           <a:lstStyle/>
           <a:p>
             <a:pPr algn="ctr"/>
+            <a:endParaRPr/>
           </a:p>
         </p:txBody>
       </p:sp>
@@ -12232,7 +12567,7 @@
           <a:p>
             <a:pPr algn="ctr"/>
             <a:r>
-              <a:rPr b="1" i="0" sz="900">
+              <a:rPr sz="900" b="1" i="0">
                 <a:solidFill>
                   <a:srgbClr val="F8FAFC"/>
                 </a:solidFill>
@@ -12266,7 +12601,7 @@
           <a:p>
             <a:pPr algn="l"/>
             <a:r>
-              <a:rPr b="1" i="0" sz="2800">
+              <a:rPr sz="2800" b="1" i="0">
                 <a:solidFill>
                   <a:srgbClr val="F8FAFC"/>
                 </a:solidFill>
@@ -12317,6 +12652,7 @@
           <a:lstStyle/>
           <a:p>
             <a:pPr algn="ctr"/>
+            <a:endParaRPr/>
           </a:p>
         </p:txBody>
       </p:sp>
@@ -12361,6 +12697,7 @@
           <a:lstStyle/>
           <a:p>
             <a:pPr algn="ctr"/>
+            <a:endParaRPr/>
           </a:p>
         </p:txBody>
       </p:sp>
@@ -12388,7 +12725,7 @@
           <a:p>
             <a:pPr algn="ctr"/>
             <a:r>
-              <a:rPr b="1" i="0" sz="2800">
+              <a:rPr sz="2800" b="1" i="0">
                 <a:solidFill>
                   <a:srgbClr val="F8FAFC"/>
                 </a:solidFill>
@@ -12422,7 +12759,7 @@
           <a:p>
             <a:pPr algn="ctr"/>
             <a:r>
-              <a:rPr b="1" i="0" sz="1100">
+              <a:rPr sz="1100" b="1" i="0">
                 <a:solidFill>
                   <a:srgbClr val="F8FAFC"/>
                 </a:solidFill>
@@ -12457,7 +12794,7 @@
           <a:p>
             <a:pPr algn="ctr"/>
             <a:r>
-              <a:rPr b="0" i="0" sz="900">
+              <a:rPr sz="900" b="0" i="0">
                 <a:solidFill>
                   <a:srgbClr val="94A3B8"/>
                 </a:solidFill>
@@ -12476,8 +12813,8 @@
         </p:nvCxnSpPr>
         <p:spPr>
           <a:xfrm>
-            <a:off x="1833372.0" y="3657600"/>
-            <a:ext cx="649224.0" cy="0"/>
+            <a:off x="0" y="3657600"/>
+            <a:ext cx="0" cy="0"/>
           </a:xfrm>
           <a:prstGeom prst="line">
             <a:avLst/>
@@ -12511,8 +12848,8 @@
         </p:nvCxnSpPr>
         <p:spPr>
           <a:xfrm flipH="1" flipV="1">
-            <a:off x="2372868.0" y="3591763.2"/>
-            <a:ext cx="109728.0" cy="65836.79999999981"/>
+            <a:off x="0" y="0"/>
+            <a:ext cx="0" cy="0"/>
           </a:xfrm>
           <a:prstGeom prst="line">
             <a:avLst/>
@@ -12546,8 +12883,8 @@
         </p:nvCxnSpPr>
         <p:spPr>
           <a:xfrm flipH="1">
-            <a:off x="2372868.0" y="3657600"/>
-            <a:ext cx="109728.0" cy="65836.79999999981"/>
+            <a:off x="0" y="3657600"/>
+            <a:ext cx="0" cy="0"/>
           </a:xfrm>
           <a:prstGeom prst="line">
             <a:avLst/>
@@ -12614,6 +12951,7 @@
           <a:lstStyle/>
           <a:p>
             <a:pPr algn="ctr"/>
+            <a:endParaRPr/>
           </a:p>
         </p:txBody>
       </p:sp>
@@ -12641,7 +12979,7 @@
           <a:p>
             <a:pPr algn="ctr"/>
             <a:r>
-              <a:rPr b="1" i="0" sz="2800">
+              <a:rPr sz="2800" b="1" i="0">
                 <a:solidFill>
                   <a:srgbClr val="F8FAFC"/>
                 </a:solidFill>
@@ -12675,7 +13013,7 @@
           <a:p>
             <a:pPr algn="ctr"/>
             <a:r>
-              <a:rPr b="1" i="0" sz="1100">
+              <a:rPr sz="1100" b="1" i="0">
                 <a:solidFill>
                   <a:srgbClr val="F8FAFC"/>
                 </a:solidFill>
@@ -12710,7 +13048,7 @@
           <a:p>
             <a:pPr algn="ctr"/>
             <a:r>
-              <a:rPr b="0" i="0" sz="900">
+              <a:rPr sz="900" b="0" i="0">
                 <a:solidFill>
                   <a:srgbClr val="94A3B8"/>
                 </a:solidFill>
@@ -12729,8 +13067,8 @@
         </p:nvCxnSpPr>
         <p:spPr>
           <a:xfrm>
-            <a:off x="3726180.0" y="3657600"/>
-            <a:ext cx="649224.0" cy="0"/>
+            <a:off x="0" y="3657600"/>
+            <a:ext cx="0" cy="0"/>
           </a:xfrm>
           <a:prstGeom prst="line">
             <a:avLst/>
@@ -12764,8 +13102,8 @@
         </p:nvCxnSpPr>
         <p:spPr>
           <a:xfrm flipH="1" flipV="1">
-            <a:off x="4265676.0" y="3591763.2"/>
-            <a:ext cx="109728.0" cy="65836.79999999981"/>
+            <a:off x="0" y="0"/>
+            <a:ext cx="0" cy="0"/>
           </a:xfrm>
           <a:prstGeom prst="line">
             <a:avLst/>
@@ -12799,8 +13137,8 @@
         </p:nvCxnSpPr>
         <p:spPr>
           <a:xfrm flipH="1">
-            <a:off x="4265676.0" y="3657600"/>
-            <a:ext cx="109728.0" cy="65836.79999999981"/>
+            <a:off x="0" y="3657600"/>
+            <a:ext cx="0" cy="0"/>
           </a:xfrm>
           <a:prstGeom prst="line">
             <a:avLst/>
@@ -12867,6 +13205,7 @@
           <a:lstStyle/>
           <a:p>
             <a:pPr algn="ctr"/>
+            <a:endParaRPr/>
           </a:p>
         </p:txBody>
       </p:sp>
@@ -12894,7 +13233,7 @@
           <a:p>
             <a:pPr algn="ctr"/>
             <a:r>
-              <a:rPr b="1" i="0" sz="2800">
+              <a:rPr sz="2800" b="1" i="0">
                 <a:solidFill>
                   <a:srgbClr val="F8FAFC"/>
                 </a:solidFill>
@@ -12928,7 +13267,7 @@
           <a:p>
             <a:pPr algn="ctr"/>
             <a:r>
-              <a:rPr b="1" i="0" sz="1100">
+              <a:rPr sz="1100" b="1" i="0">
                 <a:solidFill>
                   <a:srgbClr val="F8FAFC"/>
                 </a:solidFill>
@@ -12963,7 +13302,7 @@
           <a:p>
             <a:pPr algn="ctr"/>
             <a:r>
-              <a:rPr b="0" i="0" sz="900">
+              <a:rPr sz="900" b="0" i="0">
                 <a:solidFill>
                   <a:srgbClr val="94A3B8"/>
                 </a:solidFill>
@@ -12982,8 +13321,8 @@
         </p:nvCxnSpPr>
         <p:spPr>
           <a:xfrm>
-            <a:off x="5618988.0" y="3657600"/>
-            <a:ext cx="649224.0" cy="0"/>
+            <a:off x="0" y="3657600"/>
+            <a:ext cx="0" cy="0"/>
           </a:xfrm>
           <a:prstGeom prst="line">
             <a:avLst/>
@@ -13017,8 +13356,8 @@
         </p:nvCxnSpPr>
         <p:spPr>
           <a:xfrm flipH="1" flipV="1">
-            <a:off x="6158484.0" y="3591763.2"/>
-            <a:ext cx="109728.0" cy="65836.79999999981"/>
+            <a:off x="0" y="0"/>
+            <a:ext cx="0" cy="0"/>
           </a:xfrm>
           <a:prstGeom prst="line">
             <a:avLst/>
@@ -13052,8 +13391,8 @@
         </p:nvCxnSpPr>
         <p:spPr>
           <a:xfrm flipH="1">
-            <a:off x="6158484.0" y="3657600"/>
-            <a:ext cx="109728.0" cy="65836.79999999981"/>
+            <a:off x="0" y="3657600"/>
+            <a:ext cx="0" cy="0"/>
           </a:xfrm>
           <a:prstGeom prst="line">
             <a:avLst/>
@@ -13120,6 +13459,7 @@
           <a:lstStyle/>
           <a:p>
             <a:pPr algn="ctr"/>
+            <a:endParaRPr/>
           </a:p>
         </p:txBody>
       </p:sp>
@@ -13147,7 +13487,7 @@
           <a:p>
             <a:pPr algn="ctr"/>
             <a:r>
-              <a:rPr b="1" i="0" sz="2800">
+              <a:rPr sz="2800" b="1" i="0">
                 <a:solidFill>
                   <a:srgbClr val="F8FAFC"/>
                 </a:solidFill>
@@ -13181,7 +13521,7 @@
           <a:p>
             <a:pPr algn="ctr"/>
             <a:r>
-              <a:rPr b="1" i="0" sz="1100">
+              <a:rPr sz="1100" b="1" i="0">
                 <a:solidFill>
                   <a:srgbClr val="F8FAFC"/>
                 </a:solidFill>
@@ -13216,7 +13556,7 @@
           <a:p>
             <a:pPr algn="ctr"/>
             <a:r>
-              <a:rPr b="0" i="0" sz="900">
+              <a:rPr sz="900" b="0" i="0">
                 <a:solidFill>
                   <a:srgbClr val="94A3B8"/>
                 </a:solidFill>
@@ -13235,8 +13575,8 @@
         </p:nvCxnSpPr>
         <p:spPr>
           <a:xfrm>
-            <a:off x="7511796.0" y="3657600"/>
-            <a:ext cx="649224.0" cy="0"/>
+            <a:off x="0" y="3657600"/>
+            <a:ext cx="0" cy="0"/>
           </a:xfrm>
           <a:prstGeom prst="line">
             <a:avLst/>
@@ -13270,8 +13610,8 @@
         </p:nvCxnSpPr>
         <p:spPr>
           <a:xfrm flipH="1" flipV="1">
-            <a:off x="8051292.0" y="3591763.2"/>
-            <a:ext cx="109728.0" cy="65836.79999999981"/>
+            <a:off x="0" y="0"/>
+            <a:ext cx="0" cy="0"/>
           </a:xfrm>
           <a:prstGeom prst="line">
             <a:avLst/>
@@ -13305,8 +13645,8 @@
         </p:nvCxnSpPr>
         <p:spPr>
           <a:xfrm flipH="1">
-            <a:off x="8051292.0" y="3657600"/>
-            <a:ext cx="109728.0" cy="65836.79999999981"/>
+            <a:off x="0" y="3657600"/>
+            <a:ext cx="0" cy="0"/>
           </a:xfrm>
           <a:prstGeom prst="line">
             <a:avLst/>
@@ -13373,6 +13713,7 @@
           <a:lstStyle/>
           <a:p>
             <a:pPr algn="ctr"/>
+            <a:endParaRPr/>
           </a:p>
         </p:txBody>
       </p:sp>
@@ -13400,7 +13741,7 @@
           <a:p>
             <a:pPr algn="ctr"/>
             <a:r>
-              <a:rPr b="1" i="0" sz="2800">
+              <a:rPr sz="2800" b="1" i="0">
                 <a:solidFill>
                   <a:srgbClr val="F8FAFC"/>
                 </a:solidFill>
@@ -13434,7 +13775,7 @@
           <a:p>
             <a:pPr algn="ctr"/>
             <a:r>
-              <a:rPr b="1" i="0" sz="1100">
+              <a:rPr sz="1100" b="1" i="0">
                 <a:solidFill>
                   <a:srgbClr val="F8FAFC"/>
                 </a:solidFill>
@@ -13469,7 +13810,7 @@
           <a:p>
             <a:pPr algn="ctr"/>
             <a:r>
-              <a:rPr b="0" i="0" sz="900">
+              <a:rPr sz="900" b="0" i="0">
                 <a:solidFill>
                   <a:srgbClr val="94A3B8"/>
                 </a:solidFill>
@@ -13488,8 +13829,8 @@
         </p:nvCxnSpPr>
         <p:spPr>
           <a:xfrm>
-            <a:off x="9404604.0" y="3657600"/>
-            <a:ext cx="649224.0" cy="0"/>
+            <a:off x="0" y="3657600"/>
+            <a:ext cx="0" cy="0"/>
           </a:xfrm>
           <a:prstGeom prst="line">
             <a:avLst/>
@@ -13523,8 +13864,8 @@
         </p:nvCxnSpPr>
         <p:spPr>
           <a:xfrm flipH="1" flipV="1">
-            <a:off x="9944100.0" y="3591763.2"/>
-            <a:ext cx="109728.0" cy="65836.79999999981"/>
+            <a:off x="0" y="0"/>
+            <a:ext cx="0" cy="0"/>
           </a:xfrm>
           <a:prstGeom prst="line">
             <a:avLst/>
@@ -13558,8 +13899,8 @@
         </p:nvCxnSpPr>
         <p:spPr>
           <a:xfrm flipH="1">
-            <a:off x="9944100.0" y="3657600"/>
-            <a:ext cx="109728.0" cy="65836.79999999981"/>
+            <a:off x="0" y="3657600"/>
+            <a:ext cx="0" cy="0"/>
           </a:xfrm>
           <a:prstGeom prst="line">
             <a:avLst/>
@@ -13626,6 +13967,7 @@
           <a:lstStyle/>
           <a:p>
             <a:pPr algn="ctr"/>
+            <a:endParaRPr/>
           </a:p>
         </p:txBody>
       </p:sp>
@@ -13653,7 +13995,7 @@
           <a:p>
             <a:pPr algn="ctr"/>
             <a:r>
-              <a:rPr b="1" i="0" sz="2800">
+              <a:rPr sz="2800" b="1" i="0">
                 <a:solidFill>
                   <a:srgbClr val="F8FAFC"/>
                 </a:solidFill>
@@ -13687,7 +14029,7 @@
           <a:p>
             <a:pPr algn="ctr"/>
             <a:r>
-              <a:rPr b="1" i="0" sz="1100">
+              <a:rPr sz="1100" b="1" i="0">
                 <a:solidFill>
                   <a:srgbClr val="F8FAFC"/>
                 </a:solidFill>
@@ -13722,7 +14064,7 @@
           <a:p>
             <a:pPr algn="ctr"/>
             <a:r>
-              <a:rPr b="0" i="0" sz="900">
+              <a:rPr sz="900" b="0" i="0">
                 <a:solidFill>
                   <a:srgbClr val="94A3B8"/>
                 </a:solidFill>
@@ -13778,6 +14120,7 @@
           <a:lstStyle/>
           <a:p>
             <a:pPr algn="ctr"/>
+            <a:endParaRPr/>
           </a:p>
         </p:txBody>
       </p:sp>
@@ -13805,172 +14148,12 @@
           <a:p>
             <a:pPr algn="l"/>
             <a:r>
-              <a:rPr b="0" i="0" sz="1100">
+              <a:rPr sz="1100" b="0" i="0">
                 <a:solidFill>
                   <a:srgbClr val="F8FAFC"/>
                 </a:solidFill>
               </a:rPr>
               <a:t>🔒  Crash-safe: index.json saved after every batch — if interrupted, next run resumes from last checkpoint</a:t>
-            </a:r>
-          </a:p>
-        </p:txBody>
-      </p:sp>
-      <p:sp>
-        <p:nvSpPr>
-          <p:cNvPr id="48" name="Rounded Rectangle 47"/>
-          <p:cNvSpPr/>
-          <p:nvPr/>
-        </p:nvSpPr>
-        <p:spPr>
-          <a:xfrm>
-            <a:off x="411480" y="1920240"/>
-            <a:ext cx="640080" cy="1645920"/>
-          </a:xfrm>
-          <a:prstGeom prst="roundRect">
-            <a:avLst>
-              <a:gd name="adj" fmla="val 8000"/>
-            </a:avLst>
-          </a:prstGeom>
-          <a:solidFill>
-            <a:srgbClr val="19243A"/>
-          </a:solidFill>
-          <a:ln>
-            <a:noFill/>
-          </a:ln>
-          <a:effectLst/>
-        </p:spPr>
-        <p:style>
-          <a:lnRef idx="1">
-            <a:schemeClr val="accent1"/>
-          </a:lnRef>
-          <a:fillRef idx="3">
-            <a:schemeClr val="accent1"/>
-          </a:fillRef>
-          <a:effectRef idx="2">
-            <a:schemeClr val="accent1"/>
-          </a:effectRef>
-          <a:fontRef idx="minor">
-            <a:schemeClr val="lt1"/>
-          </a:fontRef>
-        </p:style>
-        <p:txBody>
-          <a:bodyPr rtlCol="0" anchor="ctr"/>
-          <a:lstStyle/>
-          <a:p>
-            <a:pPr algn="ctr"/>
-          </a:p>
-        </p:txBody>
-      </p:sp>
-      <p:sp>
-        <p:nvSpPr>
-          <p:cNvPr id="49" name="TextBox 48"/>
-          <p:cNvSpPr txBox="1"/>
-          <p:nvPr/>
-        </p:nvSpPr>
-        <p:spPr>
-          <a:xfrm>
-            <a:off x="411480" y="1920240"/>
-            <a:ext cx="640080" cy="1645920"/>
-          </a:xfrm>
-          <a:prstGeom prst="rect">
-            <a:avLst/>
-          </a:prstGeom>
-          <a:noFill/>
-        </p:spPr>
-        <p:txBody>
-          <a:bodyPr wrap="square">
-            <a:spAutoFit/>
-          </a:bodyPr>
-          <a:lstStyle/>
-          <a:p>
-            <a:pPr algn="ctr"/>
-            <a:r>
-              <a:rPr b="1" i="0" sz="800">
-                <a:solidFill>
-                  <a:srgbClr val="387EF5"/>
-                </a:solidFill>
-              </a:rPr>
-              <a:t>SCAN</a:t>
-            </a:r>
-          </a:p>
-        </p:txBody>
-      </p:sp>
-      <p:sp>
-        <p:nvSpPr>
-          <p:cNvPr id="50" name="Rounded Rectangle 49"/>
-          <p:cNvSpPr/>
-          <p:nvPr/>
-        </p:nvSpPr>
-        <p:spPr>
-          <a:xfrm>
-            <a:off x="6400800" y="1920240"/>
-            <a:ext cx="640080" cy="1645920"/>
-          </a:xfrm>
-          <a:prstGeom prst="roundRect">
-            <a:avLst>
-              <a:gd name="adj" fmla="val 8000"/>
-            </a:avLst>
-          </a:prstGeom>
-          <a:solidFill>
-            <a:srgbClr val="19243A"/>
-          </a:solidFill>
-          <a:ln>
-            <a:noFill/>
-          </a:ln>
-          <a:effectLst/>
-        </p:spPr>
-        <p:style>
-          <a:lnRef idx="1">
-            <a:schemeClr val="accent1"/>
-          </a:lnRef>
-          <a:fillRef idx="3">
-            <a:schemeClr val="accent1"/>
-          </a:fillRef>
-          <a:effectRef idx="2">
-            <a:schemeClr val="accent1"/>
-          </a:effectRef>
-          <a:fontRef idx="minor">
-            <a:schemeClr val="lt1"/>
-          </a:fontRef>
-        </p:style>
-        <p:txBody>
-          <a:bodyPr rtlCol="0" anchor="ctr"/>
-          <a:lstStyle/>
-          <a:p>
-            <a:pPr algn="ctr"/>
-          </a:p>
-        </p:txBody>
-      </p:sp>
-      <p:sp>
-        <p:nvSpPr>
-          <p:cNvPr id="51" name="TextBox 50"/>
-          <p:cNvSpPr txBox="1"/>
-          <p:nvPr/>
-        </p:nvSpPr>
-        <p:spPr>
-          <a:xfrm>
-            <a:off x="6400800" y="1920240"/>
-            <a:ext cx="640080" cy="1645920"/>
-          </a:xfrm>
-          <a:prstGeom prst="rect">
-            <a:avLst/>
-          </a:prstGeom>
-          <a:noFill/>
-        </p:spPr>
-        <p:txBody>
-          <a:bodyPr wrap="square">
-            <a:spAutoFit/>
-          </a:bodyPr>
-          <a:lstStyle/>
-          <a:p>
-            <a:pPr algn="ctr"/>
-            <a:r>
-              <a:rPr b="1" i="0" sz="800">
-                <a:solidFill>
-                  <a:srgbClr val="F59E0B"/>
-                </a:solidFill>
-              </a:rPr>
-              <a:t>AI</a:t>
             </a:r>
           </a:p>
         </p:txBody>
@@ -13980,16 +14163,12 @@
   <p:clrMapOvr>
     <a:masterClrMapping/>
   </p:clrMapOvr>
-  <p:transition xmlns:p14="http://schemas.microsoft.com/office/powerpoint/2010/main" spd="med" advTm="0">
-    <p14:transition inverted="0">
-      <p14:morph option="byObject"/>
-    </p14:transition>
-  </p:transition>
+  <p:transition spd="med" advTm="0"/>
 </p:sld>
 </file>
 
 <file path=ppt/slides/slide6.xml><?xml version="1.0" encoding="utf-8"?>
-<p:sld xmlns:a="http://schemas.openxmlformats.org/drawingml/2006/main" xmlns:p="http://schemas.openxmlformats.org/presentationml/2006/main" xmlns:r="http://schemas.openxmlformats.org/officeDocument/2006/relationships">
+<p:sld xmlns:a="http://schemas.openxmlformats.org/drawingml/2006/main" xmlns:r="http://schemas.openxmlformats.org/officeDocument/2006/relationships" xmlns:p="http://schemas.openxmlformats.org/presentationml/2006/main">
   <p:cSld>
     <p:bg>
       <p:bgPr>
@@ -14005,7 +14184,14 @@
         <p:cNvGrpSpPr/>
         <p:nvPr/>
       </p:nvGrpSpPr>
-      <p:grpSpPr/>
+      <p:grpSpPr>
+        <a:xfrm>
+          <a:off x="0" y="0"/>
+          <a:ext cx="0" cy="0"/>
+          <a:chOff x="0" y="0"/>
+          <a:chExt cx="0" cy="0"/>
+        </a:xfrm>
+      </p:grpSpPr>
       <p:sp>
         <p:nvSpPr>
           <p:cNvPr id="2" name="Rectangle 1"/>
@@ -14047,6 +14233,7 @@
           <a:lstStyle/>
           <a:p>
             <a:pPr algn="ctr"/>
+            <a:endParaRPr/>
           </a:p>
         </p:txBody>
       </p:sp>
@@ -14093,6 +14280,7 @@
           <a:lstStyle/>
           <a:p>
             <a:pPr algn="ctr"/>
+            <a:endParaRPr/>
           </a:p>
         </p:txBody>
       </p:sp>
@@ -14120,7 +14308,7 @@
           <a:p>
             <a:pPr algn="ctr"/>
             <a:r>
-              <a:rPr b="1" i="0" sz="900">
+              <a:rPr sz="900" b="1" i="0">
                 <a:solidFill>
                   <a:srgbClr val="F8FAFC"/>
                 </a:solidFill>
@@ -14154,7 +14342,7 @@
           <a:p>
             <a:pPr algn="l"/>
             <a:r>
-              <a:rPr b="1" i="0" sz="2600">
+              <a:rPr sz="2600" b="1" i="0">
                 <a:solidFill>
                   <a:srgbClr val="F8FAFC"/>
                 </a:solidFill>
@@ -14205,6 +14393,7 @@
           <a:lstStyle/>
           <a:p>
             <a:pPr algn="ctr"/>
+            <a:endParaRPr/>
           </a:p>
         </p:txBody>
       </p:sp>
@@ -14253,6 +14442,7 @@
           <a:lstStyle/>
           <a:p>
             <a:pPr algn="ctr"/>
+            <a:endParaRPr/>
           </a:p>
         </p:txBody>
       </p:sp>
@@ -14280,7 +14470,7 @@
           <a:p>
             <a:pPr algn="l"/>
             <a:r>
-              <a:rPr b="1" i="0" sz="900">
+              <a:rPr sz="900" b="1" i="0">
                 <a:solidFill>
                   <a:srgbClr val="387EF5"/>
                 </a:solidFill>
@@ -14314,7 +14504,7 @@
           <a:p>
             <a:pPr algn="l"/>
             <a:r>
-              <a:rPr b="0" i="0" sz="950">
+              <a:rPr sz="950" b="0" i="0">
                 <a:solidFill>
                   <a:srgbClr val="0DB57C"/>
                 </a:solidFill>
@@ -14354,7 +14544,7 @@
           <a:p>
             <a:pPr algn="ctr"/>
             <a:r>
-              <a:rPr b="1" i="0" sz="1050">
+              <a:rPr sz="1050" b="1" i="0">
                 <a:solidFill>
                   <a:srgbClr val="F59E0B"/>
                 </a:solidFill>
@@ -14408,8 +14598,8 @@
         </p:nvCxnSpPr>
         <p:spPr>
           <a:xfrm flipH="1" flipV="1">
-            <a:off x="5879592" y="2631643.2"/>
-            <a:ext cx="109728" cy="65836.79999999981"/>
+            <a:off x="5879592" y="0"/>
+            <a:ext cx="109728" cy="0"/>
           </a:xfrm>
           <a:prstGeom prst="line">
             <a:avLst/>
@@ -14444,7 +14634,7 @@
         <p:spPr>
           <a:xfrm flipH="1">
             <a:off x="5879592" y="2697480"/>
-            <a:ext cx="109728" cy="65836.79999999981"/>
+            <a:ext cx="109728" cy="0"/>
           </a:xfrm>
           <a:prstGeom prst="line">
             <a:avLst/>
@@ -14515,6 +14705,7 @@
           <a:lstStyle/>
           <a:p>
             <a:pPr algn="ctr"/>
+            <a:endParaRPr/>
           </a:p>
         </p:txBody>
       </p:sp>
@@ -14542,7 +14733,7 @@
           <a:p>
             <a:pPr algn="l"/>
             <a:r>
-              <a:rPr b="1" i="0" sz="900">
+              <a:rPr sz="900" b="1" i="0">
                 <a:solidFill>
                   <a:srgbClr val="F59E0B"/>
                 </a:solidFill>
@@ -14576,7 +14767,7 @@
           <a:p>
             <a:pPr algn="l"/>
             <a:r>
-              <a:rPr b="0" i="1" sz="1100">
+              <a:rPr sz="1100" b="0" i="1">
                 <a:solidFill>
                   <a:srgbClr val="F8FAFC"/>
                 </a:solidFill>
@@ -14634,6 +14825,7 @@
           <a:lstStyle/>
           <a:p>
             <a:pPr algn="ctr"/>
+            <a:endParaRPr/>
           </a:p>
         </p:txBody>
       </p:sp>
@@ -14661,7 +14853,7 @@
           <a:p>
             <a:pPr algn="l"/>
             <a:r>
-              <a:rPr b="1" i="0" sz="900">
+              <a:rPr sz="900" b="1" i="0">
                 <a:solidFill>
                   <a:srgbClr val="94A3B8"/>
                 </a:solidFill>
@@ -14695,7 +14887,7 @@
           <a:p>
             <a:pPr algn="l"/>
             <a:r>
-              <a:rPr b="1" i="0" sz="900">
+              <a:rPr sz="900" b="1" i="0">
                 <a:solidFill>
                   <a:srgbClr val="94A3B8"/>
                 </a:solidFill>
@@ -14729,7 +14921,7 @@
           <a:p>
             <a:pPr algn="l"/>
             <a:r>
-              <a:rPr b="1" i="0" sz="900">
+              <a:rPr sz="900" b="1" i="0">
                 <a:solidFill>
                   <a:srgbClr val="94A3B8"/>
                 </a:solidFill>
@@ -14763,7 +14955,7 @@
           <a:p>
             <a:pPr algn="l"/>
             <a:r>
-              <a:rPr b="1" i="0" sz="900">
+              <a:rPr sz="900" b="1" i="0">
                 <a:solidFill>
                   <a:srgbClr val="94A3B8"/>
                 </a:solidFill>
@@ -14797,7 +14989,7 @@
           <a:p>
             <a:pPr algn="l"/>
             <a:r>
-              <a:rPr b="1" i="0" sz="900">
+              <a:rPr sz="900" b="1" i="0">
                 <a:solidFill>
                   <a:srgbClr val="94A3B8"/>
                 </a:solidFill>
@@ -14848,6 +15040,7 @@
           <a:lstStyle/>
           <a:p>
             <a:pPr algn="ctr"/>
+            <a:endParaRPr/>
           </a:p>
         </p:txBody>
       </p:sp>
@@ -14875,7 +15068,7 @@
           <a:p>
             <a:pPr algn="l"/>
             <a:r>
-              <a:rPr b="0" i="0" sz="1050">
+              <a:rPr sz="1050" b="0" i="0">
                 <a:solidFill>
                   <a:srgbClr val="F8FAFC"/>
                 </a:solidFill>
@@ -14909,7 +15102,7 @@
           <a:p>
             <a:pPr algn="l"/>
             <a:r>
-              <a:rPr b="0" i="0" sz="1050">
+              <a:rPr sz="1050" b="0" i="0">
                 <a:solidFill>
                   <a:srgbClr val="94A3B8"/>
                 </a:solidFill>
@@ -14943,7 +15136,7 @@
           <a:p>
             <a:pPr algn="l"/>
             <a:r>
-              <a:rPr b="1" i="0" sz="1050">
+              <a:rPr sz="1050" b="1" i="0">
                 <a:solidFill>
                   <a:srgbClr val="0DB57C"/>
                 </a:solidFill>
@@ -14977,7 +15170,7 @@
           <a:p>
             <a:pPr algn="l"/>
             <a:r>
-              <a:rPr b="1" i="0" sz="1050">
+              <a:rPr sz="1050" b="1" i="0">
                 <a:solidFill>
                   <a:srgbClr val="F59E0B"/>
                 </a:solidFill>
@@ -15011,7 +15204,7 @@
           <a:p>
             <a:pPr algn="l"/>
             <a:r>
-              <a:rPr b="0" i="0" sz="1050">
+              <a:rPr sz="1050" b="0" i="0">
                 <a:solidFill>
                   <a:srgbClr val="F8FAFC"/>
                 </a:solidFill>
@@ -15045,7 +15238,7 @@
           <a:p>
             <a:pPr algn="l"/>
             <a:r>
-              <a:rPr b="0" i="0" sz="1050">
+              <a:rPr sz="1050" b="0" i="0">
                 <a:solidFill>
                   <a:srgbClr val="94A3B8"/>
                 </a:solidFill>
@@ -15079,7 +15272,7 @@
           <a:p>
             <a:pPr algn="l"/>
             <a:r>
-              <a:rPr b="1" i="0" sz="1050">
+              <a:rPr sz="1050" b="1" i="0">
                 <a:solidFill>
                   <a:srgbClr val="0DB57C"/>
                 </a:solidFill>
@@ -15113,7 +15306,7 @@
           <a:p>
             <a:pPr algn="l"/>
             <a:r>
-              <a:rPr b="1" i="0" sz="1050">
+              <a:rPr sz="1050" b="1" i="0">
                 <a:solidFill>
                   <a:srgbClr val="F59E0B"/>
                 </a:solidFill>
@@ -15147,7 +15340,7 @@
           <a:p>
             <a:pPr algn="l"/>
             <a:r>
-              <a:rPr b="0" i="0" sz="1050">
+              <a:rPr sz="1050" b="0" i="0">
                 <a:solidFill>
                   <a:srgbClr val="F8FAFC"/>
                 </a:solidFill>
@@ -15181,7 +15374,7 @@
           <a:p>
             <a:pPr algn="l"/>
             <a:r>
-              <a:rPr b="0" i="0" sz="1050">
+              <a:rPr sz="1050" b="0" i="0">
                 <a:solidFill>
                   <a:srgbClr val="94A3B8"/>
                 </a:solidFill>
@@ -15215,7 +15408,7 @@
           <a:p>
             <a:pPr algn="l"/>
             <a:r>
-              <a:rPr b="1" i="0" sz="1050">
+              <a:rPr sz="1050" b="1" i="0">
                 <a:solidFill>
                   <a:srgbClr val="0DB57C"/>
                 </a:solidFill>
@@ -15249,7 +15442,7 @@
           <a:p>
             <a:pPr algn="l"/>
             <a:r>
-              <a:rPr b="1" i="0" sz="1050">
+              <a:rPr sz="1050" b="1" i="0">
                 <a:solidFill>
                   <a:srgbClr val="F59E0B"/>
                 </a:solidFill>
@@ -15283,7 +15476,7 @@
           <a:p>
             <a:pPr algn="l"/>
             <a:r>
-              <a:rPr b="0" i="0" sz="1050">
+              <a:rPr sz="1050" b="0" i="0">
                 <a:solidFill>
                   <a:srgbClr val="F8FAFC"/>
                 </a:solidFill>
@@ -15317,7 +15510,7 @@
           <a:p>
             <a:pPr algn="l"/>
             <a:r>
-              <a:rPr b="0" i="0" sz="1050">
+              <a:rPr sz="1050" b="0" i="0">
                 <a:solidFill>
                   <a:srgbClr val="94A3B8"/>
                 </a:solidFill>
@@ -15351,7 +15544,7 @@
           <a:p>
             <a:pPr algn="l"/>
             <a:r>
-              <a:rPr b="1" i="0" sz="1050">
+              <a:rPr sz="1050" b="1" i="0">
                 <a:solidFill>
                   <a:srgbClr val="0DB57C"/>
                 </a:solidFill>
@@ -15385,7 +15578,7 @@
           <a:p>
             <a:pPr algn="l"/>
             <a:r>
-              <a:rPr b="1" i="0" sz="1050">
+              <a:rPr sz="1050" b="1" i="0">
                 <a:solidFill>
                   <a:srgbClr val="F59E0B"/>
                 </a:solidFill>
@@ -15400,16 +15593,12 @@
   <p:clrMapOvr>
     <a:masterClrMapping/>
   </p:clrMapOvr>
-  <p:transition xmlns:p14="http://schemas.microsoft.com/office/powerpoint/2010/main" spd="med" advTm="0">
-    <p14:transition inverted="0">
-      <p14:morph option="byObject"/>
-    </p14:transition>
-  </p:transition>
+  <p:transition spd="med" advTm="0"/>
 </p:sld>
 </file>
 
 <file path=ppt/slides/slide7.xml><?xml version="1.0" encoding="utf-8"?>
-<p:sld xmlns:a="http://schemas.openxmlformats.org/drawingml/2006/main" xmlns:p="http://schemas.openxmlformats.org/presentationml/2006/main" xmlns:r="http://schemas.openxmlformats.org/officeDocument/2006/relationships">
+<p:sld xmlns:a="http://schemas.openxmlformats.org/drawingml/2006/main" xmlns:r="http://schemas.openxmlformats.org/officeDocument/2006/relationships" xmlns:p="http://schemas.openxmlformats.org/presentationml/2006/main">
   <p:cSld>
     <p:bg>
       <p:bgPr>
@@ -15425,7 +15614,14 @@
         <p:cNvGrpSpPr/>
         <p:nvPr/>
       </p:nvGrpSpPr>
-      <p:grpSpPr/>
+      <p:grpSpPr>
+        <a:xfrm>
+          <a:off x="0" y="0"/>
+          <a:ext cx="0" cy="0"/>
+          <a:chOff x="0" y="0"/>
+          <a:chExt cx="0" cy="0"/>
+        </a:xfrm>
+      </p:grpSpPr>
       <p:sp>
         <p:nvSpPr>
           <p:cNvPr id="2" name="Rectangle 1"/>
@@ -15467,6 +15663,7 @@
           <a:lstStyle/>
           <a:p>
             <a:pPr algn="ctr"/>
+            <a:endParaRPr/>
           </a:p>
         </p:txBody>
       </p:sp>
@@ -15513,6 +15710,7 @@
           <a:lstStyle/>
           <a:p>
             <a:pPr algn="ctr"/>
+            <a:endParaRPr/>
           </a:p>
         </p:txBody>
       </p:sp>
@@ -15540,7 +15738,7 @@
           <a:p>
             <a:pPr algn="ctr"/>
             <a:r>
-              <a:rPr b="1" i="0" sz="900">
+              <a:rPr sz="900" b="1" i="0">
                 <a:solidFill>
                   <a:srgbClr val="F8FAFC"/>
                 </a:solidFill>
@@ -15574,7 +15772,7 @@
           <a:p>
             <a:pPr algn="l"/>
             <a:r>
-              <a:rPr b="1" i="0" sz="2800">
+              <a:rPr sz="2800" b="1" i="0">
                 <a:solidFill>
                   <a:srgbClr val="F8FAFC"/>
                 </a:solidFill>
@@ -15625,6 +15823,7 @@
           <a:lstStyle/>
           <a:p>
             <a:pPr algn="ctr"/>
+            <a:endParaRPr/>
           </a:p>
         </p:txBody>
       </p:sp>
@@ -15673,6 +15872,7 @@
           <a:lstStyle/>
           <a:p>
             <a:pPr algn="ctr"/>
+            <a:endParaRPr/>
           </a:p>
         </p:txBody>
       </p:sp>
@@ -15717,6 +15917,7 @@
           <a:lstStyle/>
           <a:p>
             <a:pPr algn="ctr"/>
+            <a:endParaRPr/>
           </a:p>
         </p:txBody>
       </p:sp>
@@ -15744,7 +15945,7 @@
           <a:p>
             <a:pPr algn="ctr"/>
             <a:r>
-              <a:rPr b="1" i="0" sz="1150">
+              <a:rPr sz="1150" b="1" i="0">
                 <a:solidFill>
                   <a:srgbClr val="387EF5"/>
                 </a:solidFill>
@@ -15779,7 +15980,7 @@
           <a:p>
             <a:pPr algn="ctr"/>
             <a:r>
-              <a:rPr b="0" i="0" sz="1000">
+              <a:rPr sz="1000" b="0" i="0">
                 <a:solidFill>
                   <a:srgbClr val="94A3B8"/>
                 </a:solidFill>
@@ -15798,8 +15999,8 @@
         </p:nvCxnSpPr>
         <p:spPr>
           <a:xfrm>
-            <a:off x="1993392" y="3726180.0"/>
-            <a:ext cx="182880" cy="0.0"/>
+            <a:off x="1993392" y="0"/>
+            <a:ext cx="182880" cy="0"/>
           </a:xfrm>
           <a:prstGeom prst="line">
             <a:avLst/>
@@ -15833,8 +16034,8 @@
         </p:nvCxnSpPr>
         <p:spPr>
           <a:xfrm flipH="1" flipV="1">
-            <a:off x="2066544" y="3660343.2"/>
-            <a:ext cx="109728" cy="65836.79999999981"/>
+            <a:off x="2066544" y="0"/>
+            <a:ext cx="109728" cy="0"/>
           </a:xfrm>
           <a:prstGeom prst="line">
             <a:avLst/>
@@ -15868,8 +16069,8 @@
         </p:nvCxnSpPr>
         <p:spPr>
           <a:xfrm flipH="1">
-            <a:off x="2066544" y="3726180.0"/>
-            <a:ext cx="109728" cy="65836.79999999981"/>
+            <a:off x="2066544" y="0"/>
+            <a:ext cx="109728" cy="0"/>
           </a:xfrm>
           <a:prstGeom prst="line">
             <a:avLst/>
@@ -15940,6 +16141,7 @@
           <a:lstStyle/>
           <a:p>
             <a:pPr algn="ctr"/>
+            <a:endParaRPr/>
           </a:p>
         </p:txBody>
       </p:sp>
@@ -15984,6 +16186,7 @@
           <a:lstStyle/>
           <a:p>
             <a:pPr algn="ctr"/>
+            <a:endParaRPr/>
           </a:p>
         </p:txBody>
       </p:sp>
@@ -16011,7 +16214,7 @@
           <a:p>
             <a:pPr algn="ctr"/>
             <a:r>
-              <a:rPr b="1" i="0" sz="1150">
+              <a:rPr sz="1150" b="1" i="0">
                 <a:solidFill>
                   <a:srgbClr val="F59E0B"/>
                 </a:solidFill>
@@ -16046,7 +16249,7 @@
           <a:p>
             <a:pPr algn="ctr"/>
             <a:r>
-              <a:rPr b="0" i="0" sz="1000">
+              <a:rPr sz="1000" b="0" i="0">
                 <a:solidFill>
                   <a:srgbClr val="94A3B8"/>
                 </a:solidFill>
@@ -16065,8 +16268,8 @@
         </p:nvCxnSpPr>
         <p:spPr>
           <a:xfrm>
-            <a:off x="3822192" y="3726180.0"/>
-            <a:ext cx="182880" cy="0.0"/>
+            <a:off x="3822192" y="0"/>
+            <a:ext cx="182880" cy="0"/>
           </a:xfrm>
           <a:prstGeom prst="line">
             <a:avLst/>
@@ -16100,8 +16303,8 @@
         </p:nvCxnSpPr>
         <p:spPr>
           <a:xfrm flipH="1" flipV="1">
-            <a:off x="3895344" y="3660343.2"/>
-            <a:ext cx="109728" cy="65836.79999999981"/>
+            <a:off x="3895344" y="0"/>
+            <a:ext cx="109728" cy="0"/>
           </a:xfrm>
           <a:prstGeom prst="line">
             <a:avLst/>
@@ -16135,8 +16338,8 @@
         </p:nvCxnSpPr>
         <p:spPr>
           <a:xfrm flipH="1">
-            <a:off x="3895344" y="3726180.0"/>
-            <a:ext cx="109728" cy="65836.79999999981"/>
+            <a:off x="3895344" y="0"/>
+            <a:ext cx="109728" cy="0"/>
           </a:xfrm>
           <a:prstGeom prst="line">
             <a:avLst/>
@@ -16207,6 +16410,7 @@
           <a:lstStyle/>
           <a:p>
             <a:pPr algn="ctr"/>
+            <a:endParaRPr/>
           </a:p>
         </p:txBody>
       </p:sp>
@@ -16251,6 +16455,7 @@
           <a:lstStyle/>
           <a:p>
             <a:pPr algn="ctr"/>
+            <a:endParaRPr/>
           </a:p>
         </p:txBody>
       </p:sp>
@@ -16278,7 +16483,7 @@
           <a:p>
             <a:pPr algn="ctr"/>
             <a:r>
-              <a:rPr b="1" i="0" sz="1150">
+              <a:rPr sz="1150" b="1" i="0">
                 <a:solidFill>
                   <a:srgbClr val="8B5CF6"/>
                 </a:solidFill>
@@ -16313,7 +16518,7 @@
           <a:p>
             <a:pPr algn="ctr"/>
             <a:r>
-              <a:rPr b="0" i="0" sz="1000">
+              <a:rPr sz="1000" b="0" i="0">
                 <a:solidFill>
                   <a:srgbClr val="94A3B8"/>
                 </a:solidFill>
@@ -16332,8 +16537,8 @@
         </p:nvCxnSpPr>
         <p:spPr>
           <a:xfrm>
-            <a:off x="5650992" y="3726180.0"/>
-            <a:ext cx="182880" cy="0.0"/>
+            <a:off x="5650992" y="0"/>
+            <a:ext cx="182880" cy="0"/>
           </a:xfrm>
           <a:prstGeom prst="line">
             <a:avLst/>
@@ -16367,8 +16572,8 @@
         </p:nvCxnSpPr>
         <p:spPr>
           <a:xfrm flipH="1" flipV="1">
-            <a:off x="5724144" y="3660343.2"/>
-            <a:ext cx="109728" cy="65836.79999999981"/>
+            <a:off x="5724144" y="0"/>
+            <a:ext cx="109728" cy="0"/>
           </a:xfrm>
           <a:prstGeom prst="line">
             <a:avLst/>
@@ -16402,8 +16607,8 @@
         </p:nvCxnSpPr>
         <p:spPr>
           <a:xfrm flipH="1">
-            <a:off x="5724144" y="3726180.0"/>
-            <a:ext cx="109728" cy="65836.79999999981"/>
+            <a:off x="5724144" y="0"/>
+            <a:ext cx="109728" cy="0"/>
           </a:xfrm>
           <a:prstGeom prst="line">
             <a:avLst/>
@@ -16474,6 +16679,7 @@
           <a:lstStyle/>
           <a:p>
             <a:pPr algn="ctr"/>
+            <a:endParaRPr/>
           </a:p>
         </p:txBody>
       </p:sp>
@@ -16518,6 +16724,7 @@
           <a:lstStyle/>
           <a:p>
             <a:pPr algn="ctr"/>
+            <a:endParaRPr/>
           </a:p>
         </p:txBody>
       </p:sp>
@@ -16545,7 +16752,7 @@
           <a:p>
             <a:pPr algn="ctr"/>
             <a:r>
-              <a:rPr b="1" i="0" sz="1150">
+              <a:rPr sz="1150" b="1" i="0">
                 <a:solidFill>
                   <a:srgbClr val="0DB57C"/>
                 </a:solidFill>
@@ -16580,7 +16787,7 @@
           <a:p>
             <a:pPr algn="ctr"/>
             <a:r>
-              <a:rPr b="0" i="0" sz="1000">
+              <a:rPr sz="1000" b="0" i="0">
                 <a:solidFill>
                   <a:srgbClr val="94A3B8"/>
                 </a:solidFill>
@@ -16599,8 +16806,8 @@
         </p:nvCxnSpPr>
         <p:spPr>
           <a:xfrm>
-            <a:off x="7479792" y="3726180.0"/>
-            <a:ext cx="182880" cy="0.0"/>
+            <a:off x="7479792" y="0"/>
+            <a:ext cx="182880" cy="0"/>
           </a:xfrm>
           <a:prstGeom prst="line">
             <a:avLst/>
@@ -16634,8 +16841,8 @@
         </p:nvCxnSpPr>
         <p:spPr>
           <a:xfrm flipH="1" flipV="1">
-            <a:off x="7552944" y="3660343.2"/>
-            <a:ext cx="109728" cy="65836.79999999981"/>
+            <a:off x="7552944" y="0"/>
+            <a:ext cx="109728" cy="0"/>
           </a:xfrm>
           <a:prstGeom prst="line">
             <a:avLst/>
@@ -16669,8 +16876,8 @@
         </p:nvCxnSpPr>
         <p:spPr>
           <a:xfrm flipH="1">
-            <a:off x="7552944" y="3726180.0"/>
-            <a:ext cx="109728" cy="65836.79999999981"/>
+            <a:off x="7552944" y="0"/>
+            <a:ext cx="109728" cy="0"/>
           </a:xfrm>
           <a:prstGeom prst="line">
             <a:avLst/>
@@ -16741,6 +16948,7 @@
           <a:lstStyle/>
           <a:p>
             <a:pPr algn="ctr"/>
+            <a:endParaRPr/>
           </a:p>
         </p:txBody>
       </p:sp>
@@ -16785,6 +16993,7 @@
           <a:lstStyle/>
           <a:p>
             <a:pPr algn="ctr"/>
+            <a:endParaRPr/>
           </a:p>
         </p:txBody>
       </p:sp>
@@ -16812,7 +17021,7 @@
           <a:p>
             <a:pPr algn="ctr"/>
             <a:r>
-              <a:rPr b="1" i="0" sz="1150">
+              <a:rPr sz="1150" b="1" i="0">
                 <a:solidFill>
                   <a:srgbClr val="F59E0B"/>
                 </a:solidFill>
@@ -16847,7 +17056,7 @@
           <a:p>
             <a:pPr algn="ctr"/>
             <a:r>
-              <a:rPr b="0" i="0" sz="1000">
+              <a:rPr sz="1000" b="0" i="0">
                 <a:solidFill>
                   <a:srgbClr val="94A3B8"/>
                 </a:solidFill>
@@ -16866,8 +17075,8 @@
         </p:nvCxnSpPr>
         <p:spPr>
           <a:xfrm>
-            <a:off x="9308592" y="3726180.0"/>
-            <a:ext cx="182880" cy="0.0"/>
+            <a:off x="9308592" y="0"/>
+            <a:ext cx="182880" cy="0"/>
           </a:xfrm>
           <a:prstGeom prst="line">
             <a:avLst/>
@@ -16901,8 +17110,8 @@
         </p:nvCxnSpPr>
         <p:spPr>
           <a:xfrm flipH="1" flipV="1">
-            <a:off x="9381744" y="3660343.2"/>
-            <a:ext cx="109728" cy="65836.79999999981"/>
+            <a:off x="9381744" y="0"/>
+            <a:ext cx="109728" cy="0"/>
           </a:xfrm>
           <a:prstGeom prst="line">
             <a:avLst/>
@@ -16936,8 +17145,8 @@
         </p:nvCxnSpPr>
         <p:spPr>
           <a:xfrm flipH="1">
-            <a:off x="9381744" y="3726180.0"/>
-            <a:ext cx="109728" cy="65836.79999999981"/>
+            <a:off x="9381744" y="0"/>
+            <a:ext cx="109728" cy="0"/>
           </a:xfrm>
           <a:prstGeom prst="line">
             <a:avLst/>
@@ -17008,6 +17217,7 @@
           <a:lstStyle/>
           <a:p>
             <a:pPr algn="ctr"/>
+            <a:endParaRPr/>
           </a:p>
         </p:txBody>
       </p:sp>
@@ -17052,6 +17262,7 @@
           <a:lstStyle/>
           <a:p>
             <a:pPr algn="ctr"/>
+            <a:endParaRPr/>
           </a:p>
         </p:txBody>
       </p:sp>
@@ -17079,7 +17290,7 @@
           <a:p>
             <a:pPr algn="ctr"/>
             <a:r>
-              <a:rPr b="1" i="0" sz="1150">
+              <a:rPr sz="1150" b="1" i="0">
                 <a:solidFill>
                   <a:srgbClr val="0DB57C"/>
                 </a:solidFill>
@@ -17114,7 +17325,7 @@
           <a:p>
             <a:pPr algn="ctr"/>
             <a:r>
-              <a:rPr b="0" i="0" sz="1000">
+              <a:rPr sz="1000" b="0" i="0">
                 <a:solidFill>
                   <a:srgbClr val="94A3B8"/>
                 </a:solidFill>
@@ -17170,6 +17381,7 @@
           <a:lstStyle/>
           <a:p>
             <a:pPr algn="ctr"/>
+            <a:endParaRPr/>
           </a:p>
         </p:txBody>
       </p:sp>
@@ -17197,7 +17409,7 @@
           <a:p>
             <a:pPr algn="l"/>
             <a:r>
-              <a:rPr b="0" i="0" sz="1050">
+              <a:rPr sz="1050" b="0" i="0">
                 <a:solidFill>
                   <a:srgbClr val="F8FAFC"/>
                 </a:solidFill>
@@ -17253,6 +17465,7 @@
           <a:lstStyle/>
           <a:p>
             <a:pPr algn="ctr"/>
+            <a:endParaRPr/>
           </a:p>
         </p:txBody>
       </p:sp>
@@ -17280,7 +17493,7 @@
           <a:p>
             <a:pPr algn="l"/>
             <a:r>
-              <a:rPr b="0" i="0" sz="1050">
+              <a:rPr sz="1050" b="0" i="0">
                 <a:solidFill>
                   <a:srgbClr val="F8FAFC"/>
                 </a:solidFill>
@@ -17336,6 +17549,7 @@
           <a:lstStyle/>
           <a:p>
             <a:pPr algn="ctr"/>
+            <a:endParaRPr/>
           </a:p>
         </p:txBody>
       </p:sp>
@@ -17363,7 +17577,7 @@
           <a:p>
             <a:pPr algn="l"/>
             <a:r>
-              <a:rPr b="0" i="0" sz="1050">
+              <a:rPr sz="1050" b="0" i="0">
                 <a:solidFill>
                   <a:srgbClr val="F8FAFC"/>
                 </a:solidFill>
@@ -17379,16 +17593,12 @@
   <p:clrMapOvr>
     <a:masterClrMapping/>
   </p:clrMapOvr>
-  <p:transition xmlns:p14="http://schemas.microsoft.com/office/powerpoint/2010/main" spd="med" advTm="0">
-    <p14:transition inverted="0">
-      <p14:morph option="byObject"/>
-    </p14:transition>
-  </p:transition>
+  <p:transition spd="med" advTm="0"/>
 </p:sld>
 </file>
 
 <file path=ppt/slides/slide8.xml><?xml version="1.0" encoding="utf-8"?>
-<p:sld xmlns:a="http://schemas.openxmlformats.org/drawingml/2006/main" xmlns:p="http://schemas.openxmlformats.org/presentationml/2006/main" xmlns:r="http://schemas.openxmlformats.org/officeDocument/2006/relationships">
+<p:sld xmlns:a="http://schemas.openxmlformats.org/drawingml/2006/main" xmlns:r="http://schemas.openxmlformats.org/officeDocument/2006/relationships" xmlns:p="http://schemas.openxmlformats.org/presentationml/2006/main">
   <p:cSld>
     <p:bg>
       <p:bgPr>
@@ -17404,7 +17614,14 @@
         <p:cNvGrpSpPr/>
         <p:nvPr/>
       </p:nvGrpSpPr>
-      <p:grpSpPr/>
+      <p:grpSpPr>
+        <a:xfrm>
+          <a:off x="0" y="0"/>
+          <a:ext cx="0" cy="0"/>
+          <a:chOff x="0" y="0"/>
+          <a:chExt cx="0" cy="0"/>
+        </a:xfrm>
+      </p:grpSpPr>
       <p:sp>
         <p:nvSpPr>
           <p:cNvPr id="2" name="Rectangle 1"/>
@@ -17446,6 +17663,7 @@
           <a:lstStyle/>
           <a:p>
             <a:pPr algn="ctr"/>
+            <a:endParaRPr/>
           </a:p>
         </p:txBody>
       </p:sp>
@@ -17492,6 +17710,7 @@
           <a:lstStyle/>
           <a:p>
             <a:pPr algn="ctr"/>
+            <a:endParaRPr/>
           </a:p>
         </p:txBody>
       </p:sp>
@@ -17519,7 +17738,7 @@
           <a:p>
             <a:pPr algn="ctr"/>
             <a:r>
-              <a:rPr b="1" i="0" sz="900">
+              <a:rPr sz="900" b="1" i="0">
                 <a:solidFill>
                   <a:srgbClr val="F8FAFC"/>
                 </a:solidFill>
@@ -17553,7 +17772,7 @@
           <a:p>
             <a:pPr algn="l"/>
             <a:r>
-              <a:rPr b="1" i="0" sz="2800">
+              <a:rPr sz="2800" b="1" i="0">
                 <a:solidFill>
                   <a:srgbClr val="F8FAFC"/>
                 </a:solidFill>
@@ -17604,6 +17823,7 @@
           <a:lstStyle/>
           <a:p>
             <a:pPr algn="ctr"/>
+            <a:endParaRPr/>
           </a:p>
         </p:txBody>
       </p:sp>
@@ -17652,6 +17872,7 @@
           <a:lstStyle/>
           <a:p>
             <a:pPr algn="ctr"/>
+            <a:endParaRPr/>
           </a:p>
         </p:txBody>
       </p:sp>
@@ -17679,7 +17900,7 @@
           <a:p>
             <a:pPr algn="l"/>
             <a:r>
-              <a:rPr b="1" i="0" sz="900">
+              <a:rPr sz="900" b="1" i="0">
                 <a:solidFill>
                   <a:srgbClr val="94A3B8"/>
                 </a:solidFill>
@@ -17713,7 +17934,7 @@
           <a:p>
             <a:pPr algn="l"/>
             <a:r>
-              <a:rPr b="0" i="0" sz="1200">
+              <a:rPr sz="1200" b="0" i="0">
                 <a:solidFill>
                   <a:srgbClr val="8B5CF6"/>
                 </a:solidFill>
@@ -17750,7 +17971,7 @@
           <a:p>
             <a:pPr algn="l"/>
             <a:r>
-              <a:rPr b="0" i="1" sz="1000">
+              <a:rPr sz="1000" b="0" i="1">
                 <a:solidFill>
                   <a:srgbClr val="94A3B8"/>
                 </a:solidFill>
@@ -17784,7 +18005,7 @@
           <a:p>
             <a:pPr algn="l"/>
             <a:r>
-              <a:rPr b="1" i="0" sz="1100">
+              <a:rPr sz="1100" b="1" i="0">
                 <a:solidFill>
                   <a:srgbClr val="F8FAFC"/>
                 </a:solidFill>
@@ -17837,6 +18058,7 @@
           <a:lstStyle/>
           <a:p>
             <a:pPr algn="ctr"/>
+            <a:endParaRPr/>
           </a:p>
         </p:txBody>
       </p:sp>
@@ -17864,7 +18086,7 @@
           <a:p>
             <a:pPr algn="l"/>
             <a:r>
-              <a:rPr b="0" i="0" sz="1100">
+              <a:rPr sz="1100" b="0" i="0">
                 <a:solidFill>
                   <a:srgbClr val="F8FAFC"/>
                 </a:solidFill>
@@ -17917,6 +18139,7 @@
           <a:lstStyle/>
           <a:p>
             <a:pPr algn="ctr"/>
+            <a:endParaRPr/>
           </a:p>
         </p:txBody>
       </p:sp>
@@ -17944,7 +18167,7 @@
           <a:p>
             <a:pPr algn="l"/>
             <a:r>
-              <a:rPr b="0" i="0" sz="1100">
+              <a:rPr sz="1100" b="0" i="0">
                 <a:solidFill>
                   <a:srgbClr val="F8FAFC"/>
                 </a:solidFill>
@@ -17997,6 +18220,7 @@
           <a:lstStyle/>
           <a:p>
             <a:pPr algn="ctr"/>
+            <a:endParaRPr/>
           </a:p>
         </p:txBody>
       </p:sp>
@@ -18024,7 +18248,7 @@
           <a:p>
             <a:pPr algn="l"/>
             <a:r>
-              <a:rPr b="0" i="0" sz="1100">
+              <a:rPr sz="1100" b="0" i="0">
                 <a:solidFill>
                   <a:srgbClr val="F8FAFC"/>
                 </a:solidFill>
@@ -18079,6 +18303,7 @@
           <a:lstStyle/>
           <a:p>
             <a:pPr algn="ctr"/>
+            <a:endParaRPr/>
           </a:p>
         </p:txBody>
       </p:sp>
@@ -18106,7 +18331,7 @@
           <a:p>
             <a:pPr algn="l"/>
             <a:r>
-              <a:rPr b="1" i="0" sz="900">
+              <a:rPr sz="900" b="1" i="0">
                 <a:solidFill>
                   <a:srgbClr val="94A3B8"/>
                 </a:solidFill>
@@ -18140,7 +18365,7 @@
           <a:p>
             <a:pPr algn="l"/>
             <a:r>
-              <a:rPr b="1" i="0" sz="1800">
+              <a:rPr sz="1800" b="1" i="0">
                 <a:solidFill>
                   <a:srgbClr val="8B5CF6"/>
                 </a:solidFill>
@@ -18175,7 +18400,7 @@
           <a:p>
             <a:pPr algn="l"/>
             <a:r>
-              <a:rPr b="0" i="0" sz="1100">
+              <a:rPr sz="1100" b="0" i="0">
                 <a:solidFill>
                   <a:srgbClr val="94A3B8"/>
                 </a:solidFill>
@@ -18213,7 +18438,7 @@
           <a:p>
             <a:pPr algn="l"/>
             <a:r>
-              <a:rPr b="1" i="0" sz="1100">
+              <a:rPr sz="1100" b="1" i="0">
                 <a:solidFill>
                   <a:srgbClr val="F59E0B"/>
                 </a:solidFill>
@@ -18247,7 +18472,7 @@
           <a:p>
             <a:pPr algn="l"/>
             <a:r>
-              <a:rPr b="0" i="0" sz="1050">
+              <a:rPr sz="1050" b="0" i="0">
                 <a:solidFill>
                   <a:srgbClr val="94A3B8"/>
                 </a:solidFill>
@@ -18263,16 +18488,12 @@
   <p:clrMapOvr>
     <a:masterClrMapping/>
   </p:clrMapOvr>
-  <p:transition xmlns:p14="http://schemas.microsoft.com/office/powerpoint/2010/main" spd="med" advTm="0">
-    <p14:transition inverted="0">
-      <p14:morph option="byObject"/>
-    </p14:transition>
-  </p:transition>
+  <p:transition spd="med" advTm="0"/>
 </p:sld>
 </file>
 
 <file path=ppt/slides/slide9.xml><?xml version="1.0" encoding="utf-8"?>
-<p:sld xmlns:a="http://schemas.openxmlformats.org/drawingml/2006/main" xmlns:p="http://schemas.openxmlformats.org/presentationml/2006/main" xmlns:r="http://schemas.openxmlformats.org/officeDocument/2006/relationships">
+<p:sld xmlns:a="http://schemas.openxmlformats.org/drawingml/2006/main" xmlns:r="http://schemas.openxmlformats.org/officeDocument/2006/relationships" xmlns:p="http://schemas.openxmlformats.org/presentationml/2006/main">
   <p:cSld>
     <p:bg>
       <p:bgPr>
@@ -18288,7 +18509,14 @@
         <p:cNvGrpSpPr/>
         <p:nvPr/>
       </p:nvGrpSpPr>
-      <p:grpSpPr/>
+      <p:grpSpPr>
+        <a:xfrm>
+          <a:off x="0" y="0"/>
+          <a:ext cx="0" cy="0"/>
+          <a:chOff x="0" y="0"/>
+          <a:chExt cx="0" cy="0"/>
+        </a:xfrm>
+      </p:grpSpPr>
       <p:sp>
         <p:nvSpPr>
           <p:cNvPr id="2" name="Rectangle 1"/>
@@ -18330,6 +18558,7 @@
           <a:lstStyle/>
           <a:p>
             <a:pPr algn="ctr"/>
+            <a:endParaRPr/>
           </a:p>
         </p:txBody>
       </p:sp>
@@ -18376,6 +18605,7 @@
           <a:lstStyle/>
           <a:p>
             <a:pPr algn="ctr"/>
+            <a:endParaRPr/>
           </a:p>
         </p:txBody>
       </p:sp>
@@ -18403,7 +18633,7 @@
           <a:p>
             <a:pPr algn="ctr"/>
             <a:r>
-              <a:rPr b="1" i="0" sz="900">
+              <a:rPr sz="900" b="1" i="0">
                 <a:solidFill>
                   <a:srgbClr val="F8FAFC"/>
                 </a:solidFill>
@@ -18437,7 +18667,7 @@
           <a:p>
             <a:pPr algn="l"/>
             <a:r>
-              <a:rPr b="1" i="0" sz="2800">
+              <a:rPr sz="2800" b="1" i="0">
                 <a:solidFill>
                   <a:srgbClr val="F8FAFC"/>
                 </a:solidFill>
@@ -18488,6 +18718,7 @@
           <a:lstStyle/>
           <a:p>
             <a:pPr algn="ctr"/>
+            <a:endParaRPr/>
           </a:p>
         </p:txBody>
       </p:sp>
@@ -18536,6 +18767,7 @@
           <a:lstStyle/>
           <a:p>
             <a:pPr algn="ctr"/>
+            <a:endParaRPr/>
           </a:p>
         </p:txBody>
       </p:sp>
@@ -18563,7 +18795,7 @@
           <a:p>
             <a:pPr algn="ctr"/>
             <a:r>
-              <a:rPr b="1" i="0" sz="5200">
+              <a:rPr sz="5200" b="1" i="0">
                 <a:solidFill>
                   <a:srgbClr val="0DB57C"/>
                 </a:solidFill>
@@ -18597,7 +18829,7 @@
           <a:p>
             <a:pPr algn="ctr"/>
             <a:r>
-              <a:rPr b="0" i="0" sz="1000">
+              <a:rPr sz="1000" b="0" i="0">
                 <a:solidFill>
                   <a:srgbClr val="94A3B8"/>
                 </a:solidFill>
@@ -18653,6 +18885,7 @@
           <a:lstStyle/>
           <a:p>
             <a:pPr algn="ctr"/>
+            <a:endParaRPr/>
           </a:p>
         </p:txBody>
       </p:sp>
@@ -18680,7 +18913,7 @@
           <a:p>
             <a:pPr algn="ctr"/>
             <a:r>
-              <a:rPr b="1" i="0" sz="5200">
+              <a:rPr sz="5200" b="1" i="0">
                 <a:solidFill>
                   <a:srgbClr val="387EF5"/>
                 </a:solidFill>
@@ -18714,7 +18947,7 @@
           <a:p>
             <a:pPr algn="ctr"/>
             <a:r>
-              <a:rPr b="0" i="0" sz="1000">
+              <a:rPr sz="1000" b="0" i="0">
                 <a:solidFill>
                   <a:srgbClr val="94A3B8"/>
                 </a:solidFill>
@@ -18770,6 +19003,7 @@
           <a:lstStyle/>
           <a:p>
             <a:pPr algn="ctr"/>
+            <a:endParaRPr/>
           </a:p>
         </p:txBody>
       </p:sp>
@@ -18797,7 +19031,7 @@
           <a:p>
             <a:pPr algn="ctr"/>
             <a:r>
-              <a:rPr b="1" i="0" sz="5200">
+              <a:rPr sz="5200" b="1" i="0">
                 <a:solidFill>
                   <a:srgbClr val="F59E0B"/>
                 </a:solidFill>
@@ -18831,7 +19065,7 @@
           <a:p>
             <a:pPr algn="ctr"/>
             <a:r>
-              <a:rPr b="0" i="0" sz="1000">
+              <a:rPr sz="1000" b="0" i="0">
                 <a:solidFill>
                   <a:srgbClr val="94A3B8"/>
                 </a:solidFill>
@@ -18887,6 +19121,7 @@
           <a:lstStyle/>
           <a:p>
             <a:pPr algn="ctr"/>
+            <a:endParaRPr/>
           </a:p>
         </p:txBody>
       </p:sp>
@@ -18914,7 +19149,7 @@
           <a:p>
             <a:pPr algn="ctr"/>
             <a:r>
-              <a:rPr b="1" i="0" sz="5200">
+              <a:rPr sz="5200" b="1" i="0">
                 <a:solidFill>
                   <a:srgbClr val="8B5CF6"/>
                 </a:solidFill>
@@ -18948,7 +19183,7 @@
           <a:p>
             <a:pPr algn="ctr"/>
             <a:r>
-              <a:rPr b="0" i="0" sz="1000">
+              <a:rPr sz="1000" b="0" i="0">
                 <a:solidFill>
                   <a:srgbClr val="94A3B8"/>
                 </a:solidFill>
@@ -19004,6 +19239,7 @@
           <a:lstStyle/>
           <a:p>
             <a:pPr algn="ctr"/>
+            <a:endParaRPr/>
           </a:p>
         </p:txBody>
       </p:sp>
@@ -19031,7 +19267,7 @@
           <a:p>
             <a:pPr algn="l"/>
             <a:r>
-              <a:rPr b="1" i="0" sz="900">
+              <a:rPr sz="900" b="1" i="0">
                 <a:solidFill>
                   <a:srgbClr val="94A3B8"/>
                 </a:solidFill>
@@ -19065,7 +19301,7 @@
           <a:p>
             <a:pPr algn="l"/>
             <a:r>
-              <a:rPr b="1" i="0" sz="950">
+              <a:rPr sz="950" b="1" i="0">
                 <a:solidFill>
                   <a:srgbClr val="94A3B8"/>
                 </a:solidFill>
@@ -19099,7 +19335,7 @@
           <a:p>
             <a:pPr algn="l"/>
             <a:r>
-              <a:rPr b="1" i="0" sz="950">
+              <a:rPr sz="950" b="1" i="0">
                 <a:solidFill>
                   <a:srgbClr val="F43F5E"/>
                 </a:solidFill>
@@ -19133,7 +19369,7 @@
           <a:p>
             <a:pPr algn="l"/>
             <a:r>
-              <a:rPr b="1" i="0" sz="950">
+              <a:rPr sz="950" b="1" i="0">
                 <a:solidFill>
                   <a:srgbClr val="0DB57C"/>
                 </a:solidFill>
@@ -19167,7 +19403,7 @@
           <a:p>
             <a:pPr algn="l"/>
             <a:r>
-              <a:rPr b="1" i="0" sz="950">
+              <a:rPr sz="950" b="1" i="0">
                 <a:solidFill>
                   <a:srgbClr val="F59E0B"/>
                 </a:solidFill>
@@ -19218,6 +19454,7 @@
           <a:lstStyle/>
           <a:p>
             <a:pPr algn="ctr"/>
+            <a:endParaRPr/>
           </a:p>
         </p:txBody>
       </p:sp>
@@ -19245,7 +19482,7 @@
           <a:p>
             <a:pPr algn="l"/>
             <a:r>
-              <a:rPr b="1" i="0" sz="1050">
+              <a:rPr sz="1050" b="1" i="0">
                 <a:solidFill>
                   <a:srgbClr val="F8FAFC"/>
                 </a:solidFill>
@@ -19279,7 +19516,7 @@
           <a:p>
             <a:pPr algn="l"/>
             <a:r>
-              <a:rPr b="0" i="0" sz="1050">
+              <a:rPr sz="1050" b="0" i="0">
                 <a:solidFill>
                   <a:srgbClr val="F43F5E"/>
                 </a:solidFill>
@@ -19313,7 +19550,7 @@
           <a:p>
             <a:pPr algn="l"/>
             <a:r>
-              <a:rPr b="0" i="0" sz="1050">
+              <a:rPr sz="1050" b="0" i="0">
                 <a:solidFill>
                   <a:srgbClr val="0DB57C"/>
                 </a:solidFill>
@@ -19347,7 +19584,7 @@
           <a:p>
             <a:pPr algn="l"/>
             <a:r>
-              <a:rPr b="1" i="0" sz="1050">
+              <a:rPr sz="1050" b="1" i="0">
                 <a:solidFill>
                   <a:srgbClr val="F59E0B"/>
                 </a:solidFill>
@@ -19381,7 +19618,7 @@
           <a:p>
             <a:pPr algn="l"/>
             <a:r>
-              <a:rPr b="1" i="0" sz="1050">
+              <a:rPr sz="1050" b="1" i="0">
                 <a:solidFill>
                   <a:srgbClr val="F8FAFC"/>
                 </a:solidFill>
@@ -19415,7 +19652,7 @@
           <a:p>
             <a:pPr algn="l"/>
             <a:r>
-              <a:rPr b="0" i="0" sz="1050">
+              <a:rPr sz="1050" b="0" i="0">
                 <a:solidFill>
                   <a:srgbClr val="F43F5E"/>
                 </a:solidFill>
@@ -19449,7 +19686,7 @@
           <a:p>
             <a:pPr algn="l"/>
             <a:r>
-              <a:rPr b="0" i="0" sz="1050">
+              <a:rPr sz="1050" b="0" i="0">
                 <a:solidFill>
                   <a:srgbClr val="0DB57C"/>
                 </a:solidFill>
@@ -19483,7 +19720,7 @@
           <a:p>
             <a:pPr algn="l"/>
             <a:r>
-              <a:rPr b="1" i="0" sz="1050">
+              <a:rPr sz="1050" b="1" i="0">
                 <a:solidFill>
                   <a:srgbClr val="F59E0B"/>
                 </a:solidFill>
@@ -19517,7 +19754,7 @@
           <a:p>
             <a:pPr algn="l"/>
             <a:r>
-              <a:rPr b="1" i="0" sz="1050">
+              <a:rPr sz="1050" b="1" i="0">
                 <a:solidFill>
                   <a:srgbClr val="F8FAFC"/>
                 </a:solidFill>
@@ -19551,7 +19788,7 @@
           <a:p>
             <a:pPr algn="l"/>
             <a:r>
-              <a:rPr b="0" i="0" sz="1050">
+              <a:rPr sz="1050" b="0" i="0">
                 <a:solidFill>
                   <a:srgbClr val="F43F5E"/>
                 </a:solidFill>
@@ -19585,7 +19822,7 @@
           <a:p>
             <a:pPr algn="l"/>
             <a:r>
-              <a:rPr b="0" i="0" sz="1050">
+              <a:rPr sz="1050" b="0" i="0">
                 <a:solidFill>
                   <a:srgbClr val="0DB57C"/>
                 </a:solidFill>
@@ -19619,7 +19856,7 @@
           <a:p>
             <a:pPr algn="l"/>
             <a:r>
-              <a:rPr b="1" i="0" sz="1050">
+              <a:rPr sz="1050" b="1" i="0">
                 <a:solidFill>
                   <a:srgbClr val="F59E0B"/>
                 </a:solidFill>
@@ -19653,7 +19890,7 @@
           <a:p>
             <a:pPr algn="l"/>
             <a:r>
-              <a:rPr b="1" i="0" sz="1050">
+              <a:rPr sz="1050" b="1" i="0">
                 <a:solidFill>
                   <a:srgbClr val="F8FAFC"/>
                 </a:solidFill>
@@ -19687,7 +19924,7 @@
           <a:p>
             <a:pPr algn="l"/>
             <a:r>
-              <a:rPr b="0" i="0" sz="1050">
+              <a:rPr sz="1050" b="0" i="0">
                 <a:solidFill>
                   <a:srgbClr val="F43F5E"/>
                 </a:solidFill>
@@ -19721,7 +19958,7 @@
           <a:p>
             <a:pPr algn="l"/>
             <a:r>
-              <a:rPr b="0" i="0" sz="1050">
+              <a:rPr sz="1050" b="0" i="0">
                 <a:solidFill>
                   <a:srgbClr val="0DB57C"/>
                 </a:solidFill>
@@ -19755,7 +19992,7 @@
           <a:p>
             <a:pPr algn="l"/>
             <a:r>
-              <a:rPr b="1" i="0" sz="1050">
+              <a:rPr sz="1050" b="1" i="0">
                 <a:solidFill>
                   <a:srgbClr val="F59E0B"/>
                 </a:solidFill>
@@ -19770,18 +20007,14 @@
   <p:clrMapOvr>
     <a:masterClrMapping/>
   </p:clrMapOvr>
-  <p:transition xmlns:p14="http://schemas.microsoft.com/office/powerpoint/2010/main" spd="med" advTm="0">
-    <p14:transition inverted="0">
-      <p14:morph option="byObject"/>
-    </p14:transition>
-  </p:transition>
+  <p:transition spd="med" advTm="0"/>
 </p:sld>
 </file>
 
 <file path=ppt/theme/theme1.xml><?xml version="1.0" encoding="utf-8"?>
 <a:theme xmlns:a="http://schemas.openxmlformats.org/drawingml/2006/main" name="Office Theme">
   <a:themeElements>
-    <a:clrScheme name="Office">
+    <a:clrScheme name="Office Theme">
       <a:dk1>
         <a:sysClr val="windowText" lastClr="000000"/>
       </a:dk1>
@@ -19789,44 +20022,44 @@
         <a:sysClr val="window" lastClr="FFFFFF"/>
       </a:lt1>
       <a:dk2>
-        <a:srgbClr val="1F497D"/>
+        <a:srgbClr val="44546A"/>
       </a:dk2>
       <a:lt2>
-        <a:srgbClr val="EEECE1"/>
+        <a:srgbClr val="E7E6E6"/>
       </a:lt2>
       <a:accent1>
-        <a:srgbClr val="4F81BD"/>
+        <a:srgbClr val="4472C4"/>
       </a:accent1>
       <a:accent2>
-        <a:srgbClr val="C0504D"/>
+        <a:srgbClr val="ED7D31"/>
       </a:accent2>
       <a:accent3>
-        <a:srgbClr val="9BBB59"/>
+        <a:srgbClr val="A5A5A5"/>
       </a:accent3>
       <a:accent4>
-        <a:srgbClr val="8064A2"/>
+        <a:srgbClr val="FFC000"/>
       </a:accent4>
       <a:accent5>
-        <a:srgbClr val="4BACC6"/>
+        <a:srgbClr val="5B9BD5"/>
       </a:accent5>
       <a:accent6>
-        <a:srgbClr val="F79646"/>
+        <a:srgbClr val="70AD47"/>
       </a:accent6>
       <a:hlink>
-        <a:srgbClr val="0000FF"/>
+        <a:srgbClr val="0563C1"/>
       </a:hlink>
       <a:folHlink>
-        <a:srgbClr val="800080"/>
+        <a:srgbClr val="954F72"/>
       </a:folHlink>
     </a:clrScheme>
-    <a:fontScheme name="Office">
+    <a:fontScheme name="Office Theme">
       <a:majorFont>
-        <a:latin typeface="Calibri"/>
+        <a:latin typeface="Calibri Light" panose="020F0302020204030204"/>
         <a:ea typeface=""/>
         <a:cs typeface=""/>
-        <a:font script="Jpan" typeface="ＭＳ Ｐゴシック"/>
+        <a:font script="Jpan" typeface="游ゴシック Light"/>
         <a:font script="Hang" typeface="맑은 고딕"/>
-        <a:font script="Hans" typeface="宋体"/>
+        <a:font script="Hans" typeface="等线 Light"/>
         <a:font script="Hant" typeface="新細明體"/>
         <a:font script="Arab" typeface="Times New Roman"/>
         <a:font script="Hebr" typeface="Times New Roman"/>
@@ -19856,12 +20089,12 @@
         <a:font script="Geor" typeface="Sylfaen"/>
       </a:majorFont>
       <a:minorFont>
-        <a:latin typeface="Calibri"/>
+        <a:latin typeface="Calibri" panose="020F0502020204030204"/>
         <a:ea typeface=""/>
         <a:cs typeface=""/>
-        <a:font script="Jpan" typeface="ＭＳ Ｐゴシック"/>
+        <a:font script="Jpan" typeface="游ゴシック"/>
         <a:font script="Hang" typeface="맑은 고딕"/>
-        <a:font script="Hans" typeface="宋体"/>
+        <a:font script="Hans" typeface="等线"/>
         <a:font script="Hant" typeface="新細明體"/>
         <a:font script="Arab" typeface="Arial"/>
         <a:font script="Hebr" typeface="Arial"/>
@@ -19891,7 +20124,7 @@
         <a:font script="Geor" typeface="Sylfaen"/>
       </a:minorFont>
     </a:fontScheme>
-    <a:fmtScheme name="Office">
+    <a:fmtScheme name="Office Theme">
       <a:fillStyleLst>
         <a:solidFill>
           <a:schemeClr val="phClr"/>
@@ -19900,200 +20133,141 @@
           <a:gsLst>
             <a:gs pos="0">
               <a:schemeClr val="phClr">
-                <a:tint val="50000"/>
-                <a:satMod val="300000"/>
+                <a:lumMod val="110000"/>
+                <a:satMod val="105000"/>
+                <a:tint val="67000"/>
               </a:schemeClr>
             </a:gs>
-            <a:gs pos="35000">
+            <a:gs pos="50000">
               <a:schemeClr val="phClr">
-                <a:tint val="37000"/>
-                <a:satMod val="300000"/>
+                <a:lumMod val="105000"/>
+                <a:satMod val="103000"/>
+                <a:tint val="73000"/>
               </a:schemeClr>
             </a:gs>
             <a:gs pos="100000">
               <a:schemeClr val="phClr">
-                <a:tint val="15000"/>
-                <a:satMod val="350000"/>
+                <a:lumMod val="105000"/>
+                <a:satMod val="109000"/>
+                <a:tint val="81000"/>
               </a:schemeClr>
             </a:gs>
           </a:gsLst>
-          <a:lin ang="16200000" scaled="1"/>
+          <a:lin ang="5400000" scaled="0"/>
         </a:gradFill>
         <a:gradFill rotWithShape="1">
           <a:gsLst>
             <a:gs pos="0">
               <a:schemeClr val="phClr">
-                <a:tint val="100000"/>
+                <a:satMod val="103000"/>
+                <a:lumMod val="102000"/>
+                <a:tint val="94000"/>
+              </a:schemeClr>
+            </a:gs>
+            <a:gs pos="50000">
+              <a:schemeClr val="phClr">
+                <a:satMod val="110000"/>
+                <a:lumMod val="100000"/>
                 <a:shade val="100000"/>
-                <a:satMod val="130000"/>
               </a:schemeClr>
             </a:gs>
             <a:gs pos="100000">
               <a:schemeClr val="phClr">
-                <a:tint val="50000"/>
-                <a:shade val="100000"/>
-                <a:satMod val="350000"/>
+                <a:lumMod val="99000"/>
+                <a:satMod val="120000"/>
+                <a:shade val="78000"/>
               </a:schemeClr>
             </a:gs>
           </a:gsLst>
-          <a:lin ang="16200000" scaled="0"/>
+          <a:lin ang="5400000" scaled="0"/>
         </a:gradFill>
       </a:fillStyleLst>
       <a:lnStyleLst>
-        <a:ln w="9525" cap="flat" cmpd="sng" algn="ctr">
-          <a:solidFill>
-            <a:schemeClr val="phClr">
-              <a:shade val="95000"/>
-              <a:satMod val="105000"/>
-            </a:schemeClr>
-          </a:solidFill>
-          <a:prstDash val="solid"/>
-        </a:ln>
-        <a:ln w="25400" cap="flat" cmpd="sng" algn="ctr">
+        <a:ln w="6350" cap="flat" cmpd="sng" algn="ctr">
           <a:solidFill>
             <a:schemeClr val="phClr"/>
           </a:solidFill>
           <a:prstDash val="solid"/>
+          <a:miter lim="800000"/>
         </a:ln>
-        <a:ln w="38100" cap="flat" cmpd="sng" algn="ctr">
+        <a:ln w="12700" cap="flat" cmpd="sng" algn="ctr">
           <a:solidFill>
             <a:schemeClr val="phClr"/>
           </a:solidFill>
           <a:prstDash val="solid"/>
+          <a:miter lim="800000"/>
+        </a:ln>
+        <a:ln w="19050" cap="flat" cmpd="sng" algn="ctr">
+          <a:solidFill>
+            <a:schemeClr val="phClr"/>
+          </a:solidFill>
+          <a:prstDash val="solid"/>
+          <a:miter lim="800000"/>
         </a:ln>
       </a:lnStyleLst>
       <a:effectStyleLst>
         <a:effectStyle>
+          <a:effectLst/>
+        </a:effectStyle>
+        <a:effectStyle>
+          <a:effectLst/>
+        </a:effectStyle>
+        <a:effectStyle>
           <a:effectLst>
-            <a:outerShdw blurRad="40000" dist="20000" dir="5400000" rotWithShape="0">
+            <a:outerShdw blurRad="57150" dist="19050" dir="5400000" algn="ctr" rotWithShape="0">
               <a:srgbClr val="000000">
-                <a:alpha val="38000"/>
+                <a:alpha val="63000"/>
               </a:srgbClr>
             </a:outerShdw>
           </a:effectLst>
-        </a:effectStyle>
-        <a:effectStyle>
-          <a:effectLst>
-            <a:outerShdw blurRad="40000" dist="23000" dir="5400000" rotWithShape="0">
-              <a:srgbClr val="000000">
-                <a:alpha val="35000"/>
-              </a:srgbClr>
-            </a:outerShdw>
-          </a:effectLst>
-        </a:effectStyle>
-        <a:effectStyle>
-          <a:effectLst>
-            <a:outerShdw blurRad="40000" dist="23000" dir="5400000" rotWithShape="0">
-              <a:srgbClr val="000000">
-                <a:alpha val="35000"/>
-              </a:srgbClr>
-            </a:outerShdw>
-          </a:effectLst>
-          <a:scene3d>
-            <a:camera prst="orthographicFront">
-              <a:rot lat="0" lon="0" rev="0"/>
-            </a:camera>
-            <a:lightRig rig="threePt" dir="t">
-              <a:rot lat="0" lon="0" rev="1200000"/>
-            </a:lightRig>
-          </a:scene3d>
-          <a:sp3d>
-            <a:bevelT w="63500" h="25400"/>
-          </a:sp3d>
         </a:effectStyle>
       </a:effectStyleLst>
       <a:bgFillStyleLst>
         <a:solidFill>
           <a:schemeClr val="phClr"/>
         </a:solidFill>
+        <a:solidFill>
+          <a:schemeClr val="phClr">
+            <a:tint val="95000"/>
+            <a:satMod val="170000"/>
+          </a:schemeClr>
+        </a:solidFill>
         <a:gradFill rotWithShape="1">
           <a:gsLst>
             <a:gs pos="0">
               <a:schemeClr val="phClr">
-                <a:tint val="40000"/>
-                <a:satMod val="350000"/>
+                <a:tint val="93000"/>
+                <a:satMod val="150000"/>
+                <a:shade val="98000"/>
+                <a:lumMod val="102000"/>
               </a:schemeClr>
             </a:gs>
-            <a:gs pos="40000">
+            <a:gs pos="50000">
               <a:schemeClr val="phClr">
-                <a:tint val="45000"/>
-                <a:shade val="99000"/>
-                <a:satMod val="350000"/>
+                <a:tint val="98000"/>
+                <a:satMod val="130000"/>
+                <a:shade val="90000"/>
+                <a:lumMod val="103000"/>
               </a:schemeClr>
             </a:gs>
             <a:gs pos="100000">
               <a:schemeClr val="phClr">
-                <a:shade val="20000"/>
-                <a:satMod val="255000"/>
+                <a:shade val="63000"/>
+                <a:satMod val="120000"/>
               </a:schemeClr>
             </a:gs>
           </a:gsLst>
-          <a:path path="circle">
-            <a:fillToRect l="50000" t="-80000" r="50000" b="180000"/>
-          </a:path>
-        </a:gradFill>
-        <a:gradFill rotWithShape="1">
-          <a:gsLst>
-            <a:gs pos="0">
-              <a:schemeClr val="phClr">
-                <a:tint val="80000"/>
-                <a:satMod val="300000"/>
-              </a:schemeClr>
-            </a:gs>
-            <a:gs pos="100000">
-              <a:schemeClr val="phClr">
-                <a:shade val="30000"/>
-                <a:satMod val="200000"/>
-              </a:schemeClr>
-            </a:gs>
-          </a:gsLst>
-          <a:path path="circle">
-            <a:fillToRect l="50000" t="50000" r="50000" b="50000"/>
-          </a:path>
+          <a:lin ang="5400000" scaled="0"/>
         </a:gradFill>
       </a:bgFillStyleLst>
     </a:fmtScheme>
   </a:themeElements>
-  <a:objectDefaults>
-    <a:spDef>
-      <a:spPr/>
-      <a:bodyPr/>
-      <a:lstStyle/>
-      <a:style>
-        <a:lnRef idx="1">
-          <a:schemeClr val="accent1"/>
-        </a:lnRef>
-        <a:fillRef idx="3">
-          <a:schemeClr val="accent1"/>
-        </a:fillRef>
-        <a:effectRef idx="2">
-          <a:schemeClr val="accent1"/>
-        </a:effectRef>
-        <a:fontRef idx="minor">
-          <a:schemeClr val="lt1"/>
-        </a:fontRef>
-      </a:style>
-    </a:spDef>
-    <a:lnDef>
-      <a:spPr/>
-      <a:bodyPr/>
-      <a:lstStyle/>
-      <a:style>
-        <a:lnRef idx="2">
-          <a:schemeClr val="accent1"/>
-        </a:lnRef>
-        <a:fillRef idx="0">
-          <a:schemeClr val="accent1"/>
-        </a:fillRef>
-        <a:effectRef idx="1">
-          <a:schemeClr val="accent1"/>
-        </a:effectRef>
-        <a:fontRef idx="minor">
-          <a:schemeClr val="tx1"/>
-        </a:fontRef>
-      </a:style>
-    </a:lnDef>
-  </a:objectDefaults>
+  <a:objectDefaults/>
   <a:extraClrSchemeLst/>
+  <a:extLst>
+    <a:ext uri="{05A4C25C-085E-4340-85A3-A5531E510DB2}">
+      <thm15:themeFamily xmlns:thm15="http://schemas.microsoft.com/office/thememl/2012/main" name="Office 2013 - 2022 Theme" id="{62F939B6-93AF-4DB8-9C6B-D6C7DFDC589F}" vid="{4F46216B-77A9-411A-B9D3-5023FCB70208}"/>
+    </a:ext>
+  </a:extLst>
 </a:theme>
 </file>